--- a/Conversation-Practice-Executive-Demo.pptx
+++ b/Conversation-Practice-Executive-Demo.pptx
@@ -2,21 +2,21 @@
 <file path=ppt/presentation.xml><?xml version="1.0" encoding="utf-8"?>
 <p:presentation xmlns:p="http://schemas.openxmlformats.org/presentationml/2006/main">
   <p:sldMasterIdLst>
-    <p:sldMasterId xmlns:r="http://schemas.openxmlformats.org/officeDocument/2006/relationships" id="2147483648" r:id="R73e0248c33c44148"/>
+    <p:sldMasterId xmlns:r="http://schemas.openxmlformats.org/officeDocument/2006/relationships" id="2147483648" r:id="R4b68f5c6cbf34f30"/>
   </p:sldMasterIdLst>
   <p:notesMasterIdLst>
-    <p:notesMasterId xmlns:r="http://schemas.openxmlformats.org/officeDocument/2006/relationships" r:id="Rfbe77deb5f064cd0"/>
+    <p:notesMasterId xmlns:r="http://schemas.openxmlformats.org/officeDocument/2006/relationships" r:id="R56402da768964d75"/>
   </p:notesMasterIdLst>
   <p:sldIdLst>
-    <p:sldId xmlns:r="http://schemas.openxmlformats.org/officeDocument/2006/relationships" id="256" r:id="Rbb48947bb2654101"/>
-    <p:sldId xmlns:r="http://schemas.openxmlformats.org/officeDocument/2006/relationships" id="257" r:id="Rcd3069950eab4069"/>
-    <p:sldId xmlns:r="http://schemas.openxmlformats.org/officeDocument/2006/relationships" id="258" r:id="R70650603269141c6"/>
-    <p:sldId xmlns:r="http://schemas.openxmlformats.org/officeDocument/2006/relationships" id="259" r:id="R9110a3b122284c18"/>
-    <p:sldId xmlns:r="http://schemas.openxmlformats.org/officeDocument/2006/relationships" id="260" r:id="R1e14056739a74dcd"/>
-    <p:sldId xmlns:r="http://schemas.openxmlformats.org/officeDocument/2006/relationships" id="261" r:id="Rc7a5b625e46446d1"/>
-    <p:sldId xmlns:r="http://schemas.openxmlformats.org/officeDocument/2006/relationships" id="262" r:id="R3638f3d0390d4106"/>
-    <p:sldId xmlns:r="http://schemas.openxmlformats.org/officeDocument/2006/relationships" id="263" r:id="R5d43dbb87fde4717"/>
-    <p:sldId xmlns:r="http://schemas.openxmlformats.org/officeDocument/2006/relationships" id="264" r:id="R5391e6e00b494a0b"/>
+    <p:sldId xmlns:r="http://schemas.openxmlformats.org/officeDocument/2006/relationships" id="256" r:id="Rcf35b04b1e9d4bc9"/>
+    <p:sldId xmlns:r="http://schemas.openxmlformats.org/officeDocument/2006/relationships" id="257" r:id="Rcfa91863cd154c32"/>
+    <p:sldId xmlns:r="http://schemas.openxmlformats.org/officeDocument/2006/relationships" id="258" r:id="R077ac3c1073c41fd"/>
+    <p:sldId xmlns:r="http://schemas.openxmlformats.org/officeDocument/2006/relationships" id="259" r:id="R67b069bc62c641e7"/>
+    <p:sldId xmlns:r="http://schemas.openxmlformats.org/officeDocument/2006/relationships" id="260" r:id="Rb8a9789140674300"/>
+    <p:sldId xmlns:r="http://schemas.openxmlformats.org/officeDocument/2006/relationships" id="261" r:id="R77d98845315340db"/>
+    <p:sldId xmlns:r="http://schemas.openxmlformats.org/officeDocument/2006/relationships" id="262" r:id="R6d5b7e0518bd4060"/>
+    <p:sldId xmlns:r="http://schemas.openxmlformats.org/officeDocument/2006/relationships" id="263" r:id="R2b6735bf2e28443f"/>
+    <p:sldId xmlns:r="http://schemas.openxmlformats.org/officeDocument/2006/relationships" id="264" r:id="R3681624d4e4444b4"/>
   </p:sldIdLst>
   <p:sldSz cx="12192000" cy="6858000"/>
   <p:notesSz cx="6858000" cy="9144000"/>
@@ -450,7 +450,57 @@
           <a:lstStyle xmlns:a="http://schemas.openxmlformats.org/drawingml/2006/main"/>
           <a:p xmlns:a="http://schemas.openxmlformats.org/drawingml/2006/main">
             <a:r>
-              <a:t>Timing: about 1 minute.</a:t>
+              <a:t>Timing: about 1 minute. Target 23–26 minutes for the prepared presentation, leaving the balance of the roughly 40-minute session for questions.</a:t>
+            </a:r>
+          </a:p>
+          <a:p xmlns:a="http://schemas.openxmlformats.org/drawingml/2006/main">
+            <a:r>
+              <a:t/>
+            </a:r>
+          </a:p>
+          <a:p xmlns:a="http://schemas.openxmlformats.org/drawingml/2006/main">
+            <a:r>
+              <a:t>PRESENTER PREFLIGHT — LIVE EDITOR</a:t>
+            </a:r>
+          </a:p>
+          <a:p xmlns:a="http://schemas.openxmlformats.org/drawingml/2006/main">
+            <a:r>
+              <a:t>- Use editor Presentation Mode or an 18–22 pt font. Hide the sidebar, terminal, minimap, breadcrumbs, and autocomplete overlays.</a:t>
+            </a:r>
+          </a:p>
+          <a:p xmlns:a="http://schemas.openxmlformats.org/drawingml/2006/main">
+            <a:r>
+              <a:t>- Pre-open and position four tabs before sharing the screen:</a:t>
+            </a:r>
+          </a:p>
+          <a:p xmlns:a="http://schemas.openxmlformats.org/drawingml/2006/main">
+            <a:r>
+              <a:t>  1. src/scenario.ts at characterBrief / privateProfile / behaviourRules / gate (around lines 104–154).</a:t>
+            </a:r>
+          </a:p>
+          <a:p xmlns:a="http://schemas.openxmlformats.org/drawingml/2006/main">
+            <a:r>
+              <a:t>  2. src/server/realtime.ts at buildPersonaInstructions and the session configuration (around lines 31–61 and 83–109).</a:t>
+            </a:r>
+          </a:p>
+          <a:p xmlns:a="http://schemas.openxmlformats.org/drawingml/2006/main">
+            <a:r>
+              <a:t>  3. src/server/assessment.ts at assessmentInstructions and the request/schema (around lines 208–235 and 355–366).</a:t>
+            </a:r>
+          </a:p>
+          <a:p xmlns:a="http://schemas.openxmlformats.org/drawingml/2006/main">
+            <a:r>
+              <a:t>  4. src/server/feedback.ts at feedbackInstructions and the request input (around lines 15–25 and 37–42).</a:t>
+            </a:r>
+          </a:p>
+          <a:p xmlns:a="http://schemas.openxmlformats.org/drawingml/2006/main">
+            <a:r>
+              <a:t>- Collapse imports, helper implementations, and tests. The audience should see only the authored contracts described in the talk track.</a:t>
+            </a:r>
+          </a:p>
+          <a:p xmlns:a="http://schemas.openxmlformats.org/drawingml/2006/main">
+            <a:r>
+              <a:t>- Keep the running demo in a separate pre-positioned window. Verify that returning to the slideshow does not move it onto the projected display.</a:t>
             </a:r>
           </a:p>
           <a:p xmlns:a="http://schemas.openxmlformats.org/drawingml/2006/main">
@@ -875,7 +925,7 @@
           <a:lstStyle xmlns:a="http://schemas.openxmlformats.org/drawingml/2006/main"/>
           <a:p xmlns:a="http://schemas.openxmlformats.org/drawingml/2006/main">
             <a:r>
-              <a:t>Timing: about 2½ minutes.</a:t>
+              <a:t>Timing: about 4–4½ minutes, including live code stop 1.</a:t>
             </a:r>
           </a:p>
           <a:p xmlns:a="http://schemas.openxmlformats.org/drawingml/2006/main">
@@ -945,7 +995,107 @@
           </a:p>
           <a:p xmlns:a="http://schemas.openxmlformats.org/drawingml/2006/main">
             <a:r>
-              <a:t>Transition: “Once the Attempt ends, the system has to separate judgment from coaching.”</a:t>
+              <a:t>LIVE CODE STOP 1 — AUTHORED PERSONA AND CONVERSATION (about 2 minutes)</a:t>
+            </a:r>
+          </a:p>
+          <a:p xmlns:a="http://schemas.openxmlformats.org/drawingml/2006/main">
+            <a:r>
+              <a:t/>
+            </a:r>
+          </a:p>
+          <a:p xmlns:a="http://schemas.openxmlformats.org/drawingml/2006/main">
+            <a:r>
+              <a:t>Exact transition out of the slide:</a:t>
+            </a:r>
+          </a:p>
+          <a:p xmlns:a="http://schemas.openxmlformats.org/drawingml/2006/main">
+            <a:r>
+              <a:t>“The slide shows the behavioral sequence. Let me show you where that sequence actually lives.”</a:t>
+            </a:r>
+          </a:p>
+          <a:p xmlns:a="http://schemas.openxmlformats.org/drawingml/2006/main">
+            <a:r>
+              <a:t/>
+            </a:r>
+          </a:p>
+          <a:p xmlns:a="http://schemas.openxmlformats.org/drawingml/2006/main">
+            <a:r>
+              <a:t>Switch to src/scenario.ts. Do not scroll through the file; move among the prepared positions.</a:t>
+            </a:r>
+          </a:p>
+          <a:p xmlns:a="http://schemas.openxmlformats.org/drawingml/2006/main">
+            <a:r>
+              <a:t>- characterBrief, voice, and openingLine: Jordan’s role, sound, and opening are authored explicitly.</a:t>
+            </a:r>
+          </a:p>
+          <a:p xmlns:a="http://schemas.openxmlformats.org/drawingml/2006/main">
+            <a:r>
+              <a:t>- privateProfile: the cover story and the real experience are separate ground truth. The Trainee never sees this field.</a:t>
+            </a:r>
+          </a:p>
+          <a:p xmlns:a="http://schemas.openxmlformats.org/drawingml/2006/main">
+            <a:r>
+              <a:t>- behaviourRules: the first reason is always price; only a subsequent genuinely open invitation unlocks the prior incident; a weak acknowledgment receives resistance, not coaching hints.</a:t>
+            </a:r>
+          </a:p>
+          <a:p xmlns:a="http://schemas.openxmlformats.org/drawingml/2006/main">
+            <a:r>
+              <a:t>- gate: Jordan warms only after the rushed, dismissive interaction and its effect have been acknowledged without excuses, blame, or an immediate solution.</a:t>
+            </a:r>
+          </a:p>
+          <a:p xmlns:a="http://schemas.openxmlformats.org/drawingml/2006/main">
+            <a:r>
+              <a:t/>
+            </a:r>
+          </a:p>
+          <a:p xmlns:a="http://schemas.openxmlformats.org/drawingml/2006/main">
+            <a:r>
+              <a:t>Say: “The model has expressive freedom inside a deliberately authored Scenario. The learning objective controls what Jordan can reveal and what behavior changes the conversation.”</a:t>
+            </a:r>
+          </a:p>
+          <a:p xmlns:a="http://schemas.openxmlformats.org/drawingml/2006/main">
+            <a:r>
+              <a:t/>
+            </a:r>
+          </a:p>
+          <a:p xmlns:a="http://schemas.openxmlformats.org/drawingml/2006/main">
+            <a:r>
+              <a:t>Switch to src/server/realtime.ts.</a:t>
+            </a:r>
+          </a:p>
+          <a:p xmlns:a="http://schemas.openxmlformats.org/drawingml/2006/main">
+            <a:r>
+              <a:t>- buildPersonaInstructions orders the Scenario’s authored prose; it is not a second hidden personality prompt.</a:t>
+            </a:r>
+          </a:p>
+          <a:p xmlns:a="http://schemas.openxmlformats.org/drawingml/2006/main">
+            <a:r>
+              <a:t>- Point briefly to the realtime model, audio-only output, selected voice, semantic turn detection, and governed hang-up tool.</a:t>
+            </a:r>
+          </a:p>
+          <a:p xmlns:a="http://schemas.openxmlformats.org/drawingml/2006/main">
+            <a:r>
+              <a:t/>
+            </a:r>
+          </a:p>
+          <a:p xmlns:a="http://schemas.openxmlformats.org/drawingml/2006/main">
+            <a:r>
+              <a:t>Say: “This file does not invent Jordan’s personality. It carries the authored Scenario into a realtime voice session.”</a:t>
+            </a:r>
+          </a:p>
+          <a:p xmlns:a="http://schemas.openxmlformats.org/drawingml/2006/main">
+            <a:r>
+              <a:t/>
+            </a:r>
+          </a:p>
+          <a:p xmlns:a="http://schemas.openxmlformats.org/drawingml/2006/main">
+            <a:r>
+              <a:t>Return to the slideshow.</a:t>
+            </a:r>
+          </a:p>
+          <a:p xmlns:a="http://schemas.openxmlformats.org/drawingml/2006/main">
+            <a:r>
+              <a:t>Transition: “Once the Persona can create the right pressure, the system has to judge the Trainee separately.”</a:t>
             </a:r>
           </a:p>
           <a:p xmlns:a="http://schemas.openxmlformats.org/drawingml/2006/main">
@@ -961,6 +1111,11 @@
           <a:p xmlns:a="http://schemas.openxmlformats.org/drawingml/2006/main">
             <a:r>
               <a:t>- Repository: src/scenario.ts</a:t>
+            </a:r>
+          </a:p>
+          <a:p xmlns:a="http://schemas.openxmlformats.org/drawingml/2006/main">
+            <a:r>
+              <a:t>- Repository: src/server/realtime.ts</a:t>
             </a:r>
           </a:p>
           <a:p xmlns:a="http://schemas.openxmlformats.org/drawingml/2006/main">
@@ -1035,7 +1190,7 @@
           <a:lstStyle xmlns:a="http://schemas.openxmlformats.org/drawingml/2006/main"/>
           <a:p xmlns:a="http://schemas.openxmlformats.org/drawingml/2006/main">
             <a:r>
-              <a:t>Timing: about 2 minutes.</a:t>
+              <a:t>Timing: about 4–4½ minutes, including live code stop 2.</a:t>
             </a:r>
           </a:p>
           <a:p xmlns:a="http://schemas.openxmlformats.org/drawingml/2006/main">
@@ -1105,7 +1260,132 @@
           </a:p>
           <a:p xmlns:a="http://schemas.openxmlformats.org/drawingml/2006/main">
             <a:r>
-              <a:t>Transition: “Rather than explain the loop further, I’ll let you watch it work.”</a:t>
+              <a:t>LIVE CODE STOP 2 — GRADING AND COACHING CONTRACTS (about 2–2½ minutes)</a:t>
+            </a:r>
+          </a:p>
+          <a:p xmlns:a="http://schemas.openxmlformats.org/drawingml/2006/main">
+            <a:r>
+              <a:t/>
+            </a:r>
+          </a:p>
+          <a:p xmlns:a="http://schemas.openxmlformats.org/drawingml/2006/main">
+            <a:r>
+              <a:t>Exact transition out of the slide:</a:t>
+            </a:r>
+          </a:p>
+          <a:p xmlns:a="http://schemas.openxmlformats.org/drawingml/2006/main">
+            <a:r>
+              <a:t>“That was the conversation side. Now let me show you the assessment contract.”</a:t>
+            </a:r>
+          </a:p>
+          <a:p xmlns:a="http://schemas.openxmlformats.org/drawingml/2006/main">
+            <a:r>
+              <a:t/>
+            </a:r>
+          </a:p>
+          <a:p xmlns:a="http://schemas.openxmlformats.org/drawingml/2006/main">
+            <a:r>
+              <a:t>Switch to src/scenario.ts at the Rubric.</a:t>
+            </a:r>
+          </a:p>
+          <a:p xmlns:a="http://schemas.openxmlformats.org/drawingml/2006/main">
+            <a:r>
+              <a:t>- Point to the six stable criterion descriptions and the assessmentGuidance paired with each one.</a:t>
+            </a:r>
+          </a:p>
+          <a:p xmlns:a="http://schemas.openxmlformats.org/drawingml/2006/main">
+            <a:r>
+              <a:t>- Explain that the Private Profile defines ground truth for the real reason, while the Transcript is the only evidence of what happened during an Attempt.</a:t>
+            </a:r>
+          </a:p>
+          <a:p xmlns:a="http://schemas.openxmlformats.org/drawingml/2006/main">
+            <a:r>
+              <a:t/>
+            </a:r>
+          </a:p>
+          <a:p xmlns:a="http://schemas.openxmlformats.org/drawingml/2006/main">
+            <a:r>
+              <a:t>Switch to src/server/assessment.ts at assessmentInstructions.</a:t>
+            </a:r>
+          </a:p>
+          <a:p xmlns:a="http://schemas.openxmlformats.org/drawingml/2006/main">
+            <a:r>
+              <a:t>- One binary verdict is required for every criterion.</a:t>
+            </a:r>
+          </a:p>
+          <a:p xmlns:a="http://schemas.openxmlformats.org/drawingml/2006/main">
+            <a:r>
+              <a:t>- A met verdict requires an exact contiguous Transcript quote and its turn index.</a:t>
+            </a:r>
+          </a:p>
+          <a:p xmlns:a="http://schemas.openxmlformats.org/drawingml/2006/main">
+            <a:r>
+              <a:t>- A failed criterion normally requires a Trainee quote; when the conversation never reached the relevant moment, the correct evidence is no qualifying Trainee moment.</a:t>
+            </a:r>
+          </a:p>
+          <a:p xmlns:a="http://schemas.openxmlformats.org/drawingml/2006/main">
+            <a:r>
+              <a:t>- The grader cannot borrow a Persona line to prove what the Trainee failed to do.</a:t>
+            </a:r>
+          </a:p>
+          <a:p xmlns:a="http://schemas.openxmlformats.org/drawingml/2006/main">
+            <a:r>
+              <a:t/>
+            </a:r>
+          </a:p>
+          <a:p xmlns:a="http://schemas.openxmlformats.org/drawingml/2006/main">
+            <a:r>
+              <a:t>Move to the prepared request block without touring helper functions.</a:t>
+            </a:r>
+          </a:p>
+          <a:p xmlns:a="http://schemas.openxmlformats.org/drawingml/2006/main">
+            <a:r>
+              <a:t>- Point to the separate assessment model, the input containing only Transcript, Rubric, and Private Profile, and the strict structured-output schema.</a:t>
+            </a:r>
+          </a:p>
+          <a:p xmlns:a="http://schemas.openxmlformats.org/drawingml/2006/main">
+            <a:r>
+              <a:t/>
+            </a:r>
+          </a:p>
+          <a:p xmlns:a="http://schemas.openxmlformats.org/drawingml/2006/main">
+            <a:r>
+              <a:t>Switch to src/server/feedback.ts.</a:t>
+            </a:r>
+          </a:p>
+          <a:p xmlns:a="http://schemas.openxmlformats.org/drawingml/2006/main">
+            <a:r>
+              <a:t>- The Assessment verdicts are fixed and cannot be re-opened.</a:t>
+            </a:r>
+          </a:p>
+          <a:p xmlns:a="http://schemas.openxmlformats.org/drawingml/2006/main">
+            <a:r>
+              <a:t>- Feedback receives only the Assessment and Transcript and turns the result into a specific next move.</a:t>
+            </a:r>
+          </a:p>
+          <a:p xmlns:a="http://schemas.openxmlformats.org/drawingml/2006/main">
+            <a:r>
+              <a:t/>
+            </a:r>
+          </a:p>
+          <a:p xmlns:a="http://schemas.openxmlformats.org/drawingml/2006/main">
+            <a:r>
+              <a:t>Say: “The Persona creates pressure. Assessment applies the standard. Feedback translates judgment into coaching. No component gets all three jobs.”</a:t>
+            </a:r>
+          </a:p>
+          <a:p xmlns:a="http://schemas.openxmlformats.org/drawingml/2006/main">
+            <a:r>
+              <a:t/>
+            </a:r>
+          </a:p>
+          <a:p xmlns:a="http://schemas.openxmlformats.org/drawingml/2006/main">
+            <a:r>
+              <a:t>Return to the slideshow and advance to the live-demonstration slide.</a:t>
+            </a:r>
+          </a:p>
+          <a:p xmlns:a="http://schemas.openxmlformats.org/drawingml/2006/main">
+            <a:r>
+              <a:t>Transition: “You have now seen both contracts in the code. Let’s watch them interact in two Attempts against the same Scenario and the same Rubric.”</a:t>
             </a:r>
           </a:p>
           <a:p xmlns:a="http://schemas.openxmlformats.org/drawingml/2006/main">
@@ -1136,6 +1416,11 @@
           <a:p xmlns:a="http://schemas.openxmlformats.org/drawingml/2006/main">
             <a:r>
               <a:t>- Repository: src/attempt-comparison.ts</a:t>
+            </a:r>
+          </a:p>
+          <a:p xmlns:a="http://schemas.openxmlformats.org/drawingml/2006/main">
+            <a:r>
+              <a:t>- Repository: src/scenario.ts</a:t>
             </a:r>
           </a:p>
           <a:p xmlns:a="http://schemas.openxmlformats.org/drawingml/2006/main">
@@ -1225,7 +1510,7 @@
           </a:p>
           <a:p xmlns:a="http://schemas.openxmlformats.org/drawingml/2006/main">
             <a:r>
-              <a:t>“You’ve seen how the Scenario is designed and how an Attempt becomes coaching. Now I’m going to leave the deck and let you watch the learning loop end to end. Listen for one contrast: solving before understanding versus staying curious.”</a:t>
+              <a:t>“You have seen the authored Persona, the stable Rubric, and the separate grading and coaching contracts. Now I’m going to leave the deck and let you watch that system run end to end. Listen for one contrast: solving before understanding versus staying curious.”</a:t>
             </a:r>
           </a:p>
           <a:p xmlns:a="http://schemas.openxmlformats.org/drawingml/2006/main">
@@ -1580,7 +1865,7 @@
           <a:lstStyle xmlns:a="http://schemas.openxmlformats.org/drawingml/2006/main"/>
           <a:p xmlns:a="http://schemas.openxmlformats.org/drawingml/2006/main">
             <a:r>
-              <a:t>Timing: about 2 minutes.</a:t>
+              <a:t>Timing: about 2–2½ minutes.</a:t>
             </a:r>
           </a:p>
           <a:p xmlns:a="http://schemas.openxmlformats.org/drawingml/2006/main">
@@ -1650,6 +1935,46 @@
           </a:p>
           <a:p xmlns:a="http://schemas.openxmlformats.org/drawingml/2006/main">
             <a:r>
+              <a:t>TECHNICAL SYNTHESIS — keep this concise because the code contracts were already shown:</a:t>
+            </a:r>
+          </a:p>
+          <a:p xmlns:a="http://schemas.openxmlformats.org/drawingml/2006/main">
+            <a:r>
+              <a:t>- scenario.ts is curriculum: it defines the Persona, disclosure logic, Gate, and stable Rubric.</a:t>
+            </a:r>
+          </a:p>
+          <a:p xmlns:a="http://schemas.openxmlformats.org/drawingml/2006/main">
+            <a:r>
+              <a:t>- the realtime model is the participant, not the judge.</a:t>
+            </a:r>
+          </a:p>
+          <a:p xmlns:a="http://schemas.openxmlformats.org/drawingml/2006/main">
+            <a:r>
+              <a:t>- Assessment is a separate judge with constrained inputs and strict output.</a:t>
+            </a:r>
+          </a:p>
+          <a:p xmlns:a="http://schemas.openxmlformats.org/drawingml/2006/main">
+            <a:r>
+              <a:t>- Feedback is a separate coach that cannot revise verdicts.</a:t>
+            </a:r>
+          </a:p>
+          <a:p xmlns:a="http://schemas.openxmlformats.org/drawingml/2006/main">
+            <a:r>
+              <a:t/>
+            </a:r>
+          </a:p>
+          <a:p xmlns:a="http://schemas.openxmlformats.org/drawingml/2006/main">
+            <a:r>
+              <a:t>Do not reopen the editor by default. Return to code only if a question requires it; the prepared tabs are the technical appendix for Q&amp;A.</a:t>
+            </a:r>
+          </a:p>
+          <a:p xmlns:a="http://schemas.openxmlformats.org/drawingml/2006/main">
+            <a:r>
+              <a:t/>
+            </a:r>
+          </a:p>
+          <a:p xmlns:a="http://schemas.openxmlformats.org/drawingml/2006/main">
+            <a:r>
               <a:t>Transition: “Customer conversations are the first place to apply this learning loop—not the boundary of it.”</a:t>
             </a:r>
           </a:p>
@@ -1686,6 +2011,16 @@
           <a:p xmlns:a="http://schemas.openxmlformats.org/drawingml/2006/main">
             <a:r>
               <a:t>- Verified Attempt 37 and Attempt 38 evidence supplied in the delegated brief</a:t>
+            </a:r>
+          </a:p>
+          <a:p xmlns:a="http://schemas.openxmlformats.org/drawingml/2006/main">
+            <a:r>
+              <a:t>- Repository: src/scenario.ts</a:t>
+            </a:r>
+          </a:p>
+          <a:p xmlns:a="http://schemas.openxmlformats.org/drawingml/2006/main">
+            <a:r>
+              <a:t>- Repository: src/server/realtime.ts</a:t>
             </a:r>
           </a:p>
           <a:p xmlns:a="http://schemas.openxmlformats.org/drawingml/2006/main">
@@ -1880,7 +2215,7 @@
           <a:lstStyle xmlns:a="http://schemas.openxmlformats.org/drawingml/2006/main"/>
           <a:p xmlns:a="http://schemas.openxmlformats.org/drawingml/2006/main">
             <a:r>
-              <a:t>Timing: about 1½ minutes, leaving room for questions inside the 20-minute slot.</a:t>
+              <a:t>Timing: about 1½ minutes. Aim to finish prepared material around minute 24–27 of the roughly 40-minute session, then leave the remaining time for questions.</a:t>
             </a:r>
           </a:p>
           <a:p xmlns:a="http://schemas.openxmlformats.org/drawingml/2006/main">
@@ -1976,6 +2311,21 @@
           <a:p xmlns:a="http://schemas.openxmlformats.org/drawingml/2006/main">
             <a:r>
               <a:t>Do not end with “Thank you,” a formal request, or an explicit API-access ask.</a:t>
+            </a:r>
+          </a:p>
+          <a:p xmlns:a="http://schemas.openxmlformats.org/drawingml/2006/main">
+            <a:r>
+              <a:t/>
+            </a:r>
+          </a:p>
+          <a:p xmlns:a="http://schemas.openxmlformats.org/drawingml/2006/main">
+            <a:r>
+              <a:t>Q&amp;A handoff: pause after the final line and ask, “Where would you like to go deeper—the Scenario design, the grading contract, or what transfer validation would require?”</a:t>
+            </a:r>
+          </a:p>
+          <a:p xmlns:a="http://schemas.openxmlformats.org/drawingml/2006/main">
+            <a:r>
+              <a:t>Use the four prepared editor tabs as the technical appendix. Open code only in response to the question being answered; do not restart the full tour.</a:t>
             </a:r>
           </a:p>
           <a:p xmlns:a="http://schemas.openxmlformats.org/drawingml/2006/main">
@@ -2088,7 +2438,7 @@
   </p:cSld>
   <p:clrMap bg1="lt1" tx1="dk1" bg2="lt2" tx2="dk2" accent1="accent1" accent2="accent2" accent3="accent3" accent4="accent4" accent5="accent5" accent6="accent6" hlink="hlink" folHlink="folHlink"/>
   <p:sldLayoutIdLst>
-    <p:sldLayoutId xmlns:r="http://schemas.openxmlformats.org/officeDocument/2006/relationships" id="2147483649" r:id="R1b999a90252a47af"/>
+    <p:sldLayoutId xmlns:r="http://schemas.openxmlformats.org/officeDocument/2006/relationships" id="2147483649" r:id="R782930005f22476c"/>
   </p:sldLayoutIdLst>
   <p:txStyles>
     <p:titleStyle>
@@ -3119,7 +3469,7 @@
         <p:spPr>
           <a:xfrm xmlns:a="http://schemas.openxmlformats.org/drawingml/2006/main">
             <a:off x="609600" y="400050"/>
-            <a:ext cx="10972800" cy="1066800"/>
+            <a:ext cx="10972800" cy="685800"/>
           </a:xfrm>
           <a:prstGeom xmlns:a="http://schemas.openxmlformats.org/drawingml/2006/main" prst="rect">
             <a:avLst/>
@@ -3140,7 +3490,7 @@
         </p:spPr>
         <p:txBody>
           <a:bodyPr xmlns:a="http://schemas.openxmlformats.org/drawingml/2006/main" wrap="square" lIns="0" tIns="0" rIns="0" bIns="0" anchor="t">
-            <a:normAutofit fontScale="100000"/>
+            <a:noAutofit/>
           </a:bodyPr>
           <a:lstStyle xmlns:a="http://schemas.openxmlformats.org/drawingml/2006/main"/>
           <a:p xmlns:a="http://schemas.openxmlformats.org/drawingml/2006/main">
@@ -3167,34 +3517,7 @@
                 <a:ea typeface="Aptos Display"/>
                 <a:cs typeface="Aptos Display"/>
               </a:rPr>
-              <a:t>Most difficult conversations are first attempted</a:t>
-            </a:r>
-          </a:p>
-          <a:p xmlns:a="http://schemas.openxmlformats.org/drawingml/2006/main">
-            <a:pPr algn="l">
-              <a:lnSpc>
-                <a:spcPct val="93000"/>
-              </a:lnSpc>
-              <a:buNone/>
-              <a:defRPr sz="3600" b="1" i="0">
-                <a:solidFill>
-                  <a:srgbClr val="17222F"/>
-                </a:solidFill>
-                <a:latin typeface="Aptos Display"/>
-                <a:ea typeface="Aptos Display"/>
-                <a:cs typeface="Aptos Display"/>
-              </a:defRPr>
-            </a:pPr>
-            <a:r>
-              <a:rPr sz="3600" b="1" i="0">
-                <a:solidFill>
-                  <a:srgbClr val="17222F"/>
-                </a:solidFill>
-                <a:latin typeface="Aptos Display"/>
-                <a:ea typeface="Aptos Display"/>
-                <a:cs typeface="Aptos Display"/>
-              </a:rPr>
-              <a:t>when the stakes are real</a:t>
+              <a:t>Advice cannot recreate resistance.</a:t>
             </a:r>
           </a:p>
         </p:txBody>
@@ -3236,10 +3559,10 @@
       </p:sp>
       <p:sp>
         <p:nvSpPr>
-          <p:cNvPr id="3" name="stakes-lead">
+          <p:cNvPr id="6" name="stakes-label-0">
             <a:extLst xmlns:a="http://schemas.openxmlformats.org/drawingml/2006/main">
               <a:ext uri="{FF2B5EF4-FFF2-40B4-BE49-F238E27FC236}">
-                <a16:creationId xmlns:a16="http://schemas.microsoft.com/office/drawing/2014/main" id="{51308447-7CF3-4035-9339-D7B0FF0037D9}"/>
+                <a16:creationId xmlns:a16="http://schemas.microsoft.com/office/drawing/2014/main" id="{4EFA388F-9E6D-4118-80AB-410A3D46F615}"/>
               </a:ext>
             </a:extLst>
           </p:cNvPr>
@@ -3250,8 +3573,8 @@
         </p:nvSpPr>
         <p:spPr>
           <a:xfrm xmlns:a="http://schemas.openxmlformats.org/drawingml/2006/main">
-            <a:off x="685800" y="1809750"/>
-            <a:ext cx="4762500" cy="552450"/>
+            <a:off x="685800" y="1866900"/>
+            <a:ext cx="10096500" cy="704850"/>
           </a:xfrm>
           <a:prstGeom xmlns:a="http://schemas.openxmlformats.org/drawingml/2006/main" prst="rect">
             <a:avLst/>
@@ -3271,8 +3594,8 @@
           </a:ln>
         </p:spPr>
         <p:txBody>
-          <a:bodyPr xmlns:a="http://schemas.openxmlformats.org/drawingml/2006/main" wrap="square" lIns="0" tIns="0" rIns="0" bIns="0" anchor="t">
-            <a:normAutofit fontScale="100000"/>
+          <a:bodyPr xmlns:a="http://schemas.openxmlformats.org/drawingml/2006/main" wrap="square" lIns="0" tIns="0" rIns="0" bIns="0" anchor="ctr">
+            <a:noAutofit/>
           </a:bodyPr>
           <a:lstStyle xmlns:a="http://schemas.openxmlformats.org/drawingml/2006/main"/>
           <a:p xmlns:a="http://schemas.openxmlformats.org/drawingml/2006/main">
@@ -3281,9 +3604,9 @@
                 <a:spcPct val="100000"/>
               </a:lnSpc>
               <a:buNone/>
-              <a:defRPr sz="2700" b="1" i="0">
-                <a:solidFill>
-                  <a:srgbClr val="162A3C"/>
+              <a:defRPr sz="3150" b="1" i="0">
+                <a:solidFill>
+                  <a:srgbClr val="2D6F6B"/>
                 </a:solidFill>
                 <a:latin typeface="Aptos Display"/>
                 <a:ea typeface="Aptos Display"/>
@@ -3291,25 +3614,25 @@
               </a:defRPr>
             </a:pPr>
             <a:r>
-              <a:rPr sz="2700" b="1" i="0">
-                <a:solidFill>
-                  <a:srgbClr val="162A3C"/>
+              <a:rPr sz="3150" b="1" i="0">
+                <a:solidFill>
+                  <a:srgbClr val="2D6F6B"/>
                 </a:solidFill>
                 <a:latin typeface="Aptos Display"/>
                 <a:ea typeface="Aptos Display"/>
                 <a:cs typeface="Aptos Display"/>
               </a:rPr>
-              <a:t>Advice can describe the move.</a:t>
+              <a:t>Decision pressure</a:t>
             </a:r>
           </a:p>
         </p:txBody>
       </p:sp>
       <p:sp>
         <p:nvSpPr>
-          <p:cNvPr id="4" name="stakes-counter">
+          <p:cNvPr id="8" name="stakes-rule-0">
             <a:extLst xmlns:a="http://schemas.openxmlformats.org/drawingml/2006/main">
               <a:ext uri="{FF2B5EF4-FFF2-40B4-BE49-F238E27FC236}">
-                <a16:creationId xmlns:a16="http://schemas.microsoft.com/office/drawing/2014/main" id="{0895089C-6336-4212-A104-BF6ABF284B52}"/>
+                <a16:creationId xmlns:a16="http://schemas.microsoft.com/office/drawing/2014/main" id="{49927478-B85C-46BA-B4B1-E93F6D2B4AEC}"/>
               </a:ext>
             </a:extLst>
           </p:cNvPr>
@@ -3320,8 +3643,43 @@
         </p:nvSpPr>
         <p:spPr>
           <a:xfrm xmlns:a="http://schemas.openxmlformats.org/drawingml/2006/main">
-            <a:off x="685800" y="2419350"/>
-            <a:ext cx="5334000" cy="1123950"/>
+            <a:off x="685800" y="2800350"/>
+            <a:ext cx="10820400" cy="0"/>
+          </a:xfrm>
+          <a:prstGeom xmlns:a="http://schemas.openxmlformats.org/drawingml/2006/main" prst="line">
+            <a:avLst/>
+          </a:prstGeom>
+          <a:solidFill xmlns:a="http://schemas.openxmlformats.org/drawingml/2006/main">
+            <a:srgbClr val="000000">
+              <a:alpha val="0"/>
+            </a:srgbClr>
+          </a:solidFill>
+          <a:ln xmlns:a="http://schemas.openxmlformats.org/drawingml/2006/main" w="9525">
+            <a:solidFill>
+              <a:srgbClr val="C8C0B3"/>
+            </a:solidFill>
+            <a:prstDash val="solid"/>
+          </a:ln>
+        </p:spPr>
+      </p:sp>
+      <p:sp>
+        <p:nvSpPr>
+          <p:cNvPr id="9" name="stakes-label-1">
+            <a:extLst xmlns:a="http://schemas.openxmlformats.org/drawingml/2006/main">
+              <a:ext uri="{FF2B5EF4-FFF2-40B4-BE49-F238E27FC236}">
+                <a16:creationId xmlns:a16="http://schemas.microsoft.com/office/drawing/2014/main" id="{6D91A1F5-675E-4049-88E9-672603F0EE80}"/>
+              </a:ext>
+            </a:extLst>
+          </p:cNvPr>
+          <p:cNvSpPr>
+            <a:spLocks xmlns:a="http://schemas.openxmlformats.org/drawingml/2006/main" noGrp="1"/>
+          </p:cNvSpPr>
+          <p:nvPr/>
+        </p:nvSpPr>
+        <p:spPr>
+          <a:xfrm xmlns:a="http://schemas.openxmlformats.org/drawingml/2006/main">
+            <a:off x="685800" y="3105150"/>
+            <a:ext cx="10096500" cy="704850"/>
           </a:xfrm>
           <a:prstGeom xmlns:a="http://schemas.openxmlformats.org/drawingml/2006/main" prst="rect">
             <a:avLst/>
@@ -3341,19 +3699,19 @@
           </a:ln>
         </p:spPr>
         <p:txBody>
-          <a:bodyPr xmlns:a="http://schemas.openxmlformats.org/drawingml/2006/main" wrap="square" lIns="0" tIns="0" rIns="0" bIns="0" anchor="t">
-            <a:normAutofit fontScale="100000"/>
+          <a:bodyPr xmlns:a="http://schemas.openxmlformats.org/drawingml/2006/main" wrap="square" lIns="0" tIns="0" rIns="0" bIns="0" anchor="ctr">
+            <a:noAutofit/>
           </a:bodyPr>
           <a:lstStyle xmlns:a="http://schemas.openxmlformats.org/drawingml/2006/main"/>
           <a:p xmlns:a="http://schemas.openxmlformats.org/drawingml/2006/main">
             <a:pPr algn="l">
               <a:lnSpc>
-                <a:spcPct val="95000"/>
+                <a:spcPct val="100000"/>
               </a:lnSpc>
               <a:buNone/>
               <a:defRPr sz="3150" b="1" i="0">
                 <a:solidFill>
-                  <a:srgbClr val="2D6F6B"/>
+                  <a:srgbClr val="C57A42"/>
                 </a:solidFill>
                 <a:latin typeface="Aptos Display"/>
                 <a:ea typeface="Aptos Display"/>
@@ -3363,50 +3721,23 @@
             <a:r>
               <a:rPr sz="3150" b="1" i="0">
                 <a:solidFill>
-                  <a:srgbClr val="2D6F6B"/>
+                  <a:srgbClr val="C57A42"/>
                 </a:solidFill>
                 <a:latin typeface="Aptos Display"/>
                 <a:ea typeface="Aptos Display"/>
                 <a:cs typeface="Aptos Display"/>
               </a:rPr>
-              <a:t>It cannot recreate the moment</a:t>
-            </a:r>
-          </a:p>
-          <a:p xmlns:a="http://schemas.openxmlformats.org/drawingml/2006/main">
-            <a:pPr algn="l">
-              <a:lnSpc>
-                <a:spcPct val="95000"/>
-              </a:lnSpc>
-              <a:buNone/>
-              <a:defRPr sz="3150" b="1" i="0">
-                <a:solidFill>
-                  <a:srgbClr val="2D6F6B"/>
-                </a:solidFill>
-                <a:latin typeface="Aptos Display"/>
-                <a:ea typeface="Aptos Display"/>
-                <a:cs typeface="Aptos Display"/>
-              </a:defRPr>
-            </a:pPr>
-            <a:r>
-              <a:rPr sz="3150" b="1" i="0">
-                <a:solidFill>
-                  <a:srgbClr val="2D6F6B"/>
-                </a:solidFill>
-                <a:latin typeface="Aptos Display"/>
-                <a:ea typeface="Aptos Display"/>
-                <a:cs typeface="Aptos Display"/>
-              </a:rPr>
-              <a:t>when the other person resists it.</a:t>
+              <a:t>Resistance</a:t>
             </a:r>
           </a:p>
         </p:txBody>
       </p:sp>
       <p:sp>
         <p:nvSpPr>
-          <p:cNvPr id="5" name="stakes-divider">
+          <p:cNvPr id="11" name="stakes-rule-1">
             <a:extLst xmlns:a="http://schemas.openxmlformats.org/drawingml/2006/main">
               <a:ext uri="{FF2B5EF4-FFF2-40B4-BE49-F238E27FC236}">
-                <a16:creationId xmlns:a16="http://schemas.microsoft.com/office/drawing/2014/main" id="{360B3892-AB4D-4D71-A64A-4929C7501A66}"/>
+                <a16:creationId xmlns:a16="http://schemas.microsoft.com/office/drawing/2014/main" id="{66C05318-1922-4A7F-879B-BAD9EE17350F}"/>
               </a:ext>
             </a:extLst>
           </p:cNvPr>
@@ -3417,8 +3748,8 @@
         </p:nvSpPr>
         <p:spPr>
           <a:xfrm xmlns:a="http://schemas.openxmlformats.org/drawingml/2006/main">
-            <a:off x="6400800" y="1733550"/>
-            <a:ext cx="0" cy="3714750"/>
+            <a:off x="685800" y="4038600"/>
+            <a:ext cx="10820400" cy="0"/>
           </a:xfrm>
           <a:prstGeom xmlns:a="http://schemas.openxmlformats.org/drawingml/2006/main" prst="line">
             <a:avLst/>
@@ -3428,7 +3759,7 @@
               <a:alpha val="0"/>
             </a:srgbClr>
           </a:solidFill>
-          <a:ln xmlns:a="http://schemas.openxmlformats.org/drawingml/2006/main" w="19050">
+          <a:ln xmlns:a="http://schemas.openxmlformats.org/drawingml/2006/main" w="9525">
             <a:solidFill>
               <a:srgbClr val="C8C0B3"/>
             </a:solidFill>
@@ -3438,10 +3769,10 @@
       </p:sp>
       <p:sp>
         <p:nvSpPr>
-          <p:cNvPr id="6" name="stakes-label-0">
+          <p:cNvPr id="12" name="stakes-label-2">
             <a:extLst xmlns:a="http://schemas.openxmlformats.org/drawingml/2006/main">
               <a:ext uri="{FF2B5EF4-FFF2-40B4-BE49-F238E27FC236}">
-                <a16:creationId xmlns:a16="http://schemas.microsoft.com/office/drawing/2014/main" id="{4EFA388F-9E6D-4118-80AB-410A3D46F615}"/>
+                <a16:creationId xmlns:a16="http://schemas.microsoft.com/office/drawing/2014/main" id="{851B761B-F0F6-420F-8FD0-8F2A4339C63E}"/>
               </a:ext>
             </a:extLst>
           </p:cNvPr>
@@ -3452,8 +3783,8 @@
         </p:nvSpPr>
         <p:spPr>
           <a:xfrm xmlns:a="http://schemas.openxmlformats.org/drawingml/2006/main">
-            <a:off x="6877050" y="1809750"/>
-            <a:ext cx="4000500" cy="247650"/>
+            <a:off x="685800" y="4343400"/>
+            <a:ext cx="10096500" cy="704850"/>
           </a:xfrm>
           <a:prstGeom xmlns:a="http://schemas.openxmlformats.org/drawingml/2006/main" prst="rect">
             <a:avLst/>
@@ -3473,8 +3804,8 @@
           </a:ln>
         </p:spPr>
         <p:txBody>
-          <a:bodyPr xmlns:a="http://schemas.openxmlformats.org/drawingml/2006/main" wrap="square" lIns="0" tIns="0" rIns="0" bIns="0" anchor="t">
-            <a:normAutofit fontScale="100000"/>
+          <a:bodyPr xmlns:a="http://schemas.openxmlformats.org/drawingml/2006/main" wrap="square" lIns="0" tIns="0" rIns="0" bIns="0" anchor="ctr">
+            <a:noAutofit/>
           </a:bodyPr>
           <a:lstStyle xmlns:a="http://schemas.openxmlformats.org/drawingml/2006/main"/>
           <a:p xmlns:a="http://schemas.openxmlformats.org/drawingml/2006/main">
@@ -3483,515 +3814,25 @@
                 <a:spcPct val="100000"/>
               </a:lnSpc>
               <a:buNone/>
-              <a:defRPr sz="1425" b="1" i="0">
+              <a:defRPr sz="3150" b="1" i="0">
                 <a:solidFill>
                   <a:srgbClr val="2D6F6B"/>
                 </a:solidFill>
-                <a:latin typeface="Aptos"/>
-                <a:ea typeface="Aptos"/>
-                <a:cs typeface="Aptos"/>
+                <a:latin typeface="Aptos Display"/>
+                <a:ea typeface="Aptos Display"/>
+                <a:cs typeface="Aptos Display"/>
               </a:defRPr>
             </a:pPr>
             <a:r>
-              <a:rPr sz="1425" b="1" i="0">
+              <a:rPr sz="3150" b="1" i="0">
                 <a:solidFill>
                   <a:srgbClr val="2D6F6B"/>
                 </a:solidFill>
-                <a:latin typeface="Aptos"/>
-                <a:ea typeface="Aptos"/>
-                <a:cs typeface="Aptos"/>
+                <a:latin typeface="Aptos Display"/>
+                <a:ea typeface="Aptos Display"/>
+                <a:cs typeface="Aptos Display"/>
               </a:rPr>
-              <a:t>DECISION PRESSURE</a:t>
-            </a:r>
-          </a:p>
-        </p:txBody>
-      </p:sp>
-      <p:sp>
-        <p:nvSpPr>
-          <p:cNvPr id="7" name="stakes-body-0">
-            <a:extLst xmlns:a="http://schemas.openxmlformats.org/drawingml/2006/main">
-              <a:ext uri="{FF2B5EF4-FFF2-40B4-BE49-F238E27FC236}">
-                <a16:creationId xmlns:a16="http://schemas.microsoft.com/office/drawing/2014/main" id="{6C7DF27D-C6AF-4D79-9A61-19FFF8CC40F6}"/>
-              </a:ext>
-            </a:extLst>
-          </p:cNvPr>
-          <p:cNvSpPr>
-            <a:spLocks xmlns:a="http://schemas.openxmlformats.org/drawingml/2006/main" noGrp="1"/>
-          </p:cNvSpPr>
-          <p:nvPr/>
-        </p:nvSpPr>
-        <p:spPr>
-          <a:xfrm xmlns:a="http://schemas.openxmlformats.org/drawingml/2006/main">
-            <a:off x="6877050" y="2133600"/>
-            <a:ext cx="4333875" cy="666750"/>
-          </a:xfrm>
-          <a:prstGeom xmlns:a="http://schemas.openxmlformats.org/drawingml/2006/main" prst="rect">
-            <a:avLst/>
-          </a:prstGeom>
-          <a:solidFill xmlns:a="http://schemas.openxmlformats.org/drawingml/2006/main">
-            <a:srgbClr val="000000">
-              <a:alpha val="0"/>
-            </a:srgbClr>
-          </a:solidFill>
-          <a:ln xmlns:a="http://schemas.openxmlformats.org/drawingml/2006/main" w="0">
-            <a:solidFill>
-              <a:srgbClr val="000000">
-                <a:alpha val="0"/>
-              </a:srgbClr>
-            </a:solidFill>
-            <a:prstDash val="solid"/>
-          </a:ln>
-        </p:spPr>
-        <p:txBody>
-          <a:bodyPr xmlns:a="http://schemas.openxmlformats.org/drawingml/2006/main" wrap="square" lIns="0" tIns="0" rIns="0" bIns="0" anchor="t">
-            <a:normAutofit fontScale="100000"/>
-          </a:bodyPr>
-          <a:lstStyle xmlns:a="http://schemas.openxmlformats.org/drawingml/2006/main"/>
-          <a:p xmlns:a="http://schemas.openxmlformats.org/drawingml/2006/main">
-            <a:pPr algn="l">
-              <a:lnSpc>
-                <a:spcPct val="105000"/>
-              </a:lnSpc>
-              <a:buNone/>
-              <a:defRPr sz="1875" b="0" i="0">
-                <a:solidFill>
-                  <a:srgbClr val="17222F"/>
-                </a:solidFill>
-                <a:latin typeface="Aptos"/>
-                <a:ea typeface="Aptos"/>
-                <a:cs typeface="Aptos"/>
-              </a:defRPr>
-            </a:pPr>
-            <a:r>
-              <a:rPr sz="1875" b="0" i="0">
-                <a:solidFill>
-                  <a:srgbClr val="17222F"/>
-                </a:solidFill>
-                <a:latin typeface="Aptos"/>
-                <a:ea typeface="Aptos"/>
-                <a:cs typeface="Aptos"/>
-              </a:rPr>
-              <a:t>Choose a response while the conversation keeps moving.</a:t>
-            </a:r>
-          </a:p>
-        </p:txBody>
-      </p:sp>
-      <p:sp>
-        <p:nvSpPr>
-          <p:cNvPr id="8" name="stakes-rule-0">
-            <a:extLst xmlns:a="http://schemas.openxmlformats.org/drawingml/2006/main">
-              <a:ext uri="{FF2B5EF4-FFF2-40B4-BE49-F238E27FC236}">
-                <a16:creationId xmlns:a16="http://schemas.microsoft.com/office/drawing/2014/main" id="{49927478-B85C-46BA-B4B1-E93F6D2B4AEC}"/>
-              </a:ext>
-            </a:extLst>
-          </p:cNvPr>
-          <p:cNvSpPr>
-            <a:spLocks xmlns:a="http://schemas.openxmlformats.org/drawingml/2006/main" noGrp="1"/>
-          </p:cNvSpPr>
-          <p:nvPr/>
-        </p:nvSpPr>
-        <p:spPr>
-          <a:xfrm xmlns:a="http://schemas.openxmlformats.org/drawingml/2006/main">
-            <a:off x="6877050" y="2876550"/>
-            <a:ext cx="4333875" cy="0"/>
-          </a:xfrm>
-          <a:prstGeom xmlns:a="http://schemas.openxmlformats.org/drawingml/2006/main" prst="line">
-            <a:avLst/>
-          </a:prstGeom>
-          <a:solidFill xmlns:a="http://schemas.openxmlformats.org/drawingml/2006/main">
-            <a:srgbClr val="000000">
-              <a:alpha val="0"/>
-            </a:srgbClr>
-          </a:solidFill>
-          <a:ln xmlns:a="http://schemas.openxmlformats.org/drawingml/2006/main" w="9525">
-            <a:solidFill>
-              <a:srgbClr val="C8C0B3"/>
-            </a:solidFill>
-            <a:prstDash val="solid"/>
-          </a:ln>
-        </p:spPr>
-      </p:sp>
-      <p:sp>
-        <p:nvSpPr>
-          <p:cNvPr id="9" name="stakes-label-1">
-            <a:extLst xmlns:a="http://schemas.openxmlformats.org/drawingml/2006/main">
-              <a:ext uri="{FF2B5EF4-FFF2-40B4-BE49-F238E27FC236}">
-                <a16:creationId xmlns:a16="http://schemas.microsoft.com/office/drawing/2014/main" id="{6D91A1F5-675E-4049-88E9-672603F0EE80}"/>
-              </a:ext>
-            </a:extLst>
-          </p:cNvPr>
-          <p:cNvSpPr>
-            <a:spLocks xmlns:a="http://schemas.openxmlformats.org/drawingml/2006/main" noGrp="1"/>
-          </p:cNvSpPr>
-          <p:nvPr/>
-        </p:nvSpPr>
-        <p:spPr>
-          <a:xfrm xmlns:a="http://schemas.openxmlformats.org/drawingml/2006/main">
-            <a:off x="6877050" y="3067050"/>
-            <a:ext cx="4000500" cy="247650"/>
-          </a:xfrm>
-          <a:prstGeom xmlns:a="http://schemas.openxmlformats.org/drawingml/2006/main" prst="rect">
-            <a:avLst/>
-          </a:prstGeom>
-          <a:solidFill xmlns:a="http://schemas.openxmlformats.org/drawingml/2006/main">
-            <a:srgbClr val="000000">
-              <a:alpha val="0"/>
-            </a:srgbClr>
-          </a:solidFill>
-          <a:ln xmlns:a="http://schemas.openxmlformats.org/drawingml/2006/main" w="0">
-            <a:solidFill>
-              <a:srgbClr val="000000">
-                <a:alpha val="0"/>
-              </a:srgbClr>
-            </a:solidFill>
-            <a:prstDash val="solid"/>
-          </a:ln>
-        </p:spPr>
-        <p:txBody>
-          <a:bodyPr xmlns:a="http://schemas.openxmlformats.org/drawingml/2006/main" wrap="square" lIns="0" tIns="0" rIns="0" bIns="0" anchor="t">
-            <a:normAutofit fontScale="100000"/>
-          </a:bodyPr>
-          <a:lstStyle xmlns:a="http://schemas.openxmlformats.org/drawingml/2006/main"/>
-          <a:p xmlns:a="http://schemas.openxmlformats.org/drawingml/2006/main">
-            <a:pPr algn="l">
-              <a:lnSpc>
-                <a:spcPct val="100000"/>
-              </a:lnSpc>
-              <a:buNone/>
-              <a:defRPr sz="1425" b="1" i="0">
-                <a:solidFill>
-                  <a:srgbClr val="C57A42"/>
-                </a:solidFill>
-                <a:latin typeface="Aptos"/>
-                <a:ea typeface="Aptos"/>
-                <a:cs typeface="Aptos"/>
-              </a:defRPr>
-            </a:pPr>
-            <a:r>
-              <a:rPr sz="1425" b="1" i="0">
-                <a:solidFill>
-                  <a:srgbClr val="C57A42"/>
-                </a:solidFill>
-                <a:latin typeface="Aptos"/>
-                <a:ea typeface="Aptos"/>
-                <a:cs typeface="Aptos"/>
-              </a:rPr>
-              <a:t>RESISTANCE</a:t>
-            </a:r>
-          </a:p>
-        </p:txBody>
-      </p:sp>
-      <p:sp>
-        <p:nvSpPr>
-          <p:cNvPr id="10" name="stakes-body-1">
-            <a:extLst xmlns:a="http://schemas.openxmlformats.org/drawingml/2006/main">
-              <a:ext uri="{FF2B5EF4-FFF2-40B4-BE49-F238E27FC236}">
-                <a16:creationId xmlns:a16="http://schemas.microsoft.com/office/drawing/2014/main" id="{7112FD3B-34E0-4DA1-908D-F70D25712A40}"/>
-              </a:ext>
-            </a:extLst>
-          </p:cNvPr>
-          <p:cNvSpPr>
-            <a:spLocks xmlns:a="http://schemas.openxmlformats.org/drawingml/2006/main" noGrp="1"/>
-          </p:cNvSpPr>
-          <p:nvPr/>
-        </p:nvSpPr>
-        <p:spPr>
-          <a:xfrm xmlns:a="http://schemas.openxmlformats.org/drawingml/2006/main">
-            <a:off x="6877050" y="3390900"/>
-            <a:ext cx="4333875" cy="666750"/>
-          </a:xfrm>
-          <a:prstGeom xmlns:a="http://schemas.openxmlformats.org/drawingml/2006/main" prst="rect">
-            <a:avLst/>
-          </a:prstGeom>
-          <a:solidFill xmlns:a="http://schemas.openxmlformats.org/drawingml/2006/main">
-            <a:srgbClr val="000000">
-              <a:alpha val="0"/>
-            </a:srgbClr>
-          </a:solidFill>
-          <a:ln xmlns:a="http://schemas.openxmlformats.org/drawingml/2006/main" w="0">
-            <a:solidFill>
-              <a:srgbClr val="000000">
-                <a:alpha val="0"/>
-              </a:srgbClr>
-            </a:solidFill>
-            <a:prstDash val="solid"/>
-          </a:ln>
-        </p:spPr>
-        <p:txBody>
-          <a:bodyPr xmlns:a="http://schemas.openxmlformats.org/drawingml/2006/main" wrap="square" lIns="0" tIns="0" rIns="0" bIns="0" anchor="t">
-            <a:normAutofit fontScale="100000"/>
-          </a:bodyPr>
-          <a:lstStyle xmlns:a="http://schemas.openxmlformats.org/drawingml/2006/main"/>
-          <a:p xmlns:a="http://schemas.openxmlformats.org/drawingml/2006/main">
-            <a:pPr algn="l">
-              <a:lnSpc>
-                <a:spcPct val="105000"/>
-              </a:lnSpc>
-              <a:buNone/>
-              <a:defRPr sz="1875" b="0" i="0">
-                <a:solidFill>
-                  <a:srgbClr val="17222F"/>
-                </a:solidFill>
-                <a:latin typeface="Aptos"/>
-                <a:ea typeface="Aptos"/>
-                <a:cs typeface="Aptos"/>
-              </a:defRPr>
-            </a:pPr>
-            <a:r>
-              <a:rPr sz="1875" b="0" i="0">
-                <a:solidFill>
-                  <a:srgbClr val="17222F"/>
-                </a:solidFill>
-                <a:latin typeface="Aptos"/>
-                <a:ea typeface="Aptos"/>
-                <a:cs typeface="Aptos"/>
-              </a:rPr>
-              <a:t>Hear a plausible reason, decide whether to probe, and stay present.</a:t>
-            </a:r>
-          </a:p>
-        </p:txBody>
-      </p:sp>
-      <p:sp>
-        <p:nvSpPr>
-          <p:cNvPr id="11" name="stakes-rule-1">
-            <a:extLst xmlns:a="http://schemas.openxmlformats.org/drawingml/2006/main">
-              <a:ext uri="{FF2B5EF4-FFF2-40B4-BE49-F238E27FC236}">
-                <a16:creationId xmlns:a16="http://schemas.microsoft.com/office/drawing/2014/main" id="{66C05318-1922-4A7F-879B-BAD9EE17350F}"/>
-              </a:ext>
-            </a:extLst>
-          </p:cNvPr>
-          <p:cNvSpPr>
-            <a:spLocks xmlns:a="http://schemas.openxmlformats.org/drawingml/2006/main" noGrp="1"/>
-          </p:cNvSpPr>
-          <p:nvPr/>
-        </p:nvSpPr>
-        <p:spPr>
-          <a:xfrm xmlns:a="http://schemas.openxmlformats.org/drawingml/2006/main">
-            <a:off x="6877050" y="4133850"/>
-            <a:ext cx="4333875" cy="0"/>
-          </a:xfrm>
-          <a:prstGeom xmlns:a="http://schemas.openxmlformats.org/drawingml/2006/main" prst="line">
-            <a:avLst/>
-          </a:prstGeom>
-          <a:solidFill xmlns:a="http://schemas.openxmlformats.org/drawingml/2006/main">
-            <a:srgbClr val="000000">
-              <a:alpha val="0"/>
-            </a:srgbClr>
-          </a:solidFill>
-          <a:ln xmlns:a="http://schemas.openxmlformats.org/drawingml/2006/main" w="9525">
-            <a:solidFill>
-              <a:srgbClr val="C8C0B3"/>
-            </a:solidFill>
-            <a:prstDash val="solid"/>
-          </a:ln>
-        </p:spPr>
-      </p:sp>
-      <p:sp>
-        <p:nvSpPr>
-          <p:cNvPr id="12" name="stakes-label-2">
-            <a:extLst xmlns:a="http://schemas.openxmlformats.org/drawingml/2006/main">
-              <a:ext uri="{FF2B5EF4-FFF2-40B4-BE49-F238E27FC236}">
-                <a16:creationId xmlns:a16="http://schemas.microsoft.com/office/drawing/2014/main" id="{851B761B-F0F6-420F-8FD0-8F2A4339C63E}"/>
-              </a:ext>
-            </a:extLst>
-          </p:cNvPr>
-          <p:cNvSpPr>
-            <a:spLocks xmlns:a="http://schemas.openxmlformats.org/drawingml/2006/main" noGrp="1"/>
-          </p:cNvSpPr>
-          <p:nvPr/>
-        </p:nvSpPr>
-        <p:spPr>
-          <a:xfrm xmlns:a="http://schemas.openxmlformats.org/drawingml/2006/main">
-            <a:off x="6877050" y="4324350"/>
-            <a:ext cx="4000500" cy="247650"/>
-          </a:xfrm>
-          <a:prstGeom xmlns:a="http://schemas.openxmlformats.org/drawingml/2006/main" prst="rect">
-            <a:avLst/>
-          </a:prstGeom>
-          <a:solidFill xmlns:a="http://schemas.openxmlformats.org/drawingml/2006/main">
-            <a:srgbClr val="000000">
-              <a:alpha val="0"/>
-            </a:srgbClr>
-          </a:solidFill>
-          <a:ln xmlns:a="http://schemas.openxmlformats.org/drawingml/2006/main" w="0">
-            <a:solidFill>
-              <a:srgbClr val="000000">
-                <a:alpha val="0"/>
-              </a:srgbClr>
-            </a:solidFill>
-            <a:prstDash val="solid"/>
-          </a:ln>
-        </p:spPr>
-        <p:txBody>
-          <a:bodyPr xmlns:a="http://schemas.openxmlformats.org/drawingml/2006/main" wrap="square" lIns="0" tIns="0" rIns="0" bIns="0" anchor="t">
-            <a:normAutofit fontScale="100000"/>
-          </a:bodyPr>
-          <a:lstStyle xmlns:a="http://schemas.openxmlformats.org/drawingml/2006/main"/>
-          <a:p xmlns:a="http://schemas.openxmlformats.org/drawingml/2006/main">
-            <a:pPr algn="l">
-              <a:lnSpc>
-                <a:spcPct val="100000"/>
-              </a:lnSpc>
-              <a:buNone/>
-              <a:defRPr sz="1425" b="1" i="0">
-                <a:solidFill>
-                  <a:srgbClr val="2D6F6B"/>
-                </a:solidFill>
-                <a:latin typeface="Aptos"/>
-                <a:ea typeface="Aptos"/>
-                <a:cs typeface="Aptos"/>
-              </a:defRPr>
-            </a:pPr>
-            <a:r>
-              <a:rPr sz="1425" b="1" i="0">
-                <a:solidFill>
-                  <a:srgbClr val="2D6F6B"/>
-                </a:solidFill>
-                <a:latin typeface="Aptos"/>
-                <a:ea typeface="Aptos"/>
-                <a:cs typeface="Aptos"/>
-              </a:rPr>
-              <a:t>CONSEQUENCES</a:t>
-            </a:r>
-          </a:p>
-        </p:txBody>
-      </p:sp>
-      <p:sp>
-        <p:nvSpPr>
-          <p:cNvPr id="13" name="stakes-body-2">
-            <a:extLst xmlns:a="http://schemas.openxmlformats.org/drawingml/2006/main">
-              <a:ext uri="{FF2B5EF4-FFF2-40B4-BE49-F238E27FC236}">
-                <a16:creationId xmlns:a16="http://schemas.microsoft.com/office/drawing/2014/main" id="{0131ADCE-440E-4298-A467-B857578059BF}"/>
-              </a:ext>
-            </a:extLst>
-          </p:cNvPr>
-          <p:cNvSpPr>
-            <a:spLocks xmlns:a="http://schemas.openxmlformats.org/drawingml/2006/main" noGrp="1"/>
-          </p:cNvSpPr>
-          <p:nvPr/>
-        </p:nvSpPr>
-        <p:spPr>
-          <a:xfrm xmlns:a="http://schemas.openxmlformats.org/drawingml/2006/main">
-            <a:off x="6877050" y="4648200"/>
-            <a:ext cx="4333875" cy="666750"/>
-          </a:xfrm>
-          <a:prstGeom xmlns:a="http://schemas.openxmlformats.org/drawingml/2006/main" prst="rect">
-            <a:avLst/>
-          </a:prstGeom>
-          <a:solidFill xmlns:a="http://schemas.openxmlformats.org/drawingml/2006/main">
-            <a:srgbClr val="000000">
-              <a:alpha val="0"/>
-            </a:srgbClr>
-          </a:solidFill>
-          <a:ln xmlns:a="http://schemas.openxmlformats.org/drawingml/2006/main" w="0">
-            <a:solidFill>
-              <a:srgbClr val="000000">
-                <a:alpha val="0"/>
-              </a:srgbClr>
-            </a:solidFill>
-            <a:prstDash val="solid"/>
-          </a:ln>
-        </p:spPr>
-        <p:txBody>
-          <a:bodyPr xmlns:a="http://schemas.openxmlformats.org/drawingml/2006/main" wrap="square" lIns="0" tIns="0" rIns="0" bIns="0" anchor="t">
-            <a:normAutofit fontScale="100000"/>
-          </a:bodyPr>
-          <a:lstStyle xmlns:a="http://schemas.openxmlformats.org/drawingml/2006/main"/>
-          <a:p xmlns:a="http://schemas.openxmlformats.org/drawingml/2006/main">
-            <a:pPr algn="l">
-              <a:lnSpc>
-                <a:spcPct val="105000"/>
-              </a:lnSpc>
-              <a:buNone/>
-              <a:defRPr sz="1875" b="0" i="0">
-                <a:solidFill>
-                  <a:srgbClr val="17222F"/>
-                </a:solidFill>
-                <a:latin typeface="Aptos"/>
-                <a:ea typeface="Aptos"/>
-                <a:cs typeface="Aptos"/>
-              </a:defRPr>
-            </a:pPr>
-            <a:r>
-              <a:rPr sz="1875" b="0" i="0">
-                <a:solidFill>
-                  <a:srgbClr val="17222F"/>
-                </a:solidFill>
-                <a:latin typeface="Aptos"/>
-                <a:ea typeface="Aptos"/>
-                <a:cs typeface="Aptos"/>
-              </a:rPr>
-              <a:t>The response changes what the customer is willing to say next.</a:t>
-            </a:r>
-          </a:p>
-        </p:txBody>
-      </p:sp>
-      <p:sp>
-        <p:nvSpPr>
-          <p:cNvPr id="14" name="stakes-bottom">
-            <a:extLst xmlns:a="http://schemas.openxmlformats.org/drawingml/2006/main">
-              <a:ext uri="{FF2B5EF4-FFF2-40B4-BE49-F238E27FC236}">
-                <a16:creationId xmlns:a16="http://schemas.microsoft.com/office/drawing/2014/main" id="{4E3CCB97-39C0-4F86-8D3E-5066874F1C85}"/>
-              </a:ext>
-            </a:extLst>
-          </p:cNvPr>
-          <p:cNvSpPr>
-            <a:spLocks xmlns:a="http://schemas.openxmlformats.org/drawingml/2006/main" noGrp="1"/>
-          </p:cNvSpPr>
-          <p:nvPr/>
-        </p:nvSpPr>
-        <p:spPr>
-          <a:xfrm xmlns:a="http://schemas.openxmlformats.org/drawingml/2006/main">
-            <a:off x="685800" y="5657850"/>
-            <a:ext cx="10287000" cy="438150"/>
-          </a:xfrm>
-          <a:prstGeom xmlns:a="http://schemas.openxmlformats.org/drawingml/2006/main" prst="rect">
-            <a:avLst/>
-          </a:prstGeom>
-          <a:solidFill xmlns:a="http://schemas.openxmlformats.org/drawingml/2006/main">
-            <a:srgbClr val="000000">
-              <a:alpha val="0"/>
-            </a:srgbClr>
-          </a:solidFill>
-          <a:ln xmlns:a="http://schemas.openxmlformats.org/drawingml/2006/main" w="0">
-            <a:solidFill>
-              <a:srgbClr val="000000">
-                <a:alpha val="0"/>
-              </a:srgbClr>
-            </a:solidFill>
-            <a:prstDash val="solid"/>
-          </a:ln>
-        </p:spPr>
-        <p:txBody>
-          <a:bodyPr xmlns:a="http://schemas.openxmlformats.org/drawingml/2006/main" wrap="square" lIns="0" tIns="0" rIns="0" bIns="0" anchor="t">
-            <a:normAutofit fontScale="100000"/>
-          </a:bodyPr>
-          <a:lstStyle xmlns:a="http://schemas.openxmlformats.org/drawingml/2006/main"/>
-          <a:p xmlns:a="http://schemas.openxmlformats.org/drawingml/2006/main">
-            <a:pPr algn="l">
-              <a:lnSpc>
-                <a:spcPct val="100000"/>
-              </a:lnSpc>
-              <a:buNone/>
-              <a:defRPr sz="1800" b="0" i="0">
-                <a:solidFill>
-                  <a:srgbClr val="5B6670"/>
-                </a:solidFill>
-                <a:latin typeface="Aptos"/>
-                <a:ea typeface="Aptos"/>
-                <a:cs typeface="Aptos"/>
-              </a:defRPr>
-            </a:pPr>
-            <a:r>
-              <a:rPr sz="1800" b="0" i="0">
-                <a:solidFill>
-                  <a:srgbClr val="5B6670"/>
-                </a:solidFill>
-                <a:latin typeface="Aptos"/>
-                <a:ea typeface="Aptos"/>
-                <a:cs typeface="Aptos"/>
-              </a:rPr>
-              <a:t>Reading tips and friendly role-play can help—yet neither automatically reproduces this pressure.</a:t>
+              <a:t>Consequences</a:t>
             </a:r>
           </a:p>
         </p:txBody>
@@ -4112,7 +3953,7 @@
         <p:spPr>
           <a:xfrm xmlns:a="http://schemas.openxmlformats.org/drawingml/2006/main">
             <a:off x="609600" y="400050"/>
-            <a:ext cx="10972800" cy="1066800"/>
+            <a:ext cx="10972800" cy="762000"/>
           </a:xfrm>
           <a:prstGeom xmlns:a="http://schemas.openxmlformats.org/drawingml/2006/main" prst="rect">
             <a:avLst/>
@@ -4133,7 +3974,7 @@
         </p:spPr>
         <p:txBody>
           <a:bodyPr xmlns:a="http://schemas.openxmlformats.org/drawingml/2006/main" wrap="square" lIns="0" tIns="0" rIns="0" bIns="0" anchor="t">
-            <a:normAutofit fontScale="100000"/>
+            <a:noAutofit/>
           </a:bodyPr>
           <a:lstStyle xmlns:a="http://schemas.openxmlformats.org/drawingml/2006/main"/>
           <a:p xmlns:a="http://schemas.openxmlformats.org/drawingml/2006/main">
@@ -4144,7 +3985,7 @@
               <a:buNone/>
               <a:defRPr sz="3600" b="1" i="0">
                 <a:solidFill>
-                  <a:srgbClr val="FFFFFF"/>
+                  <a:srgbClr val="17222F"/>
                 </a:solidFill>
                 <a:latin typeface="Aptos Display"/>
                 <a:ea typeface="Aptos Display"/>
@@ -4160,34 +4001,7 @@
                 <a:ea typeface="Aptos Display"/>
                 <a:cs typeface="Aptos Display"/>
               </a:rPr>
-              <a:t>The learning design combines authentic practice,</a:t>
-            </a:r>
-          </a:p>
-          <a:p xmlns:a="http://schemas.openxmlformats.org/drawingml/2006/main">
-            <a:pPr algn="l">
-              <a:lnSpc>
-                <a:spcPct val="93000"/>
-              </a:lnSpc>
-              <a:buNone/>
-              <a:defRPr sz="3600" b="1" i="0">
-                <a:solidFill>
-                  <a:srgbClr val="FFFFFF"/>
-                </a:solidFill>
-                <a:latin typeface="Aptos Display"/>
-                <a:ea typeface="Aptos Display"/>
-                <a:cs typeface="Aptos Display"/>
-              </a:defRPr>
-            </a:pPr>
-            <a:r>
-              <a:rPr sz="3600" b="1" i="0">
-                <a:solidFill>
-                  <a:srgbClr val="FFFFFF"/>
-                </a:solidFill>
-                <a:latin typeface="Aptos Display"/>
-                <a:ea typeface="Aptos Display"/>
-                <a:cs typeface="Aptos Display"/>
-              </a:rPr>
-              <a:t>useful feedback, and immediate retry</a:t>
+              <a:t>Useful practice needs feedback and another attempt.</a:t>
             </a:r>
           </a:p>
         </p:txBody>
@@ -4243,8 +4057,8 @@
         </p:nvSpPr>
         <p:spPr>
           <a:xfrm xmlns:a="http://schemas.openxmlformats.org/drawingml/2006/main">
-            <a:off x="685800" y="1809750"/>
-            <a:ext cx="3048000" cy="419100"/>
+            <a:off x="685800" y="2381250"/>
+            <a:ext cx="3048000" cy="1809750"/>
           </a:xfrm>
           <a:prstGeom xmlns:a="http://schemas.openxmlformats.org/drawingml/2006/main" prst="rect">
             <a:avLst/>
@@ -4264,19 +4078,19 @@
           </a:ln>
         </p:spPr>
         <p:txBody>
-          <a:bodyPr xmlns:a="http://schemas.openxmlformats.org/drawingml/2006/main" wrap="square" lIns="0" tIns="0" rIns="0" bIns="0" anchor="t">
-            <a:normAutofit fontScale="100000"/>
+          <a:bodyPr xmlns:a="http://schemas.openxmlformats.org/drawingml/2006/main" wrap="square" lIns="38100" tIns="0" rIns="38100" bIns="0" anchor="ctr">
+            <a:noAutofit/>
           </a:bodyPr>
           <a:lstStyle xmlns:a="http://schemas.openxmlformats.org/drawingml/2006/main"/>
           <a:p xmlns:a="http://schemas.openxmlformats.org/drawingml/2006/main">
-            <a:pPr algn="l">
+            <a:pPr algn="ctr">
               <a:lnSpc>
-                <a:spcPct val="100000"/>
+                <a:spcPct val="95000"/>
               </a:lnSpc>
               <a:buNone/>
-              <a:defRPr sz="2175" b="1" i="0">
-                <a:solidFill>
-                  <a:srgbClr val="DCE8E3"/>
+              <a:defRPr sz="3300" b="1" i="0">
+                <a:solidFill>
+                  <a:srgbClr val="E9EFEA"/>
                 </a:solidFill>
                 <a:latin typeface="Aptos Display"/>
                 <a:ea typeface="Aptos Display"/>
@@ -4284,15 +4098,42 @@
               </a:defRPr>
             </a:pPr>
             <a:r>
-              <a:rPr sz="2175" b="1" i="0">
-                <a:solidFill>
-                  <a:srgbClr val="DCE8E3"/>
+              <a:rPr sz="3300" b="1" i="0">
+                <a:solidFill>
+                  <a:srgbClr val="E9EFEA"/>
                 </a:solidFill>
                 <a:latin typeface="Aptos Display"/>
                 <a:ea typeface="Aptos Display"/>
                 <a:cs typeface="Aptos Display"/>
               </a:rPr>
-              <a:t>Ericsson</a:t>
+              <a:t>Focused</a:t>
+            </a:r>
+          </a:p>
+          <a:p xmlns:a="http://schemas.openxmlformats.org/drawingml/2006/main">
+            <a:pPr algn="ctr">
+              <a:lnSpc>
+                <a:spcPct val="95000"/>
+              </a:lnSpc>
+              <a:buNone/>
+              <a:defRPr sz="3300" b="1" i="0">
+                <a:solidFill>
+                  <a:srgbClr val="E9EFEA"/>
+                </a:solidFill>
+                <a:latin typeface="Aptos Display"/>
+                <a:ea typeface="Aptos Display"/>
+                <a:cs typeface="Aptos Display"/>
+              </a:defRPr>
+            </a:pPr>
+            <a:r>
+              <a:rPr sz="3300" b="1" i="0">
+                <a:solidFill>
+                  <a:srgbClr val="E9EFEA"/>
+                </a:solidFill>
+                <a:latin typeface="Aptos Display"/>
+                <a:ea typeface="Aptos Display"/>
+                <a:cs typeface="Aptos Display"/>
+              </a:rPr>
+              <a:t>practice</a:t>
             </a:r>
           </a:p>
         </p:txBody>
@@ -4313,8 +4154,8 @@
         </p:nvSpPr>
         <p:spPr>
           <a:xfrm xmlns:a="http://schemas.openxmlformats.org/drawingml/2006/main">
-            <a:off x="685800" y="2400300"/>
-            <a:ext cx="3048000" cy="1524000"/>
+            <a:off x="685800" y="4267200"/>
+            <a:ext cx="3048000" cy="819150"/>
           </a:xfrm>
           <a:prstGeom xmlns:a="http://schemas.openxmlformats.org/drawingml/2006/main" prst="rect">
             <a:avLst/>
@@ -4334,19 +4175,19 @@
           </a:ln>
         </p:spPr>
         <p:txBody>
-          <a:bodyPr xmlns:a="http://schemas.openxmlformats.org/drawingml/2006/main" wrap="square" lIns="0" tIns="0" rIns="0" bIns="0" anchor="t">
-            <a:normAutofit fontScale="100000"/>
+          <a:bodyPr xmlns:a="http://schemas.openxmlformats.org/drawingml/2006/main" wrap="square" lIns="76200" tIns="0" rIns="76200" bIns="0" anchor="t">
+            <a:noAutofit/>
           </a:bodyPr>
           <a:lstStyle xmlns:a="http://schemas.openxmlformats.org/drawingml/2006/main"/>
           <a:p xmlns:a="http://schemas.openxmlformats.org/drawingml/2006/main">
-            <a:pPr algn="l">
+            <a:pPr algn="ctr">
               <a:lnSpc>
-                <a:spcPct val="98000"/>
+                <a:spcPct val="105000"/>
               </a:lnSpc>
               <a:buNone/>
-              <a:defRPr sz="2100" b="1" i="0">
-                <a:solidFill>
-                  <a:srgbClr val="FFFFFF"/>
+              <a:defRPr sz="1575" b="1" i="0">
+                <a:solidFill>
+                  <a:srgbClr val="C7D3D0"/>
                 </a:solidFill>
                 <a:latin typeface="Aptos"/>
                 <a:ea typeface="Aptos"/>
@@ -4354,25 +4195,25 @@
               </a:defRPr>
             </a:pPr>
             <a:r>
-              <a:rPr sz="2100" b="1" i="0">
-                <a:solidFill>
-                  <a:srgbClr val="FFFFFF"/>
+              <a:rPr sz="1575" b="1" i="0">
+                <a:solidFill>
+                  <a:srgbClr val="C7D3D0"/>
                 </a:solidFill>
                 <a:latin typeface="Aptos"/>
                 <a:ea typeface="Aptos"/>
                 <a:cs typeface="Aptos"/>
               </a:rPr>
-              <a:t>Focus the next Attempt on a specific behavior—and repeat while the moment is fresh.</a:t>
+              <a:t>Rehearse one observable behavior until the next choice becomes clearer.</a:t>
             </a:r>
           </a:p>
         </p:txBody>
       </p:sp>
       <p:sp>
         <p:nvSpPr>
-          <p:cNvPr id="5" name="research-product-0">
+          <p:cNvPr id="6" name="research-divider-1">
             <a:extLst xmlns:a="http://schemas.openxmlformats.org/drawingml/2006/main">
               <a:ext uri="{FF2B5EF4-FFF2-40B4-BE49-F238E27FC236}">
-                <a16:creationId xmlns:a16="http://schemas.microsoft.com/office/drawing/2014/main" id="{239B7735-CAFE-4EE5-9602-C5F753838B56}"/>
+                <a16:creationId xmlns:a16="http://schemas.microsoft.com/office/drawing/2014/main" id="{EBE2EE98-7161-4214-BEF3-91015BC77D42}"/>
               </a:ext>
             </a:extLst>
           </p:cNvPr>
@@ -4383,8 +4224,43 @@
         </p:nvSpPr>
         <p:spPr>
           <a:xfrm xmlns:a="http://schemas.openxmlformats.org/drawingml/2006/main">
-            <a:off x="685800" y="4171950"/>
-            <a:ext cx="2952750" cy="781050"/>
+            <a:off x="3867150" y="2095500"/>
+            <a:ext cx="0" cy="2381250"/>
+          </a:xfrm>
+          <a:prstGeom xmlns:a="http://schemas.openxmlformats.org/drawingml/2006/main" prst="line">
+            <a:avLst/>
+          </a:prstGeom>
+          <a:solidFill xmlns:a="http://schemas.openxmlformats.org/drawingml/2006/main">
+            <a:srgbClr val="000000">
+              <a:alpha val="0"/>
+            </a:srgbClr>
+          </a:solidFill>
+          <a:ln xmlns:a="http://schemas.openxmlformats.org/drawingml/2006/main" w="9525">
+            <a:solidFill>
+              <a:srgbClr val="526271"/>
+            </a:solidFill>
+            <a:prstDash val="solid"/>
+          </a:ln>
+        </p:spPr>
+      </p:sp>
+      <p:sp>
+        <p:nvSpPr>
+          <p:cNvPr id="7" name="research-name-1">
+            <a:extLst xmlns:a="http://schemas.openxmlformats.org/drawingml/2006/main">
+              <a:ext uri="{FF2B5EF4-FFF2-40B4-BE49-F238E27FC236}">
+                <a16:creationId xmlns:a16="http://schemas.microsoft.com/office/drawing/2014/main" id="{CB6288C0-2F9D-451C-9CAE-D3822F9A6482}"/>
+              </a:ext>
+            </a:extLst>
+          </p:cNvPr>
+          <p:cNvSpPr>
+            <a:spLocks xmlns:a="http://schemas.openxmlformats.org/drawingml/2006/main" noGrp="1"/>
+          </p:cNvSpPr>
+          <p:nvPr/>
+        </p:nvSpPr>
+        <p:spPr>
+          <a:xfrm xmlns:a="http://schemas.openxmlformats.org/drawingml/2006/main">
+            <a:off x="4133850" y="2381250"/>
+            <a:ext cx="3048000" cy="1809750"/>
           </a:xfrm>
           <a:prstGeom xmlns:a="http://schemas.openxmlformats.org/drawingml/2006/main" prst="rect">
             <a:avLst/>
@@ -4404,45 +4280,72 @@
           </a:ln>
         </p:spPr>
         <p:txBody>
-          <a:bodyPr xmlns:a="http://schemas.openxmlformats.org/drawingml/2006/main" wrap="square" lIns="0" tIns="0" rIns="0" bIns="0" anchor="t">
-            <a:normAutofit fontScale="100000"/>
+          <a:bodyPr xmlns:a="http://schemas.openxmlformats.org/drawingml/2006/main" wrap="square" lIns="38100" tIns="0" rIns="38100" bIns="0" anchor="ctr">
+            <a:noAutofit/>
           </a:bodyPr>
           <a:lstStyle xmlns:a="http://schemas.openxmlformats.org/drawingml/2006/main"/>
           <a:p xmlns:a="http://schemas.openxmlformats.org/drawingml/2006/main">
-            <a:pPr algn="l">
+            <a:pPr algn="ctr">
               <a:lnSpc>
-                <a:spcPct val="105000"/>
+                <a:spcPct val="95000"/>
               </a:lnSpc>
               <a:buNone/>
-              <a:defRPr sz="1425" b="0" i="0">
-                <a:solidFill>
-                  <a:srgbClr val="C7D3DB"/>
-                </a:solidFill>
-                <a:latin typeface="Aptos"/>
-                <a:ea typeface="Aptos"/>
-                <a:cs typeface="Aptos"/>
+              <a:defRPr sz="3300" b="1" i="0">
+                <a:solidFill>
+                  <a:srgbClr val="F1DDCB"/>
+                </a:solidFill>
+                <a:latin typeface="Aptos Display"/>
+                <a:ea typeface="Aptos Display"/>
+                <a:cs typeface="Aptos Display"/>
               </a:defRPr>
             </a:pPr>
             <a:r>
-              <a:rPr sz="1425" b="0" i="0">
-                <a:solidFill>
-                  <a:srgbClr val="C7D3DB"/>
-                </a:solidFill>
-                <a:latin typeface="Aptos"/>
-                <a:ea typeface="Aptos"/>
-                <a:cs typeface="Aptos"/>
+              <a:rPr sz="3300" b="1" i="0">
+                <a:solidFill>
+                  <a:srgbClr val="F1DDCB"/>
+                </a:solidFill>
+                <a:latin typeface="Aptos Display"/>
+                <a:ea typeface="Aptos Display"/>
+                <a:cs typeface="Aptos Display"/>
               </a:rPr>
-              <a:t>Scenario  ·  Assessment/Feedback  ·  immediate retry</a:t>
+              <a:t>Specific</a:t>
+            </a:r>
+          </a:p>
+          <a:p xmlns:a="http://schemas.openxmlformats.org/drawingml/2006/main">
+            <a:pPr algn="ctr">
+              <a:lnSpc>
+                <a:spcPct val="95000"/>
+              </a:lnSpc>
+              <a:buNone/>
+              <a:defRPr sz="3300" b="1" i="0">
+                <a:solidFill>
+                  <a:srgbClr val="F1DDCB"/>
+                </a:solidFill>
+                <a:latin typeface="Aptos Display"/>
+                <a:ea typeface="Aptos Display"/>
+                <a:cs typeface="Aptos Display"/>
+              </a:defRPr>
+            </a:pPr>
+            <a:r>
+              <a:rPr sz="3300" b="1" i="0">
+                <a:solidFill>
+                  <a:srgbClr val="F1DDCB"/>
+                </a:solidFill>
+                <a:latin typeface="Aptos Display"/>
+                <a:ea typeface="Aptos Display"/>
+                <a:cs typeface="Aptos Display"/>
+              </a:rPr>
+              <a:t>feedback</a:t>
             </a:r>
           </a:p>
         </p:txBody>
       </p:sp>
       <p:sp>
         <p:nvSpPr>
-          <p:cNvPr id="6" name="research-divider-1">
+          <p:cNvPr id="8" name="research-principle-1">
             <a:extLst xmlns:a="http://schemas.openxmlformats.org/drawingml/2006/main">
               <a:ext uri="{FF2B5EF4-FFF2-40B4-BE49-F238E27FC236}">
-                <a16:creationId xmlns:a16="http://schemas.microsoft.com/office/drawing/2014/main" id="{EBE2EE98-7161-4214-BEF3-91015BC77D42}"/>
+                <a16:creationId xmlns:a16="http://schemas.microsoft.com/office/drawing/2014/main" id="{C8A036F4-8CAE-4AD5-8D0D-AE2B3AD423F3}"/>
               </a:ext>
             </a:extLst>
           </p:cNvPr>
@@ -4453,43 +4356,8 @@
         </p:nvSpPr>
         <p:spPr>
           <a:xfrm xmlns:a="http://schemas.openxmlformats.org/drawingml/2006/main">
-            <a:off x="3867150" y="1809750"/>
-            <a:ext cx="0" cy="3124200"/>
-          </a:xfrm>
-          <a:prstGeom xmlns:a="http://schemas.openxmlformats.org/drawingml/2006/main" prst="line">
-            <a:avLst/>
-          </a:prstGeom>
-          <a:solidFill xmlns:a="http://schemas.openxmlformats.org/drawingml/2006/main">
-            <a:srgbClr val="000000">
-              <a:alpha val="0"/>
-            </a:srgbClr>
-          </a:solidFill>
-          <a:ln xmlns:a="http://schemas.openxmlformats.org/drawingml/2006/main" w="9525">
-            <a:solidFill>
-              <a:srgbClr val="526271"/>
-            </a:solidFill>
-            <a:prstDash val="solid"/>
-          </a:ln>
-        </p:spPr>
-      </p:sp>
-      <p:sp>
-        <p:nvSpPr>
-          <p:cNvPr id="7" name="research-name-1">
-            <a:extLst xmlns:a="http://schemas.openxmlformats.org/drawingml/2006/main">
-              <a:ext uri="{FF2B5EF4-FFF2-40B4-BE49-F238E27FC236}">
-                <a16:creationId xmlns:a16="http://schemas.microsoft.com/office/drawing/2014/main" id="{CB6288C0-2F9D-451C-9CAE-D3822F9A6482}"/>
-              </a:ext>
-            </a:extLst>
-          </p:cNvPr>
-          <p:cNvSpPr>
-            <a:spLocks xmlns:a="http://schemas.openxmlformats.org/drawingml/2006/main" noGrp="1"/>
-          </p:cNvSpPr>
-          <p:nvPr/>
-        </p:nvSpPr>
-        <p:spPr>
-          <a:xfrm xmlns:a="http://schemas.openxmlformats.org/drawingml/2006/main">
-            <a:off x="4133850" y="1809750"/>
-            <a:ext cx="3048000" cy="419100"/>
+            <a:off x="4133850" y="4267200"/>
+            <a:ext cx="3048000" cy="819150"/>
           </a:xfrm>
           <a:prstGeom xmlns:a="http://schemas.openxmlformats.org/drawingml/2006/main" prst="rect">
             <a:avLst/>
@@ -4509,45 +4377,45 @@
           </a:ln>
         </p:spPr>
         <p:txBody>
-          <a:bodyPr xmlns:a="http://schemas.openxmlformats.org/drawingml/2006/main" wrap="square" lIns="0" tIns="0" rIns="0" bIns="0" anchor="t">
-            <a:normAutofit fontScale="100000"/>
+          <a:bodyPr xmlns:a="http://schemas.openxmlformats.org/drawingml/2006/main" wrap="square" lIns="76200" tIns="0" rIns="76200" bIns="0" anchor="t">
+            <a:noAutofit/>
           </a:bodyPr>
           <a:lstStyle xmlns:a="http://schemas.openxmlformats.org/drawingml/2006/main"/>
           <a:p xmlns:a="http://schemas.openxmlformats.org/drawingml/2006/main">
-            <a:pPr algn="l">
+            <a:pPr algn="ctr">
               <a:lnSpc>
-                <a:spcPct val="100000"/>
+                <a:spcPct val="105000"/>
               </a:lnSpc>
               <a:buNone/>
-              <a:defRPr sz="2175" b="1" i="0">
-                <a:solidFill>
-                  <a:srgbClr val="F1DDCB"/>
-                </a:solidFill>
-                <a:latin typeface="Aptos Display"/>
-                <a:ea typeface="Aptos Display"/>
-                <a:cs typeface="Aptos Display"/>
+              <a:defRPr sz="1575" b="1" i="0">
+                <a:solidFill>
+                  <a:srgbClr val="C7D3D0"/>
+                </a:solidFill>
+                <a:latin typeface="Aptos"/>
+                <a:ea typeface="Aptos"/>
+                <a:cs typeface="Aptos"/>
               </a:defRPr>
             </a:pPr>
             <a:r>
-              <a:rPr sz="2175" b="1" i="0">
-                <a:solidFill>
-                  <a:srgbClr val="F1DDCB"/>
-                </a:solidFill>
-                <a:latin typeface="Aptos Display"/>
-                <a:ea typeface="Aptos Display"/>
-                <a:cs typeface="Aptos Display"/>
+              <a:rPr sz="1575" b="1" i="0">
+                <a:solidFill>
+                  <a:srgbClr val="C7D3D0"/>
+                </a:solidFill>
+                <a:latin typeface="Aptos"/>
+                <a:ea typeface="Aptos"/>
+                <a:cs typeface="Aptos"/>
               </a:rPr>
-              <a:t>Merrill</a:t>
+              <a:t>Name the exact moment and the specific move to change.</a:t>
             </a:r>
           </a:p>
         </p:txBody>
       </p:sp>
       <p:sp>
         <p:nvSpPr>
-          <p:cNvPr id="8" name="research-principle-1">
+          <p:cNvPr id="10" name="research-divider-2">
             <a:extLst xmlns:a="http://schemas.openxmlformats.org/drawingml/2006/main">
               <a:ext uri="{FF2B5EF4-FFF2-40B4-BE49-F238E27FC236}">
-                <a16:creationId xmlns:a16="http://schemas.microsoft.com/office/drawing/2014/main" id="{C8A036F4-8CAE-4AD5-8D0D-AE2B3AD423F3}"/>
+                <a16:creationId xmlns:a16="http://schemas.microsoft.com/office/drawing/2014/main" id="{0C821D4B-4BEC-4FF7-82F0-2DDB339F3EBB}"/>
               </a:ext>
             </a:extLst>
           </p:cNvPr>
@@ -4558,8 +4426,43 @@
         </p:nvSpPr>
         <p:spPr>
           <a:xfrm xmlns:a="http://schemas.openxmlformats.org/drawingml/2006/main">
-            <a:off x="4133850" y="2400300"/>
-            <a:ext cx="3048000" cy="1524000"/>
+            <a:off x="7315200" y="2095500"/>
+            <a:ext cx="0" cy="2381250"/>
+          </a:xfrm>
+          <a:prstGeom xmlns:a="http://schemas.openxmlformats.org/drawingml/2006/main" prst="line">
+            <a:avLst/>
+          </a:prstGeom>
+          <a:solidFill xmlns:a="http://schemas.openxmlformats.org/drawingml/2006/main">
+            <a:srgbClr val="000000">
+              <a:alpha val="0"/>
+            </a:srgbClr>
+          </a:solidFill>
+          <a:ln xmlns:a="http://schemas.openxmlformats.org/drawingml/2006/main" w="9525">
+            <a:solidFill>
+              <a:srgbClr val="526271"/>
+            </a:solidFill>
+            <a:prstDash val="solid"/>
+          </a:ln>
+        </p:spPr>
+      </p:sp>
+      <p:sp>
+        <p:nvSpPr>
+          <p:cNvPr id="11" name="research-name-2">
+            <a:extLst xmlns:a="http://schemas.openxmlformats.org/drawingml/2006/main">
+              <a:ext uri="{FF2B5EF4-FFF2-40B4-BE49-F238E27FC236}">
+                <a16:creationId xmlns:a16="http://schemas.microsoft.com/office/drawing/2014/main" id="{9F86BC4C-8ED1-45D2-8D6C-11A24EC9AA7E}"/>
+              </a:ext>
+            </a:extLst>
+          </p:cNvPr>
+          <p:cNvSpPr>
+            <a:spLocks xmlns:a="http://schemas.openxmlformats.org/drawingml/2006/main" noGrp="1"/>
+          </p:cNvSpPr>
+          <p:nvPr/>
+        </p:nvSpPr>
+        <p:spPr>
+          <a:xfrm xmlns:a="http://schemas.openxmlformats.org/drawingml/2006/main">
+            <a:off x="7581900" y="2381250"/>
+            <a:ext cx="3048000" cy="1809750"/>
           </a:xfrm>
           <a:prstGeom xmlns:a="http://schemas.openxmlformats.org/drawingml/2006/main" prst="rect">
             <a:avLst/>
@@ -4579,45 +4482,72 @@
           </a:ln>
         </p:spPr>
         <p:txBody>
-          <a:bodyPr xmlns:a="http://schemas.openxmlformats.org/drawingml/2006/main" wrap="square" lIns="0" tIns="0" rIns="0" bIns="0" anchor="t">
-            <a:normAutofit fontScale="100000"/>
+          <a:bodyPr xmlns:a="http://schemas.openxmlformats.org/drawingml/2006/main" wrap="square" lIns="38100" tIns="0" rIns="38100" bIns="0" anchor="ctr">
+            <a:noAutofit/>
           </a:bodyPr>
           <a:lstStyle xmlns:a="http://schemas.openxmlformats.org/drawingml/2006/main"/>
           <a:p xmlns:a="http://schemas.openxmlformats.org/drawingml/2006/main">
-            <a:pPr algn="l">
+            <a:pPr algn="ctr">
               <a:lnSpc>
-                <a:spcPct val="98000"/>
+                <a:spcPct val="95000"/>
               </a:lnSpc>
               <a:buNone/>
-              <a:defRPr sz="2100" b="1" i="0">
-                <a:solidFill>
-                  <a:srgbClr val="FFFFFF"/>
-                </a:solidFill>
-                <a:latin typeface="Aptos"/>
-                <a:ea typeface="Aptos"/>
-                <a:cs typeface="Aptos"/>
+              <a:defRPr sz="3300" b="1" i="0">
+                <a:solidFill>
+                  <a:srgbClr val="DCE7E2"/>
+                </a:solidFill>
+                <a:latin typeface="Aptos Display"/>
+                <a:ea typeface="Aptos Display"/>
+                <a:cs typeface="Aptos Display"/>
               </a:defRPr>
             </a:pPr>
             <a:r>
-              <a:rPr sz="2100" b="1" i="0">
-                <a:solidFill>
-                  <a:srgbClr val="FFFFFF"/>
-                </a:solidFill>
-                <a:latin typeface="Aptos"/>
-                <a:ea typeface="Aptos"/>
-                <a:cs typeface="Aptos"/>
+              <a:rPr sz="3300" b="1" i="0">
+                <a:solidFill>
+                  <a:srgbClr val="DCE7E2"/>
+                </a:solidFill>
+                <a:latin typeface="Aptos Display"/>
+                <a:ea typeface="Aptos Display"/>
+                <a:cs typeface="Aptos Display"/>
               </a:rPr>
-              <a:t>Practise the whole real-world task, apply coaching, and integrate what changed.</a:t>
+              <a:t>Immediate</a:t>
+            </a:r>
+          </a:p>
+          <a:p xmlns:a="http://schemas.openxmlformats.org/drawingml/2006/main">
+            <a:pPr algn="ctr">
+              <a:lnSpc>
+                <a:spcPct val="95000"/>
+              </a:lnSpc>
+              <a:buNone/>
+              <a:defRPr sz="3300" b="1" i="0">
+                <a:solidFill>
+                  <a:srgbClr val="DCE7E2"/>
+                </a:solidFill>
+                <a:latin typeface="Aptos Display"/>
+                <a:ea typeface="Aptos Display"/>
+                <a:cs typeface="Aptos Display"/>
+              </a:defRPr>
+            </a:pPr>
+            <a:r>
+              <a:rPr sz="3300" b="1" i="0">
+                <a:solidFill>
+                  <a:srgbClr val="DCE7E2"/>
+                </a:solidFill>
+                <a:latin typeface="Aptos Display"/>
+                <a:ea typeface="Aptos Display"/>
+                <a:cs typeface="Aptos Display"/>
+              </a:rPr>
+              <a:t>retry</a:t>
             </a:r>
           </a:p>
         </p:txBody>
       </p:sp>
       <p:sp>
         <p:nvSpPr>
-          <p:cNvPr id="9" name="research-product-1">
+          <p:cNvPr id="12" name="research-principle-2">
             <a:extLst xmlns:a="http://schemas.openxmlformats.org/drawingml/2006/main">
               <a:ext uri="{FF2B5EF4-FFF2-40B4-BE49-F238E27FC236}">
-                <a16:creationId xmlns:a16="http://schemas.microsoft.com/office/drawing/2014/main" id="{568503C3-7684-411E-8DC5-CD00DC4716D2}"/>
+                <a16:creationId xmlns:a16="http://schemas.microsoft.com/office/drawing/2014/main" id="{6BD7A561-4609-4F8D-8174-FF16FFB4D1DF}"/>
               </a:ext>
             </a:extLst>
           </p:cNvPr>
@@ -4628,8 +4558,8 @@
         </p:nvSpPr>
         <p:spPr>
           <a:xfrm xmlns:a="http://schemas.openxmlformats.org/drawingml/2006/main">
-            <a:off x="4133850" y="4171950"/>
-            <a:ext cx="2952750" cy="781050"/>
+            <a:off x="7581900" y="4267200"/>
+            <a:ext cx="3048000" cy="819150"/>
           </a:xfrm>
           <a:prstGeom xmlns:a="http://schemas.openxmlformats.org/drawingml/2006/main" prst="rect">
             <a:avLst/>
@@ -4649,19 +4579,19 @@
           </a:ln>
         </p:spPr>
         <p:txBody>
-          <a:bodyPr xmlns:a="http://schemas.openxmlformats.org/drawingml/2006/main" wrap="square" lIns="0" tIns="0" rIns="0" bIns="0" anchor="t">
-            <a:normAutofit fontScale="100000"/>
+          <a:bodyPr xmlns:a="http://schemas.openxmlformats.org/drawingml/2006/main" wrap="square" lIns="76200" tIns="0" rIns="76200" bIns="0" anchor="t">
+            <a:noAutofit/>
           </a:bodyPr>
           <a:lstStyle xmlns:a="http://schemas.openxmlformats.org/drawingml/2006/main"/>
           <a:p xmlns:a="http://schemas.openxmlformats.org/drawingml/2006/main">
-            <a:pPr algn="l">
+            <a:pPr algn="ctr">
               <a:lnSpc>
                 <a:spcPct val="105000"/>
               </a:lnSpc>
               <a:buNone/>
-              <a:defRPr sz="1425" b="0" i="0">
-                <a:solidFill>
-                  <a:srgbClr val="C7D3DB"/>
+              <a:defRPr sz="1575" b="1" i="0">
+                <a:solidFill>
+                  <a:srgbClr val="C7D3D0"/>
                 </a:solidFill>
                 <a:latin typeface="Aptos"/>
                 <a:ea typeface="Aptos"/>
@@ -4669,376 +4599,15 @@
               </a:defRPr>
             </a:pPr>
             <a:r>
-              <a:rPr sz="1425" b="0" i="0">
-                <a:solidFill>
-                  <a:srgbClr val="C7D3DB"/>
+              <a:rPr sz="1575" b="1" i="0">
+                <a:solidFill>
+                  <a:srgbClr val="C7D3D0"/>
                 </a:solidFill>
                 <a:latin typeface="Aptos"/>
                 <a:ea typeface="Aptos"/>
                 <a:cs typeface="Aptos"/>
               </a:rPr>
-              <a:t>spoken Scenario  ·  corrective coaching  ·  visible improvement</a:t>
-            </a:r>
-          </a:p>
-        </p:txBody>
-      </p:sp>
-      <p:sp>
-        <p:nvSpPr>
-          <p:cNvPr id="10" name="research-divider-2">
-            <a:extLst xmlns:a="http://schemas.openxmlformats.org/drawingml/2006/main">
-              <a:ext uri="{FF2B5EF4-FFF2-40B4-BE49-F238E27FC236}">
-                <a16:creationId xmlns:a16="http://schemas.microsoft.com/office/drawing/2014/main" id="{0C821D4B-4BEC-4FF7-82F0-2DDB339F3EBB}"/>
-              </a:ext>
-            </a:extLst>
-          </p:cNvPr>
-          <p:cNvSpPr>
-            <a:spLocks xmlns:a="http://schemas.openxmlformats.org/drawingml/2006/main" noGrp="1"/>
-          </p:cNvSpPr>
-          <p:nvPr/>
-        </p:nvSpPr>
-        <p:spPr>
-          <a:xfrm xmlns:a="http://schemas.openxmlformats.org/drawingml/2006/main">
-            <a:off x="7315200" y="1809750"/>
-            <a:ext cx="0" cy="3124200"/>
-          </a:xfrm>
-          <a:prstGeom xmlns:a="http://schemas.openxmlformats.org/drawingml/2006/main" prst="line">
-            <a:avLst/>
-          </a:prstGeom>
-          <a:solidFill xmlns:a="http://schemas.openxmlformats.org/drawingml/2006/main">
-            <a:srgbClr val="000000">
-              <a:alpha val="0"/>
-            </a:srgbClr>
-          </a:solidFill>
-          <a:ln xmlns:a="http://schemas.openxmlformats.org/drawingml/2006/main" w="9525">
-            <a:solidFill>
-              <a:srgbClr val="526271"/>
-            </a:solidFill>
-            <a:prstDash val="solid"/>
-          </a:ln>
-        </p:spPr>
-      </p:sp>
-      <p:sp>
-        <p:nvSpPr>
-          <p:cNvPr id="11" name="research-name-2">
-            <a:extLst xmlns:a="http://schemas.openxmlformats.org/drawingml/2006/main">
-              <a:ext uri="{FF2B5EF4-FFF2-40B4-BE49-F238E27FC236}">
-                <a16:creationId xmlns:a16="http://schemas.microsoft.com/office/drawing/2014/main" id="{9F86BC4C-8ED1-45D2-8D6C-11A24EC9AA7E}"/>
-              </a:ext>
-            </a:extLst>
-          </p:cNvPr>
-          <p:cNvSpPr>
-            <a:spLocks xmlns:a="http://schemas.openxmlformats.org/drawingml/2006/main" noGrp="1"/>
-          </p:cNvSpPr>
-          <p:nvPr/>
-        </p:nvSpPr>
-        <p:spPr>
-          <a:xfrm xmlns:a="http://schemas.openxmlformats.org/drawingml/2006/main">
-            <a:off x="7581900" y="1809750"/>
-            <a:ext cx="3048000" cy="419100"/>
-          </a:xfrm>
-          <a:prstGeom xmlns:a="http://schemas.openxmlformats.org/drawingml/2006/main" prst="rect">
-            <a:avLst/>
-          </a:prstGeom>
-          <a:solidFill xmlns:a="http://schemas.openxmlformats.org/drawingml/2006/main">
-            <a:srgbClr val="000000">
-              <a:alpha val="0"/>
-            </a:srgbClr>
-          </a:solidFill>
-          <a:ln xmlns:a="http://schemas.openxmlformats.org/drawingml/2006/main" w="0">
-            <a:solidFill>
-              <a:srgbClr val="000000">
-                <a:alpha val="0"/>
-              </a:srgbClr>
-            </a:solidFill>
-            <a:prstDash val="solid"/>
-          </a:ln>
-        </p:spPr>
-        <p:txBody>
-          <a:bodyPr xmlns:a="http://schemas.openxmlformats.org/drawingml/2006/main" wrap="square" lIns="0" tIns="0" rIns="0" bIns="0" anchor="t">
-            <a:normAutofit fontScale="100000"/>
-          </a:bodyPr>
-          <a:lstStyle xmlns:a="http://schemas.openxmlformats.org/drawingml/2006/main"/>
-          <a:p xmlns:a="http://schemas.openxmlformats.org/drawingml/2006/main">
-            <a:pPr algn="l">
-              <a:lnSpc>
-                <a:spcPct val="100000"/>
-              </a:lnSpc>
-              <a:buNone/>
-              <a:defRPr sz="2175" b="1" i="0">
-                <a:solidFill>
-                  <a:srgbClr val="DCE8E3"/>
-                </a:solidFill>
-                <a:latin typeface="Aptos Display"/>
-                <a:ea typeface="Aptos Display"/>
-                <a:cs typeface="Aptos Display"/>
-              </a:defRPr>
-            </a:pPr>
-            <a:r>
-              <a:rPr sz="2175" b="1" i="0">
-                <a:solidFill>
-                  <a:srgbClr val="DCE8E3"/>
-                </a:solidFill>
-                <a:latin typeface="Aptos Display"/>
-                <a:ea typeface="Aptos Display"/>
-                <a:cs typeface="Aptos Display"/>
-              </a:rPr>
-              <a:t>Hattie–Timperley</a:t>
-            </a:r>
-          </a:p>
-        </p:txBody>
-      </p:sp>
-      <p:sp>
-        <p:nvSpPr>
-          <p:cNvPr id="12" name="research-principle-2">
-            <a:extLst xmlns:a="http://schemas.openxmlformats.org/drawingml/2006/main">
-              <a:ext uri="{FF2B5EF4-FFF2-40B4-BE49-F238E27FC236}">
-                <a16:creationId xmlns:a16="http://schemas.microsoft.com/office/drawing/2014/main" id="{6BD7A561-4609-4F8D-8174-FF16FFB4D1DF}"/>
-              </a:ext>
-            </a:extLst>
-          </p:cNvPr>
-          <p:cNvSpPr>
-            <a:spLocks xmlns:a="http://schemas.openxmlformats.org/drawingml/2006/main" noGrp="1"/>
-          </p:cNvSpPr>
-          <p:nvPr/>
-        </p:nvSpPr>
-        <p:spPr>
-          <a:xfrm xmlns:a="http://schemas.openxmlformats.org/drawingml/2006/main">
-            <a:off x="7581900" y="2400300"/>
-            <a:ext cx="3048000" cy="1524000"/>
-          </a:xfrm>
-          <a:prstGeom xmlns:a="http://schemas.openxmlformats.org/drawingml/2006/main" prst="rect">
-            <a:avLst/>
-          </a:prstGeom>
-          <a:solidFill xmlns:a="http://schemas.openxmlformats.org/drawingml/2006/main">
-            <a:srgbClr val="000000">
-              <a:alpha val="0"/>
-            </a:srgbClr>
-          </a:solidFill>
-          <a:ln xmlns:a="http://schemas.openxmlformats.org/drawingml/2006/main" w="0">
-            <a:solidFill>
-              <a:srgbClr val="000000">
-                <a:alpha val="0"/>
-              </a:srgbClr>
-            </a:solidFill>
-            <a:prstDash val="solid"/>
-          </a:ln>
-        </p:spPr>
-        <p:txBody>
-          <a:bodyPr xmlns:a="http://schemas.openxmlformats.org/drawingml/2006/main" wrap="square" lIns="0" tIns="0" rIns="0" bIns="0" anchor="t">
-            <a:normAutofit fontScale="100000"/>
-          </a:bodyPr>
-          <a:lstStyle xmlns:a="http://schemas.openxmlformats.org/drawingml/2006/main"/>
-          <a:p xmlns:a="http://schemas.openxmlformats.org/drawingml/2006/main">
-            <a:pPr algn="l">
-              <a:lnSpc>
-                <a:spcPct val="98000"/>
-              </a:lnSpc>
-              <a:buNone/>
-              <a:defRPr sz="2100" b="1" i="0">
-                <a:solidFill>
-                  <a:srgbClr val="FFFFFF"/>
-                </a:solidFill>
-                <a:latin typeface="Aptos"/>
-                <a:ea typeface="Aptos"/>
-                <a:cs typeface="Aptos"/>
-              </a:defRPr>
-            </a:pPr>
-            <a:r>
-              <a:rPr sz="2100" b="1" i="0">
-                <a:solidFill>
-                  <a:srgbClr val="FFFFFF"/>
-                </a:solidFill>
-                <a:latin typeface="Aptos"/>
-                <a:ea typeface="Aptos"/>
-                <a:cs typeface="Aptos"/>
-              </a:rPr>
-              <a:t>Make the standard, current performance, and next move explicit.</a:t>
-            </a:r>
-          </a:p>
-        </p:txBody>
-      </p:sp>
-      <p:sp>
-        <p:nvSpPr>
-          <p:cNvPr id="13" name="research-product-2">
-            <a:extLst xmlns:a="http://schemas.openxmlformats.org/drawingml/2006/main">
-              <a:ext uri="{FF2B5EF4-FFF2-40B4-BE49-F238E27FC236}">
-                <a16:creationId xmlns:a16="http://schemas.microsoft.com/office/drawing/2014/main" id="{C9DF9946-B9D0-46E7-A4A9-80BB6445A3DF}"/>
-              </a:ext>
-            </a:extLst>
-          </p:cNvPr>
-          <p:cNvSpPr>
-            <a:spLocks xmlns:a="http://schemas.openxmlformats.org/drawingml/2006/main" noGrp="1"/>
-          </p:cNvSpPr>
-          <p:nvPr/>
-        </p:nvSpPr>
-        <p:spPr>
-          <a:xfrm xmlns:a="http://schemas.openxmlformats.org/drawingml/2006/main">
-            <a:off x="7581900" y="4171950"/>
-            <a:ext cx="2952750" cy="781050"/>
-          </a:xfrm>
-          <a:prstGeom xmlns:a="http://schemas.openxmlformats.org/drawingml/2006/main" prst="rect">
-            <a:avLst/>
-          </a:prstGeom>
-          <a:solidFill xmlns:a="http://schemas.openxmlformats.org/drawingml/2006/main">
-            <a:srgbClr val="000000">
-              <a:alpha val="0"/>
-            </a:srgbClr>
-          </a:solidFill>
-          <a:ln xmlns:a="http://schemas.openxmlformats.org/drawingml/2006/main" w="0">
-            <a:solidFill>
-              <a:srgbClr val="000000">
-                <a:alpha val="0"/>
-              </a:srgbClr>
-            </a:solidFill>
-            <a:prstDash val="solid"/>
-          </a:ln>
-        </p:spPr>
-        <p:txBody>
-          <a:bodyPr xmlns:a="http://schemas.openxmlformats.org/drawingml/2006/main" wrap="square" lIns="0" tIns="0" rIns="0" bIns="0" anchor="t">
-            <a:normAutofit fontScale="100000"/>
-          </a:bodyPr>
-          <a:lstStyle xmlns:a="http://schemas.openxmlformats.org/drawingml/2006/main"/>
-          <a:p xmlns:a="http://schemas.openxmlformats.org/drawingml/2006/main">
-            <a:pPr algn="l">
-              <a:lnSpc>
-                <a:spcPct val="105000"/>
-              </a:lnSpc>
-              <a:buNone/>
-              <a:defRPr sz="1425" b="0" i="0">
-                <a:solidFill>
-                  <a:srgbClr val="C7D3DB"/>
-                </a:solidFill>
-                <a:latin typeface="Aptos"/>
-                <a:ea typeface="Aptos"/>
-                <a:cs typeface="Aptos"/>
-              </a:defRPr>
-            </a:pPr>
-            <a:r>
-              <a:rPr sz="1425" b="0" i="0">
-                <a:solidFill>
-                  <a:srgbClr val="C7D3DB"/>
-                </a:solidFill>
-                <a:latin typeface="Aptos"/>
-                <a:ea typeface="Aptos"/>
-                <a:cs typeface="Aptos"/>
-              </a:rPr>
-              <a:t>fixed Rubric  ·  exact evidence  ·  specific next move</a:t>
-            </a:r>
-          </a:p>
-        </p:txBody>
-      </p:sp>
-      <p:sp>
-        <p:nvSpPr>
-          <p:cNvPr id="14" name="research-bottom-rule">
-            <a:extLst xmlns:a="http://schemas.openxmlformats.org/drawingml/2006/main">
-              <a:ext uri="{FF2B5EF4-FFF2-40B4-BE49-F238E27FC236}">
-                <a16:creationId xmlns:a16="http://schemas.microsoft.com/office/drawing/2014/main" id="{61DCEA2D-B3CD-4807-A77A-13CF0379620F}"/>
-              </a:ext>
-            </a:extLst>
-          </p:cNvPr>
-          <p:cNvSpPr>
-            <a:spLocks xmlns:a="http://schemas.openxmlformats.org/drawingml/2006/main" noGrp="1"/>
-          </p:cNvSpPr>
-          <p:nvPr/>
-        </p:nvSpPr>
-        <p:spPr>
-          <a:xfrm xmlns:a="http://schemas.openxmlformats.org/drawingml/2006/main">
-            <a:off x="685800" y="5276850"/>
-            <a:ext cx="10820400" cy="0"/>
-          </a:xfrm>
-          <a:prstGeom xmlns:a="http://schemas.openxmlformats.org/drawingml/2006/main" prst="line">
-            <a:avLst/>
-          </a:prstGeom>
-          <a:solidFill xmlns:a="http://schemas.openxmlformats.org/drawingml/2006/main">
-            <a:srgbClr val="000000">
-              <a:alpha val="0"/>
-            </a:srgbClr>
-          </a:solidFill>
-          <a:ln xmlns:a="http://schemas.openxmlformats.org/drawingml/2006/main" w="9525">
-            <a:solidFill>
-              <a:srgbClr val="526271"/>
-            </a:solidFill>
-            <a:prstDash val="solid"/>
-          </a:ln>
-        </p:spPr>
-      </p:sp>
-      <p:sp>
-        <p:nvSpPr>
-          <p:cNvPr id="15" name="research-claim">
-            <a:extLst xmlns:a="http://schemas.openxmlformats.org/drawingml/2006/main">
-              <a:ext uri="{FF2B5EF4-FFF2-40B4-BE49-F238E27FC236}">
-                <a16:creationId xmlns:a16="http://schemas.microsoft.com/office/drawing/2014/main" id="{F30BAC6D-0456-4A9E-9A74-6FF35F2A7BC5}"/>
-              </a:ext>
-            </a:extLst>
-          </p:cNvPr>
-          <p:cNvSpPr>
-            <a:spLocks xmlns:a="http://schemas.openxmlformats.org/drawingml/2006/main" noGrp="1"/>
-          </p:cNvSpPr>
-          <p:nvPr/>
-        </p:nvSpPr>
-        <p:spPr>
-          <a:xfrm xmlns:a="http://schemas.openxmlformats.org/drawingml/2006/main">
-            <a:off x="685800" y="5467350"/>
-            <a:ext cx="10477500" cy="495300"/>
-          </a:xfrm>
-          <a:prstGeom xmlns:a="http://schemas.openxmlformats.org/drawingml/2006/main" prst="rect">
-            <a:avLst/>
-          </a:prstGeom>
-          <a:solidFill xmlns:a="http://schemas.openxmlformats.org/drawingml/2006/main">
-            <a:srgbClr val="000000">
-              <a:alpha val="0"/>
-            </a:srgbClr>
-          </a:solidFill>
-          <a:ln xmlns:a="http://schemas.openxmlformats.org/drawingml/2006/main" w="0">
-            <a:solidFill>
-              <a:srgbClr val="000000">
-                <a:alpha val="0"/>
-              </a:srgbClr>
-            </a:solidFill>
-            <a:prstDash val="solid"/>
-          </a:ln>
-        </p:spPr>
-        <p:txBody>
-          <a:bodyPr xmlns:a="http://schemas.openxmlformats.org/drawingml/2006/main" wrap="square" lIns="0" tIns="0" rIns="0" bIns="0" anchor="t">
-            <a:normAutofit fontScale="100000"/>
-          </a:bodyPr>
-          <a:lstStyle xmlns:a="http://schemas.openxmlformats.org/drawingml/2006/main"/>
-          <a:p xmlns:a="http://schemas.openxmlformats.org/drawingml/2006/main">
-            <a:pPr algn="l">
-              <a:lnSpc>
-                <a:spcPct val="100000"/>
-              </a:lnSpc>
-              <a:buNone/>
-              <a:defRPr sz="1875" b="0" i="0">
-                <a:solidFill>
-                  <a:srgbClr val="FFFFFF"/>
-                </a:solidFill>
-                <a:latin typeface="Aptos"/>
-                <a:ea typeface="Aptos"/>
-                <a:cs typeface="Aptos"/>
-              </a:defRPr>
-            </a:pPr>
-            <a:r>
-              <a:rPr sz="1875" b="1">
-                <a:solidFill>
-                  <a:srgbClr val="FFFFFF"/>
-                </a:solidFill>
-                <a:latin typeface="Aptos"/>
-                <a:ea typeface="Aptos"/>
-                <a:cs typeface="Aptos"/>
-              </a:rPr>
-              <a:t>Grounded in these principles—</a:t>
-            </a:r>
-            <a:r>
-              <a:rPr sz="1875">
-                <a:solidFill>
-                  <a:srgbClr val="FFFFFF"/>
-                </a:solidFill>
-                <a:latin typeface="Aptos"/>
-                <a:ea typeface="Aptos"/>
-                <a:cs typeface="Aptos"/>
-              </a:rPr>
-              <a:t>not presented as proof that the prototype works at organizational scale.</a:t>
+              <a:t>Apply that next move while the conversation is still fresh.</a:t>
             </a:r>
           </a:p>
         </p:txBody>
@@ -5403,7 +4972,7 @@
         </p:nvSpPr>
         <p:spPr>
           <a:xfrm xmlns:a="http://schemas.openxmlformats.org/drawingml/2006/main">
-            <a:off x="914400" y="2990850"/>
+            <a:off x="914400" y="3190875"/>
             <a:ext cx="10001250" cy="0"/>
           </a:xfrm>
           <a:prstGeom xmlns:a="http://schemas.openxmlformats.org/drawingml/2006/main" prst="line">
@@ -5438,7 +5007,7 @@
         </p:nvSpPr>
         <p:spPr>
           <a:xfrm xmlns:a="http://schemas.openxmlformats.org/drawingml/2006/main">
-            <a:off x="790575" y="2867025"/>
+            <a:off x="790575" y="3067050"/>
             <a:ext cx="247650" cy="247650"/>
           </a:xfrm>
           <a:prstGeom xmlns:a="http://schemas.openxmlformats.org/drawingml/2006/main" prst="roundRect">
@@ -5473,7 +5042,7 @@
         </p:nvSpPr>
         <p:spPr>
           <a:xfrm xmlns:a="http://schemas.openxmlformats.org/drawingml/2006/main">
-            <a:off x="723900" y="2533650"/>
+            <a:off x="723900" y="2571750"/>
             <a:ext cx="381000" cy="228600"/>
           </a:xfrm>
           <a:prstGeom xmlns:a="http://schemas.openxmlformats.org/drawingml/2006/main" prst="rect">
@@ -5494,8 +5063,8 @@
           </a:ln>
         </p:spPr>
         <p:txBody>
-          <a:bodyPr xmlns:a="http://schemas.openxmlformats.org/drawingml/2006/main" wrap="square" lIns="0" tIns="0" rIns="0" bIns="0" anchor="t">
-            <a:normAutofit fontScale="100000"/>
+          <a:bodyPr xmlns:a="http://schemas.openxmlformats.org/drawingml/2006/main" wrap="square" lIns="0" tIns="0" rIns="0" bIns="0" anchor="ctr">
+            <a:noAutofit/>
           </a:bodyPr>
           <a:lstStyle xmlns:a="http://schemas.openxmlformats.org/drawingml/2006/main"/>
           <a:p xmlns:a="http://schemas.openxmlformats.org/drawingml/2006/main">
@@ -5543,8 +5112,8 @@
         </p:nvSpPr>
         <p:spPr>
           <a:xfrm xmlns:a="http://schemas.openxmlformats.org/drawingml/2006/main">
-            <a:off x="209550" y="3257550"/>
-            <a:ext cx="1409700" cy="381000"/>
+            <a:off x="104775" y="3543300"/>
+            <a:ext cx="1619250" cy="590550"/>
           </a:xfrm>
           <a:prstGeom xmlns:a="http://schemas.openxmlformats.org/drawingml/2006/main" prst="rect">
             <a:avLst/>
@@ -5565,16 +5134,16 @@
         </p:spPr>
         <p:txBody>
           <a:bodyPr xmlns:a="http://schemas.openxmlformats.org/drawingml/2006/main" wrap="square" lIns="0" tIns="0" rIns="0" bIns="0" anchor="ctr">
-            <a:normAutofit fontScale="100000"/>
+            <a:noAutofit/>
           </a:bodyPr>
           <a:lstStyle xmlns:a="http://schemas.openxmlformats.org/drawingml/2006/main"/>
           <a:p xmlns:a="http://schemas.openxmlformats.org/drawingml/2006/main">
             <a:pPr algn="ctr">
               <a:lnSpc>
-                <a:spcPct val="100000"/>
+                <a:spcPct val="95000"/>
               </a:lnSpc>
               <a:buNone/>
-              <a:defRPr sz="1500" b="1" i="0">
+              <a:defRPr sz="1725" b="1" i="0">
                 <a:solidFill>
                   <a:srgbClr val="162A3C"/>
                 </a:solidFill>
@@ -5584,7 +5153,7 @@
               </a:defRPr>
             </a:pPr>
             <a:r>
-              <a:rPr sz="1500" b="1" i="0">
+              <a:rPr sz="1725" b="1" i="0">
                 <a:solidFill>
                   <a:srgbClr val="162A3C"/>
                 </a:solidFill>
@@ -5599,10 +5168,10 @@
       </p:sp>
       <p:sp>
         <p:nvSpPr>
-          <p:cNvPr id="9" name="scenario-quote-0">
+          <p:cNvPr id="10" name="scenario-node-1">
             <a:extLst xmlns:a="http://schemas.openxmlformats.org/drawingml/2006/main">
               <a:ext uri="{FF2B5EF4-FFF2-40B4-BE49-F238E27FC236}">
-                <a16:creationId xmlns:a16="http://schemas.microsoft.com/office/drawing/2014/main" id="{847181A3-4D3C-4F0B-B261-F04D788CECBB}"/>
+                <a16:creationId xmlns:a16="http://schemas.microsoft.com/office/drawing/2014/main" id="{3B57A99F-523B-418C-A2FE-DE62A83E630D}"/>
               </a:ext>
             </a:extLst>
           </p:cNvPr>
@@ -5613,8 +5182,43 @@
         </p:nvSpPr>
         <p:spPr>
           <a:xfrm xmlns:a="http://schemas.openxmlformats.org/drawingml/2006/main">
-            <a:off x="152400" y="3714750"/>
-            <a:ext cx="1524000" cy="952500"/>
+            <a:off x="2657475" y="3067050"/>
+            <a:ext cx="247650" cy="247650"/>
+          </a:xfrm>
+          <a:prstGeom xmlns:a="http://schemas.openxmlformats.org/drawingml/2006/main" prst="roundRect">
+            <a:avLst>
+              <a:gd name="adj" fmla="val 50000"/>
+            </a:avLst>
+          </a:prstGeom>
+          <a:solidFill xmlns:a="http://schemas.openxmlformats.org/drawingml/2006/main">
+            <a:srgbClr val="F6F1E8"/>
+          </a:solidFill>
+          <a:ln xmlns:a="http://schemas.openxmlformats.org/drawingml/2006/main" w="9525">
+            <a:solidFill>
+              <a:srgbClr val="2D6F6B"/>
+            </a:solidFill>
+            <a:prstDash val="solid"/>
+          </a:ln>
+        </p:spPr>
+      </p:sp>
+      <p:sp>
+        <p:nvSpPr>
+          <p:cNvPr id="11" name="scenario-number-1">
+            <a:extLst xmlns:a="http://schemas.openxmlformats.org/drawingml/2006/main">
+              <a:ext uri="{FF2B5EF4-FFF2-40B4-BE49-F238E27FC236}">
+                <a16:creationId xmlns:a16="http://schemas.microsoft.com/office/drawing/2014/main" id="{9F914DA5-154C-459D-8B5A-5CF4836D22EF}"/>
+              </a:ext>
+            </a:extLst>
+          </p:cNvPr>
+          <p:cNvSpPr>
+            <a:spLocks xmlns:a="http://schemas.openxmlformats.org/drawingml/2006/main" noGrp="1"/>
+          </p:cNvSpPr>
+          <p:nvPr/>
+        </p:nvSpPr>
+        <p:spPr>
+          <a:xfrm xmlns:a="http://schemas.openxmlformats.org/drawingml/2006/main">
+            <a:off x="2590800" y="2571750"/>
+            <a:ext cx="381000" cy="228600"/>
           </a:xfrm>
           <a:prstGeom xmlns:a="http://schemas.openxmlformats.org/drawingml/2006/main" prst="rect">
             <a:avLst/>
@@ -5634,8 +5238,8 @@
           </a:ln>
         </p:spPr>
         <p:txBody>
-          <a:bodyPr xmlns:a="http://schemas.openxmlformats.org/drawingml/2006/main" wrap="square" lIns="0" tIns="0" rIns="0" bIns="0" anchor="t">
-            <a:normAutofit fontScale="100000"/>
+          <a:bodyPr xmlns:a="http://schemas.openxmlformats.org/drawingml/2006/main" wrap="square" lIns="0" tIns="0" rIns="0" bIns="0" anchor="ctr">
+            <a:noAutofit/>
           </a:bodyPr>
           <a:lstStyle xmlns:a="http://schemas.openxmlformats.org/drawingml/2006/main"/>
           <a:p xmlns:a="http://schemas.openxmlformats.org/drawingml/2006/main">
@@ -5644,9 +5248,9 @@
                 <a:spcPct val="100000"/>
               </a:lnSpc>
               <a:buNone/>
-              <a:defRPr sz="1350" b="0" i="0">
-                <a:solidFill>
-                  <a:srgbClr val="5B6670"/>
+              <a:defRPr sz="1200" b="1" i="0">
+                <a:solidFill>
+                  <a:srgbClr val="2D6F6B"/>
                 </a:solidFill>
                 <a:latin typeface="Aptos"/>
                 <a:ea typeface="Aptos"/>
@@ -5654,25 +5258,25 @@
               </a:defRPr>
             </a:pPr>
             <a:r>
-              <a:rPr sz="1350" b="0" i="0">
-                <a:solidFill>
-                  <a:srgbClr val="5B6670"/>
+              <a:rPr sz="1200" b="1" i="0">
+                <a:solidFill>
+                  <a:srgbClr val="2D6F6B"/>
                 </a:solidFill>
                 <a:latin typeface="Aptos"/>
                 <a:ea typeface="Aptos"/>
                 <a:cs typeface="Aptos"/>
               </a:rPr>
-              <a:t>“I’d like to close my account.”</a:t>
+              <a:t>02</a:t>
             </a:r>
           </a:p>
         </p:txBody>
       </p:sp>
       <p:sp>
         <p:nvSpPr>
-          <p:cNvPr id="10" name="scenario-node-1">
+          <p:cNvPr id="12" name="scenario-step-1">
             <a:extLst xmlns:a="http://schemas.openxmlformats.org/drawingml/2006/main">
               <a:ext uri="{FF2B5EF4-FFF2-40B4-BE49-F238E27FC236}">
-                <a16:creationId xmlns:a16="http://schemas.microsoft.com/office/drawing/2014/main" id="{3B57A99F-523B-418C-A2FE-DE62A83E630D}"/>
+                <a16:creationId xmlns:a16="http://schemas.microsoft.com/office/drawing/2014/main" id="{B2C0D5F6-6BE4-43A6-9CB6-6647004FAF2A}"/>
               </a:ext>
             </a:extLst>
           </p:cNvPr>
@@ -5683,43 +5287,8 @@
         </p:nvSpPr>
         <p:spPr>
           <a:xfrm xmlns:a="http://schemas.openxmlformats.org/drawingml/2006/main">
-            <a:off x="2657475" y="2867025"/>
-            <a:ext cx="247650" cy="247650"/>
-          </a:xfrm>
-          <a:prstGeom xmlns:a="http://schemas.openxmlformats.org/drawingml/2006/main" prst="roundRect">
-            <a:avLst>
-              <a:gd name="adj" fmla="val 50000"/>
-            </a:avLst>
-          </a:prstGeom>
-          <a:solidFill xmlns:a="http://schemas.openxmlformats.org/drawingml/2006/main">
-            <a:srgbClr val="F6F1E8"/>
-          </a:solidFill>
-          <a:ln xmlns:a="http://schemas.openxmlformats.org/drawingml/2006/main" w="9525">
-            <a:solidFill>
-              <a:srgbClr val="2D6F6B"/>
-            </a:solidFill>
-            <a:prstDash val="solid"/>
-          </a:ln>
-        </p:spPr>
-      </p:sp>
-      <p:sp>
-        <p:nvSpPr>
-          <p:cNvPr id="11" name="scenario-number-1">
-            <a:extLst xmlns:a="http://schemas.openxmlformats.org/drawingml/2006/main">
-              <a:ext uri="{FF2B5EF4-FFF2-40B4-BE49-F238E27FC236}">
-                <a16:creationId xmlns:a16="http://schemas.microsoft.com/office/drawing/2014/main" id="{9F914DA5-154C-459D-8B5A-5CF4836D22EF}"/>
-              </a:ext>
-            </a:extLst>
-          </p:cNvPr>
-          <p:cNvSpPr>
-            <a:spLocks xmlns:a="http://schemas.openxmlformats.org/drawingml/2006/main" noGrp="1"/>
-          </p:cNvSpPr>
-          <p:nvPr/>
-        </p:nvSpPr>
-        <p:spPr>
-          <a:xfrm xmlns:a="http://schemas.openxmlformats.org/drawingml/2006/main">
-            <a:off x="2590800" y="2533650"/>
-            <a:ext cx="381000" cy="228600"/>
+            <a:off x="1971675" y="3543300"/>
+            <a:ext cx="1619250" cy="590550"/>
           </a:xfrm>
           <a:prstGeom xmlns:a="http://schemas.openxmlformats.org/drawingml/2006/main" prst="rect">
             <a:avLst/>
@@ -5739,19 +5308,19 @@
           </a:ln>
         </p:spPr>
         <p:txBody>
-          <a:bodyPr xmlns:a="http://schemas.openxmlformats.org/drawingml/2006/main" wrap="square" lIns="0" tIns="0" rIns="0" bIns="0" anchor="t">
-            <a:normAutofit fontScale="100000"/>
+          <a:bodyPr xmlns:a="http://schemas.openxmlformats.org/drawingml/2006/main" wrap="square" lIns="0" tIns="0" rIns="0" bIns="0" anchor="ctr">
+            <a:noAutofit/>
           </a:bodyPr>
           <a:lstStyle xmlns:a="http://schemas.openxmlformats.org/drawingml/2006/main"/>
           <a:p xmlns:a="http://schemas.openxmlformats.org/drawingml/2006/main">
             <a:pPr algn="ctr">
               <a:lnSpc>
-                <a:spcPct val="100000"/>
+                <a:spcPct val="95000"/>
               </a:lnSpc>
               <a:buNone/>
-              <a:defRPr sz="1200" b="1" i="0">
-                <a:solidFill>
-                  <a:srgbClr val="2D6F6B"/>
+              <a:defRPr sz="1725" b="1" i="0">
+                <a:solidFill>
+                  <a:srgbClr val="162A3C"/>
                 </a:solidFill>
                 <a:latin typeface="Aptos"/>
                 <a:ea typeface="Aptos"/>
@@ -5759,25 +5328,25 @@
               </a:defRPr>
             </a:pPr>
             <a:r>
-              <a:rPr sz="1200" b="1" i="0">
-                <a:solidFill>
-                  <a:srgbClr val="2D6F6B"/>
+              <a:rPr sz="1725" b="1" i="0">
+                <a:solidFill>
+                  <a:srgbClr val="162A3C"/>
                 </a:solidFill>
                 <a:latin typeface="Aptos"/>
                 <a:ea typeface="Aptos"/>
                 <a:cs typeface="Aptos"/>
               </a:rPr>
-              <a:t>02</a:t>
+              <a:t>Cover story</a:t>
             </a:r>
           </a:p>
         </p:txBody>
       </p:sp>
       <p:sp>
         <p:nvSpPr>
-          <p:cNvPr id="12" name="scenario-step-1">
+          <p:cNvPr id="14" name="scenario-node-2">
             <a:extLst xmlns:a="http://schemas.openxmlformats.org/drawingml/2006/main">
               <a:ext uri="{FF2B5EF4-FFF2-40B4-BE49-F238E27FC236}">
-                <a16:creationId xmlns:a16="http://schemas.microsoft.com/office/drawing/2014/main" id="{B2C0D5F6-6BE4-43A6-9CB6-6647004FAF2A}"/>
+                <a16:creationId xmlns:a16="http://schemas.microsoft.com/office/drawing/2014/main" id="{DF4EDBD7-D5DE-4B82-B76E-54C2A1224BD8}"/>
               </a:ext>
             </a:extLst>
           </p:cNvPr>
@@ -5788,8 +5357,43 @@
         </p:nvSpPr>
         <p:spPr>
           <a:xfrm xmlns:a="http://schemas.openxmlformats.org/drawingml/2006/main">
-            <a:off x="2076450" y="3257550"/>
-            <a:ext cx="1409700" cy="381000"/>
+            <a:off x="4524375" y="3067050"/>
+            <a:ext cx="247650" cy="247650"/>
+          </a:xfrm>
+          <a:prstGeom xmlns:a="http://schemas.openxmlformats.org/drawingml/2006/main" prst="roundRect">
+            <a:avLst>
+              <a:gd name="adj" fmla="val 50000"/>
+            </a:avLst>
+          </a:prstGeom>
+          <a:solidFill xmlns:a="http://schemas.openxmlformats.org/drawingml/2006/main">
+            <a:srgbClr val="F6F1E8"/>
+          </a:solidFill>
+          <a:ln xmlns:a="http://schemas.openxmlformats.org/drawingml/2006/main" w="9525">
+            <a:solidFill>
+              <a:srgbClr val="2D6F6B"/>
+            </a:solidFill>
+            <a:prstDash val="solid"/>
+          </a:ln>
+        </p:spPr>
+      </p:sp>
+      <p:sp>
+        <p:nvSpPr>
+          <p:cNvPr id="15" name="scenario-number-2">
+            <a:extLst xmlns:a="http://schemas.openxmlformats.org/drawingml/2006/main">
+              <a:ext uri="{FF2B5EF4-FFF2-40B4-BE49-F238E27FC236}">
+                <a16:creationId xmlns:a16="http://schemas.microsoft.com/office/drawing/2014/main" id="{BA7AAD42-AA9F-4894-B188-FAA345C9E712}"/>
+              </a:ext>
+            </a:extLst>
+          </p:cNvPr>
+          <p:cNvSpPr>
+            <a:spLocks xmlns:a="http://schemas.openxmlformats.org/drawingml/2006/main" noGrp="1"/>
+          </p:cNvSpPr>
+          <p:nvPr/>
+        </p:nvSpPr>
+        <p:spPr>
+          <a:xfrm xmlns:a="http://schemas.openxmlformats.org/drawingml/2006/main">
+            <a:off x="4457700" y="2571750"/>
+            <a:ext cx="381000" cy="228600"/>
           </a:xfrm>
           <a:prstGeom xmlns:a="http://schemas.openxmlformats.org/drawingml/2006/main" prst="rect">
             <a:avLst/>
@@ -5810,7 +5414,7 @@
         </p:spPr>
         <p:txBody>
           <a:bodyPr xmlns:a="http://schemas.openxmlformats.org/drawingml/2006/main" wrap="square" lIns="0" tIns="0" rIns="0" bIns="0" anchor="ctr">
-            <a:normAutofit fontScale="100000"/>
+            <a:noAutofit/>
           </a:bodyPr>
           <a:lstStyle xmlns:a="http://schemas.openxmlformats.org/drawingml/2006/main"/>
           <a:p xmlns:a="http://schemas.openxmlformats.org/drawingml/2006/main">
@@ -5819,9 +5423,9 @@
                 <a:spcPct val="100000"/>
               </a:lnSpc>
               <a:buNone/>
-              <a:defRPr sz="1500" b="1" i="0">
-                <a:solidFill>
-                  <a:srgbClr val="162A3C"/>
+              <a:defRPr sz="1200" b="1" i="0">
+                <a:solidFill>
+                  <a:srgbClr val="2D6F6B"/>
                 </a:solidFill>
                 <a:latin typeface="Aptos"/>
                 <a:ea typeface="Aptos"/>
@@ -5829,25 +5433,25 @@
               </a:defRPr>
             </a:pPr>
             <a:r>
-              <a:rPr sz="1500" b="1" i="0">
-                <a:solidFill>
-                  <a:srgbClr val="162A3C"/>
+              <a:rPr sz="1200" b="1" i="0">
+                <a:solidFill>
+                  <a:srgbClr val="2D6F6B"/>
                 </a:solidFill>
                 <a:latin typeface="Aptos"/>
                 <a:ea typeface="Aptos"/>
                 <a:cs typeface="Aptos"/>
               </a:rPr>
-              <a:t>Cover story</a:t>
+              <a:t>03</a:t>
             </a:r>
           </a:p>
         </p:txBody>
       </p:sp>
       <p:sp>
         <p:nvSpPr>
-          <p:cNvPr id="13" name="scenario-quote-1">
+          <p:cNvPr id="16" name="scenario-step-2">
             <a:extLst xmlns:a="http://schemas.openxmlformats.org/drawingml/2006/main">
               <a:ext uri="{FF2B5EF4-FFF2-40B4-BE49-F238E27FC236}">
-                <a16:creationId xmlns:a16="http://schemas.microsoft.com/office/drawing/2014/main" id="{BFCAF78E-C3A7-4A7B-889F-587C01F57776}"/>
+                <a16:creationId xmlns:a16="http://schemas.microsoft.com/office/drawing/2014/main" id="{E4854C5F-0683-4452-80EF-616420175AF0}"/>
               </a:ext>
             </a:extLst>
           </p:cNvPr>
@@ -5858,8 +5462,8 @@
         </p:nvSpPr>
         <p:spPr>
           <a:xfrm xmlns:a="http://schemas.openxmlformats.org/drawingml/2006/main">
-            <a:off x="2019300" y="3714750"/>
-            <a:ext cx="1524000" cy="952500"/>
+            <a:off x="3838575" y="3543300"/>
+            <a:ext cx="1619250" cy="590550"/>
           </a:xfrm>
           <a:prstGeom xmlns:a="http://schemas.openxmlformats.org/drawingml/2006/main" prst="rect">
             <a:avLst/>
@@ -5879,19 +5483,19 @@
           </a:ln>
         </p:spPr>
         <p:txBody>
-          <a:bodyPr xmlns:a="http://schemas.openxmlformats.org/drawingml/2006/main" wrap="square" lIns="0" tIns="0" rIns="0" bIns="0" anchor="t">
-            <a:normAutofit fontScale="100000"/>
+          <a:bodyPr xmlns:a="http://schemas.openxmlformats.org/drawingml/2006/main" wrap="square" lIns="0" tIns="0" rIns="0" bIns="0" anchor="ctr">
+            <a:noAutofit/>
           </a:bodyPr>
           <a:lstStyle xmlns:a="http://schemas.openxmlformats.org/drawingml/2006/main"/>
           <a:p xmlns:a="http://schemas.openxmlformats.org/drawingml/2006/main">
             <a:pPr algn="ctr">
               <a:lnSpc>
-                <a:spcPct val="100000"/>
+                <a:spcPct val="95000"/>
               </a:lnSpc>
               <a:buNone/>
-              <a:defRPr sz="1350" b="0" i="0">
-                <a:solidFill>
-                  <a:srgbClr val="5B6670"/>
+              <a:defRPr sz="1725" b="1" i="0">
+                <a:solidFill>
+                  <a:srgbClr val="162A3C"/>
                 </a:solidFill>
                 <a:latin typeface="Aptos"/>
                 <a:ea typeface="Aptos"/>
@@ -5899,25 +5503,25 @@
               </a:defRPr>
             </a:pPr>
             <a:r>
-              <a:rPr sz="1350" b="0" i="0">
-                <a:solidFill>
-                  <a:srgbClr val="5B6670"/>
+              <a:rPr sz="1725" b="1" i="0">
+                <a:solidFill>
+                  <a:srgbClr val="162A3C"/>
                 </a:solidFill>
                 <a:latin typeface="Aptos"/>
                 <a:ea typeface="Aptos"/>
                 <a:cs typeface="Aptos"/>
               </a:rPr>
-              <a:t>Fees are high; somewhere else is cheaper.</a:t>
+              <a:t>Open follow-up</a:t>
             </a:r>
           </a:p>
         </p:txBody>
       </p:sp>
       <p:sp>
         <p:nvSpPr>
-          <p:cNvPr id="14" name="scenario-node-2">
+          <p:cNvPr id="18" name="scenario-node-3">
             <a:extLst xmlns:a="http://schemas.openxmlformats.org/drawingml/2006/main">
               <a:ext uri="{FF2B5EF4-FFF2-40B4-BE49-F238E27FC236}">
-                <a16:creationId xmlns:a16="http://schemas.microsoft.com/office/drawing/2014/main" id="{DF4EDBD7-D5DE-4B82-B76E-54C2A1224BD8}"/>
+                <a16:creationId xmlns:a16="http://schemas.microsoft.com/office/drawing/2014/main" id="{D23A383C-CA35-4EE1-85FF-1BFBFD6F4D16}"/>
               </a:ext>
             </a:extLst>
           </p:cNvPr>
@@ -5928,7 +5532,7 @@
         </p:nvSpPr>
         <p:spPr>
           <a:xfrm xmlns:a="http://schemas.openxmlformats.org/drawingml/2006/main">
-            <a:off x="4524375" y="2867025"/>
+            <a:off x="6391275" y="3067050"/>
             <a:ext cx="247650" cy="247650"/>
           </a:xfrm>
           <a:prstGeom xmlns:a="http://schemas.openxmlformats.org/drawingml/2006/main" prst="roundRect">
@@ -5949,10 +5553,10 @@
       </p:sp>
       <p:sp>
         <p:nvSpPr>
-          <p:cNvPr id="15" name="scenario-number-2">
+          <p:cNvPr id="19" name="scenario-number-3">
             <a:extLst xmlns:a="http://schemas.openxmlformats.org/drawingml/2006/main">
               <a:ext uri="{FF2B5EF4-FFF2-40B4-BE49-F238E27FC236}">
-                <a16:creationId xmlns:a16="http://schemas.microsoft.com/office/drawing/2014/main" id="{BA7AAD42-AA9F-4894-B188-FAA345C9E712}"/>
+                <a16:creationId xmlns:a16="http://schemas.microsoft.com/office/drawing/2014/main" id="{7CEE4308-373E-4D3D-8414-47A3F09BD9D0}"/>
               </a:ext>
             </a:extLst>
           </p:cNvPr>
@@ -5963,7 +5567,7 @@
         </p:nvSpPr>
         <p:spPr>
           <a:xfrm xmlns:a="http://schemas.openxmlformats.org/drawingml/2006/main">
-            <a:off x="4457700" y="2533650"/>
+            <a:off x="6324600" y="2571750"/>
             <a:ext cx="381000" cy="228600"/>
           </a:xfrm>
           <a:prstGeom xmlns:a="http://schemas.openxmlformats.org/drawingml/2006/main" prst="rect">
@@ -5984,8 +5588,8 @@
           </a:ln>
         </p:spPr>
         <p:txBody>
-          <a:bodyPr xmlns:a="http://schemas.openxmlformats.org/drawingml/2006/main" wrap="square" lIns="0" tIns="0" rIns="0" bIns="0" anchor="t">
-            <a:normAutofit fontScale="100000"/>
+          <a:bodyPr xmlns:a="http://schemas.openxmlformats.org/drawingml/2006/main" wrap="square" lIns="0" tIns="0" rIns="0" bIns="0" anchor="ctr">
+            <a:noAutofit/>
           </a:bodyPr>
           <a:lstStyle xmlns:a="http://schemas.openxmlformats.org/drawingml/2006/main"/>
           <a:p xmlns:a="http://schemas.openxmlformats.org/drawingml/2006/main">
@@ -6012,17 +5616,17 @@
                 <a:ea typeface="Aptos"/>
                 <a:cs typeface="Aptos"/>
               </a:rPr>
-              <a:t>03</a:t>
+              <a:t>04</a:t>
             </a:r>
           </a:p>
         </p:txBody>
       </p:sp>
       <p:sp>
         <p:nvSpPr>
-          <p:cNvPr id="16" name="scenario-step-2">
+          <p:cNvPr id="20" name="scenario-step-3">
             <a:extLst xmlns:a="http://schemas.openxmlformats.org/drawingml/2006/main">
               <a:ext uri="{FF2B5EF4-FFF2-40B4-BE49-F238E27FC236}">
-                <a16:creationId xmlns:a16="http://schemas.microsoft.com/office/drawing/2014/main" id="{E4854C5F-0683-4452-80EF-616420175AF0}"/>
+                <a16:creationId xmlns:a16="http://schemas.microsoft.com/office/drawing/2014/main" id="{23E0CFC7-8A2D-4381-9EE2-C2DEA1CBB807}"/>
               </a:ext>
             </a:extLst>
           </p:cNvPr>
@@ -6033,8 +5637,8 @@
         </p:nvSpPr>
         <p:spPr>
           <a:xfrm xmlns:a="http://schemas.openxmlformats.org/drawingml/2006/main">
-            <a:off x="3943350" y="3257550"/>
-            <a:ext cx="1409700" cy="381000"/>
+            <a:off x="5705475" y="3543300"/>
+            <a:ext cx="1619250" cy="590550"/>
           </a:xfrm>
           <a:prstGeom xmlns:a="http://schemas.openxmlformats.org/drawingml/2006/main" prst="rect">
             <a:avLst/>
@@ -6055,16 +5659,16 @@
         </p:spPr>
         <p:txBody>
           <a:bodyPr xmlns:a="http://schemas.openxmlformats.org/drawingml/2006/main" wrap="square" lIns="0" tIns="0" rIns="0" bIns="0" anchor="ctr">
-            <a:normAutofit fontScale="100000"/>
+            <a:noAutofit/>
           </a:bodyPr>
           <a:lstStyle xmlns:a="http://schemas.openxmlformats.org/drawingml/2006/main"/>
           <a:p xmlns:a="http://schemas.openxmlformats.org/drawingml/2006/main">
             <a:pPr algn="ctr">
               <a:lnSpc>
-                <a:spcPct val="100000"/>
+                <a:spcPct val="95000"/>
               </a:lnSpc>
               <a:buNone/>
-              <a:defRPr sz="1500" b="1" i="0">
+              <a:defRPr sz="1725" b="1" i="0">
                 <a:solidFill>
                   <a:srgbClr val="162A3C"/>
                 </a:solidFill>
@@ -6074,7 +5678,7 @@
               </a:defRPr>
             </a:pPr>
             <a:r>
-              <a:rPr sz="1500" b="1" i="0">
+              <a:rPr sz="1725" b="1" i="0">
                 <a:solidFill>
                   <a:srgbClr val="162A3C"/>
                 </a:solidFill>
@@ -6082,17 +5686,17 @@
                 <a:ea typeface="Aptos"/>
                 <a:cs typeface="Aptos"/>
               </a:rPr>
-              <a:t>Open follow-up</a:t>
+              <a:t>Incident</a:t>
             </a:r>
           </a:p>
         </p:txBody>
       </p:sp>
       <p:sp>
         <p:nvSpPr>
-          <p:cNvPr id="17" name="scenario-quote-2">
+          <p:cNvPr id="22" name="scenario-node-4">
             <a:extLst xmlns:a="http://schemas.openxmlformats.org/drawingml/2006/main">
               <a:ext uri="{FF2B5EF4-FFF2-40B4-BE49-F238E27FC236}">
-                <a16:creationId xmlns:a16="http://schemas.microsoft.com/office/drawing/2014/main" id="{CAB006C8-8733-4CD8-B381-BE1C8CAD15C4}"/>
+                <a16:creationId xmlns:a16="http://schemas.microsoft.com/office/drawing/2014/main" id="{2E2E0D4C-3459-498C-B47B-A39A0A78BBBB}"/>
               </a:ext>
             </a:extLst>
           </p:cNvPr>
@@ -6103,8 +5707,43 @@
         </p:nvSpPr>
         <p:spPr>
           <a:xfrm xmlns:a="http://schemas.openxmlformats.org/drawingml/2006/main">
-            <a:off x="3886200" y="3714750"/>
-            <a:ext cx="1524000" cy="952500"/>
+            <a:off x="8258175" y="3067050"/>
+            <a:ext cx="247650" cy="247650"/>
+          </a:xfrm>
+          <a:prstGeom xmlns:a="http://schemas.openxmlformats.org/drawingml/2006/main" prst="roundRect">
+            <a:avLst>
+              <a:gd name="adj" fmla="val 50000"/>
+            </a:avLst>
+          </a:prstGeom>
+          <a:solidFill xmlns:a="http://schemas.openxmlformats.org/drawingml/2006/main">
+            <a:srgbClr val="2D6F6B"/>
+          </a:solidFill>
+          <a:ln xmlns:a="http://schemas.openxmlformats.org/drawingml/2006/main" w="9525">
+            <a:solidFill>
+              <a:srgbClr val="2D6F6B"/>
+            </a:solidFill>
+            <a:prstDash val="solid"/>
+          </a:ln>
+        </p:spPr>
+      </p:sp>
+      <p:sp>
+        <p:nvSpPr>
+          <p:cNvPr id="23" name="scenario-number-4">
+            <a:extLst xmlns:a="http://schemas.openxmlformats.org/drawingml/2006/main">
+              <a:ext uri="{FF2B5EF4-FFF2-40B4-BE49-F238E27FC236}">
+                <a16:creationId xmlns:a16="http://schemas.microsoft.com/office/drawing/2014/main" id="{24CAFF6C-9B2B-4DD8-8368-04B3EEDD9C1C}"/>
+              </a:ext>
+            </a:extLst>
+          </p:cNvPr>
+          <p:cNvSpPr>
+            <a:spLocks xmlns:a="http://schemas.openxmlformats.org/drawingml/2006/main" noGrp="1"/>
+          </p:cNvSpPr>
+          <p:nvPr/>
+        </p:nvSpPr>
+        <p:spPr>
+          <a:xfrm xmlns:a="http://schemas.openxmlformats.org/drawingml/2006/main">
+            <a:off x="8191500" y="2571750"/>
+            <a:ext cx="381000" cy="228600"/>
           </a:xfrm>
           <a:prstGeom xmlns:a="http://schemas.openxmlformats.org/drawingml/2006/main" prst="rect">
             <a:avLst/>
@@ -6124,8 +5763,8 @@
           </a:ln>
         </p:spPr>
         <p:txBody>
-          <a:bodyPr xmlns:a="http://schemas.openxmlformats.org/drawingml/2006/main" wrap="square" lIns="0" tIns="0" rIns="0" bIns="0" anchor="t">
-            <a:normAutofit fontScale="100000"/>
+          <a:bodyPr xmlns:a="http://schemas.openxmlformats.org/drawingml/2006/main" wrap="square" lIns="0" tIns="0" rIns="0" bIns="0" anchor="ctr">
+            <a:noAutofit/>
           </a:bodyPr>
           <a:lstStyle xmlns:a="http://schemas.openxmlformats.org/drawingml/2006/main"/>
           <a:p xmlns:a="http://schemas.openxmlformats.org/drawingml/2006/main">
@@ -6134,9 +5773,9 @@
                 <a:spcPct val="100000"/>
               </a:lnSpc>
               <a:buNone/>
-              <a:defRPr sz="1350" b="0" i="0">
-                <a:solidFill>
-                  <a:srgbClr val="5B6670"/>
+              <a:defRPr sz="1200" b="1" i="0">
+                <a:solidFill>
+                  <a:srgbClr val="2D6F6B"/>
                 </a:solidFill>
                 <a:latin typeface="Aptos"/>
                 <a:ea typeface="Aptos"/>
@@ -6144,25 +5783,25 @@
               </a:defRPr>
             </a:pPr>
             <a:r>
-              <a:rPr sz="1350" b="0" i="0">
-                <a:solidFill>
-                  <a:srgbClr val="5B6670"/>
+              <a:rPr sz="1200" b="1" i="0">
+                <a:solidFill>
+                  <a:srgbClr val="2D6F6B"/>
                 </a:solidFill>
                 <a:latin typeface="Aptos"/>
                 <a:ea typeface="Aptos"/>
                 <a:cs typeface="Aptos"/>
               </a:rPr>
-              <a:t>“Can you tell me what led to this?”</a:t>
+              <a:t>05</a:t>
             </a:r>
           </a:p>
         </p:txBody>
       </p:sp>
       <p:sp>
         <p:nvSpPr>
-          <p:cNvPr id="18" name="scenario-node-3">
+          <p:cNvPr id="24" name="scenario-step-4">
             <a:extLst xmlns:a="http://schemas.openxmlformats.org/drawingml/2006/main">
               <a:ext uri="{FF2B5EF4-FFF2-40B4-BE49-F238E27FC236}">
-                <a16:creationId xmlns:a16="http://schemas.microsoft.com/office/drawing/2014/main" id="{D23A383C-CA35-4EE1-85FF-1BFBFD6F4D16}"/>
+                <a16:creationId xmlns:a16="http://schemas.microsoft.com/office/drawing/2014/main" id="{A981C900-12FA-4286-B157-1C74E41E0A6B}"/>
               </a:ext>
             </a:extLst>
           </p:cNvPr>
@@ -6173,43 +5812,8 @@
         </p:nvSpPr>
         <p:spPr>
           <a:xfrm xmlns:a="http://schemas.openxmlformats.org/drawingml/2006/main">
-            <a:off x="6391275" y="2867025"/>
-            <a:ext cx="247650" cy="247650"/>
-          </a:xfrm>
-          <a:prstGeom xmlns:a="http://schemas.openxmlformats.org/drawingml/2006/main" prst="roundRect">
-            <a:avLst>
-              <a:gd name="adj" fmla="val 50000"/>
-            </a:avLst>
-          </a:prstGeom>
-          <a:solidFill xmlns:a="http://schemas.openxmlformats.org/drawingml/2006/main">
-            <a:srgbClr val="F6F1E8"/>
-          </a:solidFill>
-          <a:ln xmlns:a="http://schemas.openxmlformats.org/drawingml/2006/main" w="9525">
-            <a:solidFill>
-              <a:srgbClr val="2D6F6B"/>
-            </a:solidFill>
-            <a:prstDash val="solid"/>
-          </a:ln>
-        </p:spPr>
-      </p:sp>
-      <p:sp>
-        <p:nvSpPr>
-          <p:cNvPr id="19" name="scenario-number-3">
-            <a:extLst xmlns:a="http://schemas.openxmlformats.org/drawingml/2006/main">
-              <a:ext uri="{FF2B5EF4-FFF2-40B4-BE49-F238E27FC236}">
-                <a16:creationId xmlns:a16="http://schemas.microsoft.com/office/drawing/2014/main" id="{7CEE4308-373E-4D3D-8414-47A3F09BD9D0}"/>
-              </a:ext>
-            </a:extLst>
-          </p:cNvPr>
-          <p:cNvSpPr>
-            <a:spLocks xmlns:a="http://schemas.openxmlformats.org/drawingml/2006/main" noGrp="1"/>
-          </p:cNvSpPr>
-          <p:nvPr/>
-        </p:nvSpPr>
-        <p:spPr>
-          <a:xfrm xmlns:a="http://schemas.openxmlformats.org/drawingml/2006/main">
-            <a:off x="6324600" y="2533650"/>
-            <a:ext cx="381000" cy="228600"/>
+            <a:off x="7572375" y="3543300"/>
+            <a:ext cx="1619250" cy="590550"/>
           </a:xfrm>
           <a:prstGeom xmlns:a="http://schemas.openxmlformats.org/drawingml/2006/main" prst="rect">
             <a:avLst/>
@@ -6229,19 +5833,19 @@
           </a:ln>
         </p:spPr>
         <p:txBody>
-          <a:bodyPr xmlns:a="http://schemas.openxmlformats.org/drawingml/2006/main" wrap="square" lIns="0" tIns="0" rIns="0" bIns="0" anchor="t">
-            <a:normAutofit fontScale="100000"/>
+          <a:bodyPr xmlns:a="http://schemas.openxmlformats.org/drawingml/2006/main" wrap="square" lIns="0" tIns="0" rIns="0" bIns="0" anchor="ctr">
+            <a:noAutofit/>
           </a:bodyPr>
           <a:lstStyle xmlns:a="http://schemas.openxmlformats.org/drawingml/2006/main"/>
           <a:p xmlns:a="http://schemas.openxmlformats.org/drawingml/2006/main">
             <a:pPr algn="ctr">
               <a:lnSpc>
-                <a:spcPct val="100000"/>
+                <a:spcPct val="95000"/>
               </a:lnSpc>
               <a:buNone/>
-              <a:defRPr sz="1200" b="1" i="0">
-                <a:solidFill>
-                  <a:srgbClr val="2D6F6B"/>
+              <a:defRPr sz="1725" b="1" i="0">
+                <a:solidFill>
+                  <a:srgbClr val="162A3C"/>
                 </a:solidFill>
                 <a:latin typeface="Aptos"/>
                 <a:ea typeface="Aptos"/>
@@ -6249,25 +5853,25 @@
               </a:defRPr>
             </a:pPr>
             <a:r>
-              <a:rPr sz="1200" b="1" i="0">
-                <a:solidFill>
-                  <a:srgbClr val="2D6F6B"/>
+              <a:rPr sz="1725" b="1" i="0">
+                <a:solidFill>
+                  <a:srgbClr val="162A3C"/>
                 </a:solidFill>
                 <a:latin typeface="Aptos"/>
                 <a:ea typeface="Aptos"/>
                 <a:cs typeface="Aptos"/>
               </a:rPr>
-              <a:t>04</a:t>
+              <a:t>Acknowledge</a:t>
             </a:r>
           </a:p>
         </p:txBody>
       </p:sp>
       <p:sp>
         <p:nvSpPr>
-          <p:cNvPr id="20" name="scenario-step-3">
+          <p:cNvPr id="26" name="scenario-node-5">
             <a:extLst xmlns:a="http://schemas.openxmlformats.org/drawingml/2006/main">
               <a:ext uri="{FF2B5EF4-FFF2-40B4-BE49-F238E27FC236}">
-                <a16:creationId xmlns:a16="http://schemas.microsoft.com/office/drawing/2014/main" id="{23E0CFC7-8A2D-4381-9EE2-C2DEA1CBB807}"/>
+                <a16:creationId xmlns:a16="http://schemas.microsoft.com/office/drawing/2014/main" id="{146E1906-DF65-4B56-A8F6-8FA556DAA60C}"/>
               </a:ext>
             </a:extLst>
           </p:cNvPr>
@@ -6278,8 +5882,43 @@
         </p:nvSpPr>
         <p:spPr>
           <a:xfrm xmlns:a="http://schemas.openxmlformats.org/drawingml/2006/main">
-            <a:off x="5810250" y="3257550"/>
-            <a:ext cx="1409700" cy="381000"/>
+            <a:off x="10125075" y="3067050"/>
+            <a:ext cx="247650" cy="247650"/>
+          </a:xfrm>
+          <a:prstGeom xmlns:a="http://schemas.openxmlformats.org/drawingml/2006/main" prst="roundRect">
+            <a:avLst>
+              <a:gd name="adj" fmla="val 50000"/>
+            </a:avLst>
+          </a:prstGeom>
+          <a:solidFill xmlns:a="http://schemas.openxmlformats.org/drawingml/2006/main">
+            <a:srgbClr val="2D6F6B"/>
+          </a:solidFill>
+          <a:ln xmlns:a="http://schemas.openxmlformats.org/drawingml/2006/main" w="9525">
+            <a:solidFill>
+              <a:srgbClr val="2D6F6B"/>
+            </a:solidFill>
+            <a:prstDash val="solid"/>
+          </a:ln>
+        </p:spPr>
+      </p:sp>
+      <p:sp>
+        <p:nvSpPr>
+          <p:cNvPr id="27" name="scenario-number-5">
+            <a:extLst xmlns:a="http://schemas.openxmlformats.org/drawingml/2006/main">
+              <a:ext uri="{FF2B5EF4-FFF2-40B4-BE49-F238E27FC236}">
+                <a16:creationId xmlns:a16="http://schemas.microsoft.com/office/drawing/2014/main" id="{327D4FA4-4DB3-4740-A183-40F2CB00A054}"/>
+              </a:ext>
+            </a:extLst>
+          </p:cNvPr>
+          <p:cNvSpPr>
+            <a:spLocks xmlns:a="http://schemas.openxmlformats.org/drawingml/2006/main" noGrp="1"/>
+          </p:cNvSpPr>
+          <p:nvPr/>
+        </p:nvSpPr>
+        <p:spPr>
+          <a:xfrm xmlns:a="http://schemas.openxmlformats.org/drawingml/2006/main">
+            <a:off x="10058400" y="2571750"/>
+            <a:ext cx="381000" cy="228600"/>
           </a:xfrm>
           <a:prstGeom xmlns:a="http://schemas.openxmlformats.org/drawingml/2006/main" prst="rect">
             <a:avLst/>
@@ -6300,7 +5939,7 @@
         </p:spPr>
         <p:txBody>
           <a:bodyPr xmlns:a="http://schemas.openxmlformats.org/drawingml/2006/main" wrap="square" lIns="0" tIns="0" rIns="0" bIns="0" anchor="ctr">
-            <a:normAutofit fontScale="99222"/>
+            <a:noAutofit/>
           </a:bodyPr>
           <a:lstStyle xmlns:a="http://schemas.openxmlformats.org/drawingml/2006/main"/>
           <a:p xmlns:a="http://schemas.openxmlformats.org/drawingml/2006/main">
@@ -6309,9 +5948,9 @@
                 <a:spcPct val="100000"/>
               </a:lnSpc>
               <a:buNone/>
-              <a:defRPr sz="1500" b="1" i="0">
-                <a:solidFill>
-                  <a:srgbClr val="162A3C"/>
+              <a:defRPr sz="1200" b="1" i="0">
+                <a:solidFill>
+                  <a:srgbClr val="2D6F6B"/>
                 </a:solidFill>
                 <a:latin typeface="Aptos"/>
                 <a:ea typeface="Aptos"/>
@@ -6319,25 +5958,25 @@
               </a:defRPr>
             </a:pPr>
             <a:r>
-              <a:rPr sz="1500" b="1" i="0">
-                <a:solidFill>
-                  <a:srgbClr val="162A3C"/>
+              <a:rPr sz="1200" b="1" i="0">
+                <a:solidFill>
+                  <a:srgbClr val="2D6F6B"/>
                 </a:solidFill>
                 <a:latin typeface="Aptos"/>
                 <a:ea typeface="Aptos"/>
                 <a:cs typeface="Aptos"/>
               </a:rPr>
-              <a:t>Incident surfaces</a:t>
+              <a:t>06</a:t>
             </a:r>
           </a:p>
         </p:txBody>
       </p:sp>
       <p:sp>
         <p:nvSpPr>
-          <p:cNvPr id="21" name="scenario-quote-3">
+          <p:cNvPr id="28" name="scenario-step-5">
             <a:extLst xmlns:a="http://schemas.openxmlformats.org/drawingml/2006/main">
               <a:ext uri="{FF2B5EF4-FFF2-40B4-BE49-F238E27FC236}">
-                <a16:creationId xmlns:a16="http://schemas.microsoft.com/office/drawing/2014/main" id="{64854D29-1F08-47EC-A79B-C3B9E61E288E}"/>
+                <a16:creationId xmlns:a16="http://schemas.microsoft.com/office/drawing/2014/main" id="{61652B4C-6D69-4808-8123-0FD9590EA9DA}"/>
               </a:ext>
             </a:extLst>
           </p:cNvPr>
@@ -6348,8 +5987,8 @@
         </p:nvSpPr>
         <p:spPr>
           <a:xfrm xmlns:a="http://schemas.openxmlformats.org/drawingml/2006/main">
-            <a:off x="5753100" y="3714750"/>
-            <a:ext cx="1524000" cy="952500"/>
+            <a:off x="9439275" y="3543300"/>
+            <a:ext cx="1619250" cy="590550"/>
           </a:xfrm>
           <a:prstGeom xmlns:a="http://schemas.openxmlformats.org/drawingml/2006/main" prst="rect">
             <a:avLst/>
@@ -6369,19 +6008,19 @@
           </a:ln>
         </p:spPr>
         <p:txBody>
-          <a:bodyPr xmlns:a="http://schemas.openxmlformats.org/drawingml/2006/main" wrap="square" lIns="0" tIns="0" rIns="0" bIns="0" anchor="t">
-            <a:normAutofit fontScale="100000"/>
+          <a:bodyPr xmlns:a="http://schemas.openxmlformats.org/drawingml/2006/main" wrap="square" lIns="0" tIns="0" rIns="0" bIns="0" anchor="ctr">
+            <a:noAutofit/>
           </a:bodyPr>
           <a:lstStyle xmlns:a="http://schemas.openxmlformats.org/drawingml/2006/main"/>
           <a:p xmlns:a="http://schemas.openxmlformats.org/drawingml/2006/main">
             <a:pPr algn="ctr">
               <a:lnSpc>
-                <a:spcPct val="100000"/>
+                <a:spcPct val="95000"/>
               </a:lnSpc>
               <a:buNone/>
-              <a:defRPr sz="1350" b="0" i="0">
-                <a:solidFill>
-                  <a:srgbClr val="5B6670"/>
+              <a:defRPr sz="1725" b="1" i="0">
+                <a:solidFill>
+                  <a:srgbClr val="162A3C"/>
                 </a:solidFill>
                 <a:latin typeface="Aptos"/>
                 <a:ea typeface="Aptos"/>
@@ -6389,785 +6028,15 @@
               </a:defRPr>
             </a:pPr>
             <a:r>
-              <a:rPr sz="1350" b="0" i="0">
-                <a:solidFill>
-                  <a:srgbClr val="5B6670"/>
+              <a:rPr sz="1725" b="1" i="0">
+                <a:solidFill>
+                  <a:srgbClr val="162A3C"/>
                 </a:solidFill>
                 <a:latin typeface="Aptos"/>
                 <a:ea typeface="Aptos"/>
                 <a:cs typeface="Aptos"/>
               </a:rPr>
-              <a:t>Rushed. Dismissive. Made to feel stupid.</a:t>
-            </a:r>
-          </a:p>
-        </p:txBody>
-      </p:sp>
-      <p:sp>
-        <p:nvSpPr>
-          <p:cNvPr id="22" name="scenario-node-4">
-            <a:extLst xmlns:a="http://schemas.openxmlformats.org/drawingml/2006/main">
-              <a:ext uri="{FF2B5EF4-FFF2-40B4-BE49-F238E27FC236}">
-                <a16:creationId xmlns:a16="http://schemas.microsoft.com/office/drawing/2014/main" id="{2E2E0D4C-3459-498C-B47B-A39A0A78BBBB}"/>
-              </a:ext>
-            </a:extLst>
-          </p:cNvPr>
-          <p:cNvSpPr>
-            <a:spLocks xmlns:a="http://schemas.openxmlformats.org/drawingml/2006/main" noGrp="1"/>
-          </p:cNvSpPr>
-          <p:nvPr/>
-        </p:nvSpPr>
-        <p:spPr>
-          <a:xfrm xmlns:a="http://schemas.openxmlformats.org/drawingml/2006/main">
-            <a:off x="8258175" y="2867025"/>
-            <a:ext cx="247650" cy="247650"/>
-          </a:xfrm>
-          <a:prstGeom xmlns:a="http://schemas.openxmlformats.org/drawingml/2006/main" prst="roundRect">
-            <a:avLst>
-              <a:gd name="adj" fmla="val 50000"/>
-            </a:avLst>
-          </a:prstGeom>
-          <a:solidFill xmlns:a="http://schemas.openxmlformats.org/drawingml/2006/main">
-            <a:srgbClr val="2D6F6B"/>
-          </a:solidFill>
-          <a:ln xmlns:a="http://schemas.openxmlformats.org/drawingml/2006/main" w="9525">
-            <a:solidFill>
-              <a:srgbClr val="2D6F6B"/>
-            </a:solidFill>
-            <a:prstDash val="solid"/>
-          </a:ln>
-        </p:spPr>
-      </p:sp>
-      <p:sp>
-        <p:nvSpPr>
-          <p:cNvPr id="23" name="scenario-number-4">
-            <a:extLst xmlns:a="http://schemas.openxmlformats.org/drawingml/2006/main">
-              <a:ext uri="{FF2B5EF4-FFF2-40B4-BE49-F238E27FC236}">
-                <a16:creationId xmlns:a16="http://schemas.microsoft.com/office/drawing/2014/main" id="{24CAFF6C-9B2B-4DD8-8368-04B3EEDD9C1C}"/>
-              </a:ext>
-            </a:extLst>
-          </p:cNvPr>
-          <p:cNvSpPr>
-            <a:spLocks xmlns:a="http://schemas.openxmlformats.org/drawingml/2006/main" noGrp="1"/>
-          </p:cNvSpPr>
-          <p:nvPr/>
-        </p:nvSpPr>
-        <p:spPr>
-          <a:xfrm xmlns:a="http://schemas.openxmlformats.org/drawingml/2006/main">
-            <a:off x="8191500" y="2533650"/>
-            <a:ext cx="381000" cy="228600"/>
-          </a:xfrm>
-          <a:prstGeom xmlns:a="http://schemas.openxmlformats.org/drawingml/2006/main" prst="rect">
-            <a:avLst/>
-          </a:prstGeom>
-          <a:solidFill xmlns:a="http://schemas.openxmlformats.org/drawingml/2006/main">
-            <a:srgbClr val="000000">
-              <a:alpha val="0"/>
-            </a:srgbClr>
-          </a:solidFill>
-          <a:ln xmlns:a="http://schemas.openxmlformats.org/drawingml/2006/main" w="0">
-            <a:solidFill>
-              <a:srgbClr val="000000">
-                <a:alpha val="0"/>
-              </a:srgbClr>
-            </a:solidFill>
-            <a:prstDash val="solid"/>
-          </a:ln>
-        </p:spPr>
-        <p:txBody>
-          <a:bodyPr xmlns:a="http://schemas.openxmlformats.org/drawingml/2006/main" wrap="square" lIns="0" tIns="0" rIns="0" bIns="0" anchor="t">
-            <a:normAutofit fontScale="100000"/>
-          </a:bodyPr>
-          <a:lstStyle xmlns:a="http://schemas.openxmlformats.org/drawingml/2006/main"/>
-          <a:p xmlns:a="http://schemas.openxmlformats.org/drawingml/2006/main">
-            <a:pPr algn="ctr">
-              <a:lnSpc>
-                <a:spcPct val="100000"/>
-              </a:lnSpc>
-              <a:buNone/>
-              <a:defRPr sz="1200" b="1" i="0">
-                <a:solidFill>
-                  <a:srgbClr val="2D6F6B"/>
-                </a:solidFill>
-                <a:latin typeface="Aptos"/>
-                <a:ea typeface="Aptos"/>
-                <a:cs typeface="Aptos"/>
-              </a:defRPr>
-            </a:pPr>
-            <a:r>
-              <a:rPr sz="1200" b="1" i="0">
-                <a:solidFill>
-                  <a:srgbClr val="2D6F6B"/>
-                </a:solidFill>
-                <a:latin typeface="Aptos"/>
-                <a:ea typeface="Aptos"/>
-                <a:cs typeface="Aptos"/>
-              </a:rPr>
-              <a:t>05</a:t>
-            </a:r>
-          </a:p>
-        </p:txBody>
-      </p:sp>
-      <p:sp>
-        <p:nvSpPr>
-          <p:cNvPr id="24" name="scenario-step-4">
-            <a:extLst xmlns:a="http://schemas.openxmlformats.org/drawingml/2006/main">
-              <a:ext uri="{FF2B5EF4-FFF2-40B4-BE49-F238E27FC236}">
-                <a16:creationId xmlns:a16="http://schemas.microsoft.com/office/drawing/2014/main" id="{A981C900-12FA-4286-B157-1C74E41E0A6B}"/>
-              </a:ext>
-            </a:extLst>
-          </p:cNvPr>
-          <p:cNvSpPr>
-            <a:spLocks xmlns:a="http://schemas.openxmlformats.org/drawingml/2006/main" noGrp="1"/>
-          </p:cNvSpPr>
-          <p:nvPr/>
-        </p:nvSpPr>
-        <p:spPr>
-          <a:xfrm xmlns:a="http://schemas.openxmlformats.org/drawingml/2006/main">
-            <a:off x="7677150" y="3257550"/>
-            <a:ext cx="1409700" cy="381000"/>
-          </a:xfrm>
-          <a:prstGeom xmlns:a="http://schemas.openxmlformats.org/drawingml/2006/main" prst="rect">
-            <a:avLst/>
-          </a:prstGeom>
-          <a:solidFill xmlns:a="http://schemas.openxmlformats.org/drawingml/2006/main">
-            <a:srgbClr val="000000">
-              <a:alpha val="0"/>
-            </a:srgbClr>
-          </a:solidFill>
-          <a:ln xmlns:a="http://schemas.openxmlformats.org/drawingml/2006/main" w="0">
-            <a:solidFill>
-              <a:srgbClr val="000000">
-                <a:alpha val="0"/>
-              </a:srgbClr>
-            </a:solidFill>
-            <a:prstDash val="solid"/>
-          </a:ln>
-        </p:spPr>
-        <p:txBody>
-          <a:bodyPr xmlns:a="http://schemas.openxmlformats.org/drawingml/2006/main" wrap="square" lIns="0" tIns="0" rIns="0" bIns="0" anchor="ctr">
-            <a:normAutofit fontScale="100000"/>
-          </a:bodyPr>
-          <a:lstStyle xmlns:a="http://schemas.openxmlformats.org/drawingml/2006/main"/>
-          <a:p xmlns:a="http://schemas.openxmlformats.org/drawingml/2006/main">
-            <a:pPr algn="ctr">
-              <a:lnSpc>
-                <a:spcPct val="100000"/>
-              </a:lnSpc>
-              <a:buNone/>
-              <a:defRPr sz="1500" b="1" i="0">
-                <a:solidFill>
-                  <a:srgbClr val="162A3C"/>
-                </a:solidFill>
-                <a:latin typeface="Aptos"/>
-                <a:ea typeface="Aptos"/>
-                <a:cs typeface="Aptos"/>
-              </a:defRPr>
-            </a:pPr>
-            <a:r>
-              <a:rPr sz="1500" b="1" i="0">
-                <a:solidFill>
-                  <a:srgbClr val="162A3C"/>
-                </a:solidFill>
-                <a:latin typeface="Aptos"/>
-                <a:ea typeface="Aptos"/>
-                <a:cs typeface="Aptos"/>
-              </a:rPr>
-              <a:t>Gate</a:t>
-            </a:r>
-          </a:p>
-        </p:txBody>
-      </p:sp>
-      <p:sp>
-        <p:nvSpPr>
-          <p:cNvPr id="25" name="scenario-quote-4">
-            <a:extLst xmlns:a="http://schemas.openxmlformats.org/drawingml/2006/main">
-              <a:ext uri="{FF2B5EF4-FFF2-40B4-BE49-F238E27FC236}">
-                <a16:creationId xmlns:a16="http://schemas.microsoft.com/office/drawing/2014/main" id="{C1821293-A382-42EC-A92A-5AEDE596704F}"/>
-              </a:ext>
-            </a:extLst>
-          </p:cNvPr>
-          <p:cNvSpPr>
-            <a:spLocks xmlns:a="http://schemas.openxmlformats.org/drawingml/2006/main" noGrp="1"/>
-          </p:cNvSpPr>
-          <p:nvPr/>
-        </p:nvSpPr>
-        <p:spPr>
-          <a:xfrm xmlns:a="http://schemas.openxmlformats.org/drawingml/2006/main">
-            <a:off x="7620000" y="3714750"/>
-            <a:ext cx="1524000" cy="952500"/>
-          </a:xfrm>
-          <a:prstGeom xmlns:a="http://schemas.openxmlformats.org/drawingml/2006/main" prst="rect">
-            <a:avLst/>
-          </a:prstGeom>
-          <a:solidFill xmlns:a="http://schemas.openxmlformats.org/drawingml/2006/main">
-            <a:srgbClr val="000000">
-              <a:alpha val="0"/>
-            </a:srgbClr>
-          </a:solidFill>
-          <a:ln xmlns:a="http://schemas.openxmlformats.org/drawingml/2006/main" w="0">
-            <a:solidFill>
-              <a:srgbClr val="000000">
-                <a:alpha val="0"/>
-              </a:srgbClr>
-            </a:solidFill>
-            <a:prstDash val="solid"/>
-          </a:ln>
-        </p:spPr>
-        <p:txBody>
-          <a:bodyPr xmlns:a="http://schemas.openxmlformats.org/drawingml/2006/main" wrap="square" lIns="0" tIns="0" rIns="0" bIns="0" anchor="t">
-            <a:normAutofit fontScale="100000"/>
-          </a:bodyPr>
-          <a:lstStyle xmlns:a="http://schemas.openxmlformats.org/drawingml/2006/main"/>
-          <a:p xmlns:a="http://schemas.openxmlformats.org/drawingml/2006/main">
-            <a:pPr algn="ctr">
-              <a:lnSpc>
-                <a:spcPct val="100000"/>
-              </a:lnSpc>
-              <a:buNone/>
-              <a:defRPr sz="1350" b="0" i="0">
-                <a:solidFill>
-                  <a:srgbClr val="5B6670"/>
-                </a:solidFill>
-                <a:latin typeface="Aptos"/>
-                <a:ea typeface="Aptos"/>
-                <a:cs typeface="Aptos"/>
-              </a:defRPr>
-            </a:pPr>
-            <a:r>
-              <a:rPr sz="1350" b="0" i="0">
-                <a:solidFill>
-                  <a:srgbClr val="5B6670"/>
-                </a:solidFill>
-                <a:latin typeface="Aptos"/>
-                <a:ea typeface="Aptos"/>
-                <a:cs typeface="Aptos"/>
-              </a:rPr>
-              <a:t>Specific acknowledgment—no excuses or blame.</a:t>
-            </a:r>
-          </a:p>
-        </p:txBody>
-      </p:sp>
-      <p:sp>
-        <p:nvSpPr>
-          <p:cNvPr id="26" name="scenario-node-5">
-            <a:extLst xmlns:a="http://schemas.openxmlformats.org/drawingml/2006/main">
-              <a:ext uri="{FF2B5EF4-FFF2-40B4-BE49-F238E27FC236}">
-                <a16:creationId xmlns:a16="http://schemas.microsoft.com/office/drawing/2014/main" id="{146E1906-DF65-4B56-A8F6-8FA556DAA60C}"/>
-              </a:ext>
-            </a:extLst>
-          </p:cNvPr>
-          <p:cNvSpPr>
-            <a:spLocks xmlns:a="http://schemas.openxmlformats.org/drawingml/2006/main" noGrp="1"/>
-          </p:cNvSpPr>
-          <p:nvPr/>
-        </p:nvSpPr>
-        <p:spPr>
-          <a:xfrm xmlns:a="http://schemas.openxmlformats.org/drawingml/2006/main">
-            <a:off x="10125075" y="2867025"/>
-            <a:ext cx="247650" cy="247650"/>
-          </a:xfrm>
-          <a:prstGeom xmlns:a="http://schemas.openxmlformats.org/drawingml/2006/main" prst="roundRect">
-            <a:avLst>
-              <a:gd name="adj" fmla="val 50000"/>
-            </a:avLst>
-          </a:prstGeom>
-          <a:solidFill xmlns:a="http://schemas.openxmlformats.org/drawingml/2006/main">
-            <a:srgbClr val="2D6F6B"/>
-          </a:solidFill>
-          <a:ln xmlns:a="http://schemas.openxmlformats.org/drawingml/2006/main" w="9525">
-            <a:solidFill>
-              <a:srgbClr val="2D6F6B"/>
-            </a:solidFill>
-            <a:prstDash val="solid"/>
-          </a:ln>
-        </p:spPr>
-      </p:sp>
-      <p:sp>
-        <p:nvSpPr>
-          <p:cNvPr id="27" name="scenario-number-5">
-            <a:extLst xmlns:a="http://schemas.openxmlformats.org/drawingml/2006/main">
-              <a:ext uri="{FF2B5EF4-FFF2-40B4-BE49-F238E27FC236}">
-                <a16:creationId xmlns:a16="http://schemas.microsoft.com/office/drawing/2014/main" id="{327D4FA4-4DB3-4740-A183-40F2CB00A054}"/>
-              </a:ext>
-            </a:extLst>
-          </p:cNvPr>
-          <p:cNvSpPr>
-            <a:spLocks xmlns:a="http://schemas.openxmlformats.org/drawingml/2006/main" noGrp="1"/>
-          </p:cNvSpPr>
-          <p:nvPr/>
-        </p:nvSpPr>
-        <p:spPr>
-          <a:xfrm xmlns:a="http://schemas.openxmlformats.org/drawingml/2006/main">
-            <a:off x="10058400" y="2533650"/>
-            <a:ext cx="381000" cy="228600"/>
-          </a:xfrm>
-          <a:prstGeom xmlns:a="http://schemas.openxmlformats.org/drawingml/2006/main" prst="rect">
-            <a:avLst/>
-          </a:prstGeom>
-          <a:solidFill xmlns:a="http://schemas.openxmlformats.org/drawingml/2006/main">
-            <a:srgbClr val="000000">
-              <a:alpha val="0"/>
-            </a:srgbClr>
-          </a:solidFill>
-          <a:ln xmlns:a="http://schemas.openxmlformats.org/drawingml/2006/main" w="0">
-            <a:solidFill>
-              <a:srgbClr val="000000">
-                <a:alpha val="0"/>
-              </a:srgbClr>
-            </a:solidFill>
-            <a:prstDash val="solid"/>
-          </a:ln>
-        </p:spPr>
-        <p:txBody>
-          <a:bodyPr xmlns:a="http://schemas.openxmlformats.org/drawingml/2006/main" wrap="square" lIns="0" tIns="0" rIns="0" bIns="0" anchor="t">
-            <a:normAutofit fontScale="100000"/>
-          </a:bodyPr>
-          <a:lstStyle xmlns:a="http://schemas.openxmlformats.org/drawingml/2006/main"/>
-          <a:p xmlns:a="http://schemas.openxmlformats.org/drawingml/2006/main">
-            <a:pPr algn="ctr">
-              <a:lnSpc>
-                <a:spcPct val="100000"/>
-              </a:lnSpc>
-              <a:buNone/>
-              <a:defRPr sz="1200" b="1" i="0">
-                <a:solidFill>
-                  <a:srgbClr val="2D6F6B"/>
-                </a:solidFill>
-                <a:latin typeface="Aptos"/>
-                <a:ea typeface="Aptos"/>
-                <a:cs typeface="Aptos"/>
-              </a:defRPr>
-            </a:pPr>
-            <a:r>
-              <a:rPr sz="1200" b="1" i="0">
-                <a:solidFill>
-                  <a:srgbClr val="2D6F6B"/>
-                </a:solidFill>
-                <a:latin typeface="Aptos"/>
-                <a:ea typeface="Aptos"/>
-                <a:cs typeface="Aptos"/>
-              </a:rPr>
-              <a:t>06</a:t>
-            </a:r>
-          </a:p>
-        </p:txBody>
-      </p:sp>
-      <p:sp>
-        <p:nvSpPr>
-          <p:cNvPr id="28" name="scenario-step-5">
-            <a:extLst xmlns:a="http://schemas.openxmlformats.org/drawingml/2006/main">
-              <a:ext uri="{FF2B5EF4-FFF2-40B4-BE49-F238E27FC236}">
-                <a16:creationId xmlns:a16="http://schemas.microsoft.com/office/drawing/2014/main" id="{61652B4C-6D69-4808-8123-0FD9590EA9DA}"/>
-              </a:ext>
-            </a:extLst>
-          </p:cNvPr>
-          <p:cNvSpPr>
-            <a:spLocks xmlns:a="http://schemas.openxmlformats.org/drawingml/2006/main" noGrp="1"/>
-          </p:cNvSpPr>
-          <p:nvPr/>
-        </p:nvSpPr>
-        <p:spPr>
-          <a:xfrm xmlns:a="http://schemas.openxmlformats.org/drawingml/2006/main">
-            <a:off x="9544050" y="3257550"/>
-            <a:ext cx="1409700" cy="381000"/>
-          </a:xfrm>
-          <a:prstGeom xmlns:a="http://schemas.openxmlformats.org/drawingml/2006/main" prst="rect">
-            <a:avLst/>
-          </a:prstGeom>
-          <a:solidFill xmlns:a="http://schemas.openxmlformats.org/drawingml/2006/main">
-            <a:srgbClr val="000000">
-              <a:alpha val="0"/>
-            </a:srgbClr>
-          </a:solidFill>
-          <a:ln xmlns:a="http://schemas.openxmlformats.org/drawingml/2006/main" w="0">
-            <a:solidFill>
-              <a:srgbClr val="000000">
-                <a:alpha val="0"/>
-              </a:srgbClr>
-            </a:solidFill>
-            <a:prstDash val="solid"/>
-          </a:ln>
-        </p:spPr>
-        <p:txBody>
-          <a:bodyPr xmlns:a="http://schemas.openxmlformats.org/drawingml/2006/main" wrap="square" lIns="0" tIns="0" rIns="0" bIns="0" anchor="ctr">
-            <a:normAutofit fontScale="100000"/>
-          </a:bodyPr>
-          <a:lstStyle xmlns:a="http://schemas.openxmlformats.org/drawingml/2006/main"/>
-          <a:p xmlns:a="http://schemas.openxmlformats.org/drawingml/2006/main">
-            <a:pPr algn="ctr">
-              <a:lnSpc>
-                <a:spcPct val="100000"/>
-              </a:lnSpc>
-              <a:buNone/>
-              <a:defRPr sz="1500" b="1" i="0">
-                <a:solidFill>
-                  <a:srgbClr val="162A3C"/>
-                </a:solidFill>
-                <a:latin typeface="Aptos"/>
-                <a:ea typeface="Aptos"/>
-                <a:cs typeface="Aptos"/>
-              </a:defRPr>
-            </a:pPr>
-            <a:r>
-              <a:rPr sz="1500" b="1" i="0">
-                <a:solidFill>
-                  <a:srgbClr val="162A3C"/>
-                </a:solidFill>
-                <a:latin typeface="Aptos"/>
-                <a:ea typeface="Aptos"/>
-                <a:cs typeface="Aptos"/>
-              </a:rPr>
-              <a:t>Felt-heard check</a:t>
-            </a:r>
-          </a:p>
-        </p:txBody>
-      </p:sp>
-      <p:sp>
-        <p:nvSpPr>
-          <p:cNvPr id="29" name="scenario-quote-5">
-            <a:extLst xmlns:a="http://schemas.openxmlformats.org/drawingml/2006/main">
-              <a:ext uri="{FF2B5EF4-FFF2-40B4-BE49-F238E27FC236}">
-                <a16:creationId xmlns:a16="http://schemas.microsoft.com/office/drawing/2014/main" id="{C93710E2-0C81-4BBE-B4D3-0F547DF29E57}"/>
-              </a:ext>
-            </a:extLst>
-          </p:cNvPr>
-          <p:cNvSpPr>
-            <a:spLocks xmlns:a="http://schemas.openxmlformats.org/drawingml/2006/main" noGrp="1"/>
-          </p:cNvSpPr>
-          <p:nvPr/>
-        </p:nvSpPr>
-        <p:spPr>
-          <a:xfrm xmlns:a="http://schemas.openxmlformats.org/drawingml/2006/main">
-            <a:off x="9486900" y="3714750"/>
-            <a:ext cx="1524000" cy="952500"/>
-          </a:xfrm>
-          <a:prstGeom xmlns:a="http://schemas.openxmlformats.org/drawingml/2006/main" prst="rect">
-            <a:avLst/>
-          </a:prstGeom>
-          <a:solidFill xmlns:a="http://schemas.openxmlformats.org/drawingml/2006/main">
-            <a:srgbClr val="000000">
-              <a:alpha val="0"/>
-            </a:srgbClr>
-          </a:solidFill>
-          <a:ln xmlns:a="http://schemas.openxmlformats.org/drawingml/2006/main" w="0">
-            <a:solidFill>
-              <a:srgbClr val="000000">
-                <a:alpha val="0"/>
-              </a:srgbClr>
-            </a:solidFill>
-            <a:prstDash val="solid"/>
-          </a:ln>
-        </p:spPr>
-        <p:txBody>
-          <a:bodyPr xmlns:a="http://schemas.openxmlformats.org/drawingml/2006/main" wrap="square" lIns="0" tIns="0" rIns="0" bIns="0" anchor="t">
-            <a:normAutofit fontScale="100000"/>
-          </a:bodyPr>
-          <a:lstStyle xmlns:a="http://schemas.openxmlformats.org/drawingml/2006/main"/>
-          <a:p xmlns:a="http://schemas.openxmlformats.org/drawingml/2006/main">
-            <a:pPr algn="ctr">
-              <a:lnSpc>
-                <a:spcPct val="100000"/>
-              </a:lnSpc>
-              <a:buNone/>
-              <a:defRPr sz="1350" b="0" i="0">
-                <a:solidFill>
-                  <a:srgbClr val="5B6670"/>
-                </a:solidFill>
-                <a:latin typeface="Aptos"/>
-                <a:ea typeface="Aptos"/>
-                <a:cs typeface="Aptos"/>
-              </a:defRPr>
-            </a:pPr>
-            <a:r>
-              <a:rPr sz="1350" b="0" i="0">
-                <a:solidFill>
-                  <a:srgbClr val="5B6670"/>
-                </a:solidFill>
-                <a:latin typeface="Aptos"/>
-                <a:ea typeface="Aptos"/>
-                <a:cs typeface="Aptos"/>
-              </a:rPr>
-              <a:t>“Do you feel heard now?”</a:t>
-            </a:r>
-          </a:p>
-        </p:txBody>
-      </p:sp>
-      <p:sp>
-        <p:nvSpPr>
-          <p:cNvPr id="30" name="scenario-authored-band">
-            <a:extLst xmlns:a="http://schemas.openxmlformats.org/drawingml/2006/main">
-              <a:ext uri="{FF2B5EF4-FFF2-40B4-BE49-F238E27FC236}">
-                <a16:creationId xmlns:a16="http://schemas.microsoft.com/office/drawing/2014/main" id="{29DFFA88-B20B-431B-95CD-C361613ABB72}"/>
-              </a:ext>
-            </a:extLst>
-          </p:cNvPr>
-          <p:cNvSpPr>
-            <a:spLocks xmlns:a="http://schemas.openxmlformats.org/drawingml/2006/main" noGrp="1"/>
-          </p:cNvSpPr>
-          <p:nvPr/>
-        </p:nvSpPr>
-        <p:spPr>
-          <a:xfrm xmlns:a="http://schemas.openxmlformats.org/drawingml/2006/main">
-            <a:off x="685800" y="4953000"/>
-            <a:ext cx="10820400" cy="1066800"/>
-          </a:xfrm>
-          <a:prstGeom xmlns:a="http://schemas.openxmlformats.org/drawingml/2006/main" prst="roundRect">
-            <a:avLst>
-              <a:gd name="adj" fmla="val 16071"/>
-            </a:avLst>
-          </a:prstGeom>
-          <a:solidFill xmlns:a="http://schemas.openxmlformats.org/drawingml/2006/main">
-            <a:srgbClr val="ECE5D8"/>
-          </a:solidFill>
-          <a:ln xmlns:a="http://schemas.openxmlformats.org/drawingml/2006/main" w="0">
-            <a:solidFill>
-              <a:srgbClr val="000000">
-                <a:alpha val="0"/>
-              </a:srgbClr>
-            </a:solidFill>
-            <a:prstDash val="solid"/>
-          </a:ln>
-        </p:spPr>
-      </p:sp>
-      <p:sp>
-        <p:nvSpPr>
-          <p:cNvPr id="31" name="scenario-briefing">
-            <a:extLst xmlns:a="http://schemas.openxmlformats.org/drawingml/2006/main">
-              <a:ext uri="{FF2B5EF4-FFF2-40B4-BE49-F238E27FC236}">
-                <a16:creationId xmlns:a16="http://schemas.microsoft.com/office/drawing/2014/main" id="{AD4FFFC7-4416-473B-A1B0-0C6833AE8386}"/>
-              </a:ext>
-            </a:extLst>
-          </p:cNvPr>
-          <p:cNvSpPr>
-            <a:spLocks xmlns:a="http://schemas.openxmlformats.org/drawingml/2006/main" noGrp="1"/>
-          </p:cNvSpPr>
-          <p:nvPr/>
-        </p:nvSpPr>
-        <p:spPr>
-          <a:xfrm xmlns:a="http://schemas.openxmlformats.org/drawingml/2006/main">
-            <a:off x="914400" y="5162550"/>
-            <a:ext cx="3381375" cy="609600"/>
-          </a:xfrm>
-          <a:prstGeom xmlns:a="http://schemas.openxmlformats.org/drawingml/2006/main" prst="rect">
-            <a:avLst/>
-          </a:prstGeom>
-          <a:solidFill xmlns:a="http://schemas.openxmlformats.org/drawingml/2006/main">
-            <a:srgbClr val="000000">
-              <a:alpha val="0"/>
-            </a:srgbClr>
-          </a:solidFill>
-          <a:ln xmlns:a="http://schemas.openxmlformats.org/drawingml/2006/main" w="0">
-            <a:solidFill>
-              <a:srgbClr val="000000">
-                <a:alpha val="0"/>
-              </a:srgbClr>
-            </a:solidFill>
-            <a:prstDash val="solid"/>
-          </a:ln>
-        </p:spPr>
-        <p:txBody>
-          <a:bodyPr xmlns:a="http://schemas.openxmlformats.org/drawingml/2006/main" wrap="square" lIns="0" tIns="0" rIns="0" bIns="0" anchor="t">
-            <a:normAutofit fontScale="100000"/>
-          </a:bodyPr>
-          <a:lstStyle xmlns:a="http://schemas.openxmlformats.org/drawingml/2006/main"/>
-          <a:p xmlns:a="http://schemas.openxmlformats.org/drawingml/2006/main">
-            <a:pPr algn="l">
-              <a:lnSpc>
-                <a:spcPct val="100000"/>
-              </a:lnSpc>
-              <a:buNone/>
-              <a:defRPr sz="1500" b="0" i="0">
-                <a:solidFill>
-                  <a:srgbClr val="17222F"/>
-                </a:solidFill>
-                <a:latin typeface="Aptos"/>
-                <a:ea typeface="Aptos"/>
-                <a:cs typeface="Aptos"/>
-              </a:defRPr>
-            </a:pPr>
-            <a:r>
-              <a:rPr sz="1500" b="1">
-                <a:solidFill>
-                  <a:srgbClr val="17222F"/>
-                </a:solidFill>
-                <a:latin typeface="Aptos"/>
-                <a:ea typeface="Aptos"/>
-                <a:cs typeface="Aptos"/>
-              </a:rPr>
-              <a:t>Briefing  </a:t>
-            </a:r>
-            <a:r>
-              <a:rPr sz="1500">
-                <a:solidFill>
-                  <a:srgbClr val="17222F"/>
-                </a:solidFill>
-                <a:latin typeface="Aptos"/>
-                <a:ea typeface="Aptos"/>
-                <a:cs typeface="Aptos"/>
-              </a:rPr>
-              <a:t>No discounts, waivers, or authority to change anything.</a:t>
-            </a:r>
-          </a:p>
-        </p:txBody>
-      </p:sp>
-      <p:sp>
-        <p:nvSpPr>
-          <p:cNvPr id="32" name="scenario-persona-profile">
-            <a:extLst xmlns:a="http://schemas.openxmlformats.org/drawingml/2006/main">
-              <a:ext uri="{FF2B5EF4-FFF2-40B4-BE49-F238E27FC236}">
-                <a16:creationId xmlns:a16="http://schemas.microsoft.com/office/drawing/2014/main" id="{5E411217-DE83-4BA4-9AD1-48C9532CC5E8}"/>
-              </a:ext>
-            </a:extLst>
-          </p:cNvPr>
-          <p:cNvSpPr>
-            <a:spLocks xmlns:a="http://schemas.openxmlformats.org/drawingml/2006/main" noGrp="1"/>
-          </p:cNvSpPr>
-          <p:nvPr/>
-        </p:nvSpPr>
-        <p:spPr>
-          <a:xfrm xmlns:a="http://schemas.openxmlformats.org/drawingml/2006/main">
-            <a:off x="4495800" y="5162550"/>
-            <a:ext cx="3524250" cy="685800"/>
-          </a:xfrm>
-          <a:prstGeom xmlns:a="http://schemas.openxmlformats.org/drawingml/2006/main" prst="rect">
-            <a:avLst/>
-          </a:prstGeom>
-          <a:solidFill xmlns:a="http://schemas.openxmlformats.org/drawingml/2006/main">
-            <a:srgbClr val="000000">
-              <a:alpha val="0"/>
-            </a:srgbClr>
-          </a:solidFill>
-          <a:ln xmlns:a="http://schemas.openxmlformats.org/drawingml/2006/main" w="0">
-            <a:solidFill>
-              <a:srgbClr val="000000">
-                <a:alpha val="0"/>
-              </a:srgbClr>
-            </a:solidFill>
-            <a:prstDash val="solid"/>
-          </a:ln>
-        </p:spPr>
-        <p:txBody>
-          <a:bodyPr xmlns:a="http://schemas.openxmlformats.org/drawingml/2006/main" wrap="square" lIns="0" tIns="0" rIns="0" bIns="0" anchor="t">
-            <a:normAutofit fontScale="100000"/>
-          </a:bodyPr>
-          <a:lstStyle xmlns:a="http://schemas.openxmlformats.org/drawingml/2006/main"/>
-          <a:p xmlns:a="http://schemas.openxmlformats.org/drawingml/2006/main">
-            <a:pPr algn="l">
-              <a:lnSpc>
-                <a:spcPct val="100000"/>
-              </a:lnSpc>
-              <a:buNone/>
-              <a:defRPr sz="1500" b="0" i="0">
-                <a:solidFill>
-                  <a:srgbClr val="17222F"/>
-                </a:solidFill>
-                <a:latin typeface="Aptos"/>
-                <a:ea typeface="Aptos"/>
-                <a:cs typeface="Aptos"/>
-              </a:defRPr>
-            </a:pPr>
-            <a:r>
-              <a:rPr sz="1500" b="1">
-                <a:solidFill>
-                  <a:srgbClr val="17222F"/>
-                </a:solidFill>
-                <a:latin typeface="Aptos"/>
-                <a:ea typeface="Aptos"/>
-                <a:cs typeface="Aptos"/>
-              </a:rPr>
-              <a:t>Persona + Private Profile  </a:t>
-            </a:r>
-            <a:r>
-              <a:rPr sz="1500">
-                <a:solidFill>
-                  <a:srgbClr val="17222F"/>
-                </a:solidFill>
-                <a:latin typeface="Aptos"/>
-                <a:ea typeface="Aptos"/>
-                <a:cs typeface="Aptos"/>
-              </a:rPr>
-              <a:t>Resistance and disclosure are authored around the skill—not random.</a:t>
-            </a:r>
-          </a:p>
-        </p:txBody>
-      </p:sp>
-      <p:sp>
-        <p:nvSpPr>
-          <p:cNvPr id="33" name="scenario-gate-rubric">
-            <a:extLst xmlns:a="http://schemas.openxmlformats.org/drawingml/2006/main">
-              <a:ext uri="{FF2B5EF4-FFF2-40B4-BE49-F238E27FC236}">
-                <a16:creationId xmlns:a16="http://schemas.microsoft.com/office/drawing/2014/main" id="{F1EA4765-7D33-4A11-BD8D-1C90C75A90C5}"/>
-              </a:ext>
-            </a:extLst>
-          </p:cNvPr>
-          <p:cNvSpPr>
-            <a:spLocks xmlns:a="http://schemas.openxmlformats.org/drawingml/2006/main" noGrp="1"/>
-          </p:cNvSpPr>
-          <p:nvPr/>
-        </p:nvSpPr>
-        <p:spPr>
-          <a:xfrm xmlns:a="http://schemas.openxmlformats.org/drawingml/2006/main">
-            <a:off x="8191500" y="5162550"/>
-            <a:ext cx="3086100" cy="685800"/>
-          </a:xfrm>
-          <a:prstGeom xmlns:a="http://schemas.openxmlformats.org/drawingml/2006/main" prst="rect">
-            <a:avLst/>
-          </a:prstGeom>
-          <a:solidFill xmlns:a="http://schemas.openxmlformats.org/drawingml/2006/main">
-            <a:srgbClr val="000000">
-              <a:alpha val="0"/>
-            </a:srgbClr>
-          </a:solidFill>
-          <a:ln xmlns:a="http://schemas.openxmlformats.org/drawingml/2006/main" w="0">
-            <a:solidFill>
-              <a:srgbClr val="000000">
-                <a:alpha val="0"/>
-              </a:srgbClr>
-            </a:solidFill>
-            <a:prstDash val="solid"/>
-          </a:ln>
-        </p:spPr>
-        <p:txBody>
-          <a:bodyPr xmlns:a="http://schemas.openxmlformats.org/drawingml/2006/main" wrap="square" lIns="0" tIns="0" rIns="0" bIns="0" anchor="t">
-            <a:normAutofit fontScale="100000"/>
-          </a:bodyPr>
-          <a:lstStyle xmlns:a="http://schemas.openxmlformats.org/drawingml/2006/main"/>
-          <a:p xmlns:a="http://schemas.openxmlformats.org/drawingml/2006/main">
-            <a:pPr algn="l">
-              <a:lnSpc>
-                <a:spcPct val="100000"/>
-              </a:lnSpc>
-              <a:buNone/>
-              <a:defRPr sz="1500" b="0" i="0">
-                <a:solidFill>
-                  <a:srgbClr val="17222F"/>
-                </a:solidFill>
-                <a:latin typeface="Aptos"/>
-                <a:ea typeface="Aptos"/>
-                <a:cs typeface="Aptos"/>
-              </a:defRPr>
-            </a:pPr>
-            <a:r>
-              <a:rPr sz="1500" b="1">
-                <a:solidFill>
-                  <a:srgbClr val="17222F"/>
-                </a:solidFill>
-                <a:latin typeface="Aptos"/>
-                <a:ea typeface="Aptos"/>
-                <a:cs typeface="Aptos"/>
-              </a:rPr>
-              <a:t>Gate + Rubric  </a:t>
-            </a:r>
-            <a:r>
-              <a:rPr sz="1500">
-                <a:solidFill>
-                  <a:srgbClr val="17222F"/>
-                </a:solidFill>
-                <a:latin typeface="Aptos"/>
-                <a:ea typeface="Aptos"/>
-                <a:cs typeface="Aptos"/>
-              </a:rPr>
-              <a:t>A stable standard makes the behavioral sequence observable.</a:t>
+              <a:t>Check</a:t>
             </a:r>
           </a:p>
         </p:txBody>
@@ -7709,8 +6578,8 @@
         </p:nvSpPr>
         <p:spPr>
           <a:xfrm xmlns:a="http://schemas.openxmlformats.org/drawingml/2006/main">
-            <a:off x="800100" y="2305050"/>
-            <a:ext cx="1314450" cy="381000"/>
+            <a:off x="800100" y="2419350"/>
+            <a:ext cx="1314450" cy="457200"/>
           </a:xfrm>
           <a:prstGeom xmlns:a="http://schemas.openxmlformats.org/drawingml/2006/main" prst="rect">
             <a:avLst/>
@@ -7731,7 +6600,7 @@
         </p:spPr>
         <p:txBody>
           <a:bodyPr xmlns:a="http://schemas.openxmlformats.org/drawingml/2006/main" wrap="square" lIns="0" tIns="0" rIns="0" bIns="0" anchor="ctr">
-            <a:normAutofit fontScale="100000"/>
+            <a:noAutofit/>
           </a:bodyPr>
           <a:lstStyle xmlns:a="http://schemas.openxmlformats.org/drawingml/2006/main"/>
           <a:p xmlns:a="http://schemas.openxmlformats.org/drawingml/2006/main">
@@ -7740,9 +6609,9 @@
                 <a:spcPct val="100000"/>
               </a:lnSpc>
               <a:buNone/>
-              <a:defRPr sz="2025" b="1" i="0">
-                <a:solidFill>
-                  <a:srgbClr val="FFFFFF"/>
+              <a:defRPr sz="2100" b="1" i="0">
+                <a:solidFill>
+                  <a:srgbClr val="162A3C"/>
                 </a:solidFill>
                 <a:latin typeface="Aptos Display"/>
                 <a:ea typeface="Aptos Display"/>
@@ -7750,7 +6619,7 @@
               </a:defRPr>
             </a:pPr>
             <a:r>
-              <a:rPr sz="2025" b="1" i="0">
+              <a:rPr sz="2100" b="1" i="0">
                 <a:solidFill>
                   <a:srgbClr val="FFFFFF"/>
                 </a:solidFill>
@@ -7765,10 +6634,10 @@
       </p:sp>
       <p:sp>
         <p:nvSpPr>
-          <p:cNvPr id="9" name="loop-node-sub-0">
+          <p:cNvPr id="10" name="loop-node-1">
             <a:extLst xmlns:a="http://schemas.openxmlformats.org/drawingml/2006/main">
               <a:ext uri="{FF2B5EF4-FFF2-40B4-BE49-F238E27FC236}">
-                <a16:creationId xmlns:a16="http://schemas.microsoft.com/office/drawing/2014/main" id="{BCF34C26-5F34-469C-A9EE-057B13F8AC0D}"/>
+                <a16:creationId xmlns:a16="http://schemas.microsoft.com/office/drawing/2014/main" id="{1684AA3F-79C3-42D2-A218-8717B6841E67}"/>
               </a:ext>
             </a:extLst>
           </p:cNvPr>
@@ -7779,16 +6648,16 @@
         </p:nvSpPr>
         <p:spPr>
           <a:xfrm xmlns:a="http://schemas.openxmlformats.org/drawingml/2006/main">
-            <a:off x="762000" y="2781300"/>
-            <a:ext cx="1390650" cy="247650"/>
+            <a:off x="2686050" y="2076450"/>
+            <a:ext cx="2000250" cy="1143000"/>
           </a:xfrm>
-          <a:prstGeom xmlns:a="http://schemas.openxmlformats.org/drawingml/2006/main" prst="rect">
-            <a:avLst/>
+          <a:prstGeom xmlns:a="http://schemas.openxmlformats.org/drawingml/2006/main" prst="roundRect">
+            <a:avLst>
+              <a:gd name="adj" fmla="val 16667"/>
+            </a:avLst>
           </a:prstGeom>
           <a:solidFill xmlns:a="http://schemas.openxmlformats.org/drawingml/2006/main">
-            <a:srgbClr val="000000">
-              <a:alpha val="0"/>
-            </a:srgbClr>
+            <a:srgbClr val="DCE8E3"/>
           </a:solidFill>
           <a:ln xmlns:a="http://schemas.openxmlformats.org/drawingml/2006/main" w="0">
             <a:solidFill>
@@ -7799,46 +6668,13 @@
             <a:prstDash val="solid"/>
           </a:ln>
         </p:spPr>
-        <p:txBody>
-          <a:bodyPr xmlns:a="http://schemas.openxmlformats.org/drawingml/2006/main" wrap="square" lIns="0" tIns="0" rIns="0" bIns="0" anchor="t">
-            <a:normAutofit fontScale="100000"/>
-          </a:bodyPr>
-          <a:lstStyle xmlns:a="http://schemas.openxmlformats.org/drawingml/2006/main"/>
-          <a:p xmlns:a="http://schemas.openxmlformats.org/drawingml/2006/main">
-            <a:pPr algn="ctr">
-              <a:lnSpc>
-                <a:spcPct val="100000"/>
-              </a:lnSpc>
-              <a:buNone/>
-              <a:defRPr sz="1275" b="0" i="0">
-                <a:solidFill>
-                  <a:srgbClr val="DDE6EB"/>
-                </a:solidFill>
-                <a:latin typeface="Aptos"/>
-                <a:ea typeface="Aptos"/>
-                <a:cs typeface="Aptos"/>
-              </a:defRPr>
-            </a:pPr>
-            <a:r>
-              <a:rPr sz="1275" b="0" i="0">
-                <a:solidFill>
-                  <a:srgbClr val="DDE6EB"/>
-                </a:solidFill>
-                <a:latin typeface="Aptos"/>
-                <a:ea typeface="Aptos"/>
-                <a:cs typeface="Aptos"/>
-              </a:rPr>
-              <a:t>spoken practice</a:t>
-            </a:r>
-          </a:p>
-        </p:txBody>
-      </p:sp>
-      <p:sp>
-        <p:nvSpPr>
-          <p:cNvPr id="10" name="loop-node-1">
+      </p:sp>
+      <p:sp>
+        <p:nvSpPr>
+          <p:cNvPr id="11" name="loop-node-label-1">
             <a:extLst xmlns:a="http://schemas.openxmlformats.org/drawingml/2006/main">
               <a:ext uri="{FF2B5EF4-FFF2-40B4-BE49-F238E27FC236}">
-                <a16:creationId xmlns:a16="http://schemas.microsoft.com/office/drawing/2014/main" id="{1684AA3F-79C3-42D2-A218-8717B6841E67}"/>
+                <a16:creationId xmlns:a16="http://schemas.microsoft.com/office/drawing/2014/main" id="{82E8A928-58A2-4544-90AE-026A3D770436}"/>
               </a:ext>
             </a:extLst>
           </p:cNvPr>
@@ -7849,16 +6685,16 @@
         </p:nvSpPr>
         <p:spPr>
           <a:xfrm xmlns:a="http://schemas.openxmlformats.org/drawingml/2006/main">
-            <a:off x="2686050" y="2076450"/>
-            <a:ext cx="2000250" cy="1143000"/>
+            <a:off x="2838450" y="2419350"/>
+            <a:ext cx="1695450" cy="457200"/>
           </a:xfrm>
-          <a:prstGeom xmlns:a="http://schemas.openxmlformats.org/drawingml/2006/main" prst="roundRect">
-            <a:avLst>
-              <a:gd name="adj" fmla="val 16667"/>
-            </a:avLst>
+          <a:prstGeom xmlns:a="http://schemas.openxmlformats.org/drawingml/2006/main" prst="rect">
+            <a:avLst/>
           </a:prstGeom>
           <a:solidFill xmlns:a="http://schemas.openxmlformats.org/drawingml/2006/main">
-            <a:srgbClr val="DCE8E3"/>
+            <a:srgbClr val="000000">
+              <a:alpha val="0"/>
+            </a:srgbClr>
           </a:solidFill>
           <a:ln xmlns:a="http://schemas.openxmlformats.org/drawingml/2006/main" w="0">
             <a:solidFill>
@@ -7869,13 +6705,46 @@
             <a:prstDash val="solid"/>
           </a:ln>
         </p:spPr>
-      </p:sp>
-      <p:sp>
-        <p:nvSpPr>
-          <p:cNvPr id="11" name="loop-node-label-1">
+        <p:txBody>
+          <a:bodyPr xmlns:a="http://schemas.openxmlformats.org/drawingml/2006/main" wrap="square" lIns="0" tIns="0" rIns="0" bIns="0" anchor="ctr">
+            <a:noAutofit/>
+          </a:bodyPr>
+          <a:lstStyle xmlns:a="http://schemas.openxmlformats.org/drawingml/2006/main"/>
+          <a:p xmlns:a="http://schemas.openxmlformats.org/drawingml/2006/main">
+            <a:pPr algn="ctr">
+              <a:lnSpc>
+                <a:spcPct val="100000"/>
+              </a:lnSpc>
+              <a:buNone/>
+              <a:defRPr sz="2100" b="1" i="0">
+                <a:solidFill>
+                  <a:srgbClr val="162A3C"/>
+                </a:solidFill>
+                <a:latin typeface="Aptos Display"/>
+                <a:ea typeface="Aptos Display"/>
+                <a:cs typeface="Aptos Display"/>
+              </a:defRPr>
+            </a:pPr>
+            <a:r>
+              <a:rPr sz="2100" b="1" i="0">
+                <a:solidFill>
+                  <a:srgbClr val="162A3C"/>
+                </a:solidFill>
+                <a:latin typeface="Aptos Display"/>
+                <a:ea typeface="Aptos Display"/>
+                <a:cs typeface="Aptos Display"/>
+              </a:rPr>
+              <a:t>Assessment</a:t>
+            </a:r>
+          </a:p>
+        </p:txBody>
+      </p:sp>
+      <p:sp>
+        <p:nvSpPr>
+          <p:cNvPr id="13" name="loop-node-2">
             <a:extLst xmlns:a="http://schemas.openxmlformats.org/drawingml/2006/main">
               <a:ext uri="{FF2B5EF4-FFF2-40B4-BE49-F238E27FC236}">
-                <a16:creationId xmlns:a16="http://schemas.microsoft.com/office/drawing/2014/main" id="{82E8A928-58A2-4544-90AE-026A3D770436}"/>
+                <a16:creationId xmlns:a16="http://schemas.microsoft.com/office/drawing/2014/main" id="{A969FB0A-D867-4A02-8380-C6C64D2473BA}"/>
               </a:ext>
             </a:extLst>
           </p:cNvPr>
@@ -7886,16 +6755,16 @@
         </p:nvSpPr>
         <p:spPr>
           <a:xfrm xmlns:a="http://schemas.openxmlformats.org/drawingml/2006/main">
-            <a:off x="2838450" y="2305050"/>
-            <a:ext cx="1695450" cy="381000"/>
+            <a:off x="5105400" y="2076450"/>
+            <a:ext cx="2000250" cy="1143000"/>
           </a:xfrm>
-          <a:prstGeom xmlns:a="http://schemas.openxmlformats.org/drawingml/2006/main" prst="rect">
-            <a:avLst/>
+          <a:prstGeom xmlns:a="http://schemas.openxmlformats.org/drawingml/2006/main" prst="roundRect">
+            <a:avLst>
+              <a:gd name="adj" fmla="val 16667"/>
+            </a:avLst>
           </a:prstGeom>
           <a:solidFill xmlns:a="http://schemas.openxmlformats.org/drawingml/2006/main">
-            <a:srgbClr val="000000">
-              <a:alpha val="0"/>
-            </a:srgbClr>
+            <a:srgbClr val="F1DDCB"/>
           </a:solidFill>
           <a:ln xmlns:a="http://schemas.openxmlformats.org/drawingml/2006/main" w="0">
             <a:solidFill>
@@ -7906,46 +6775,13 @@
             <a:prstDash val="solid"/>
           </a:ln>
         </p:spPr>
-        <p:txBody>
-          <a:bodyPr xmlns:a="http://schemas.openxmlformats.org/drawingml/2006/main" wrap="square" lIns="0" tIns="0" rIns="0" bIns="0" anchor="ctr">
-            <a:normAutofit fontScale="100000"/>
-          </a:bodyPr>
-          <a:lstStyle xmlns:a="http://schemas.openxmlformats.org/drawingml/2006/main"/>
-          <a:p xmlns:a="http://schemas.openxmlformats.org/drawingml/2006/main">
-            <a:pPr algn="ctr">
-              <a:lnSpc>
-                <a:spcPct val="100000"/>
-              </a:lnSpc>
-              <a:buNone/>
-              <a:defRPr sz="2025" b="1" i="0">
-                <a:solidFill>
-                  <a:srgbClr val="162A3C"/>
-                </a:solidFill>
-                <a:latin typeface="Aptos Display"/>
-                <a:ea typeface="Aptos Display"/>
-                <a:cs typeface="Aptos Display"/>
-              </a:defRPr>
-            </a:pPr>
-            <a:r>
-              <a:rPr sz="2025" b="1" i="0">
-                <a:solidFill>
-                  <a:srgbClr val="162A3C"/>
-                </a:solidFill>
-                <a:latin typeface="Aptos Display"/>
-                <a:ea typeface="Aptos Display"/>
-                <a:cs typeface="Aptos Display"/>
-              </a:rPr>
-              <a:t>Assessment</a:t>
-            </a:r>
-          </a:p>
-        </p:txBody>
-      </p:sp>
-      <p:sp>
-        <p:nvSpPr>
-          <p:cNvPr id="12" name="loop-node-sub-1">
+      </p:sp>
+      <p:sp>
+        <p:nvSpPr>
+          <p:cNvPr id="14" name="loop-node-label-2">
             <a:extLst xmlns:a="http://schemas.openxmlformats.org/drawingml/2006/main">
               <a:ext uri="{FF2B5EF4-FFF2-40B4-BE49-F238E27FC236}">
-                <a16:creationId xmlns:a16="http://schemas.microsoft.com/office/drawing/2014/main" id="{E7DCDD87-85E0-4F7E-A0C1-DE9157049E40}"/>
+                <a16:creationId xmlns:a16="http://schemas.microsoft.com/office/drawing/2014/main" id="{A8996BBE-51A2-4FD4-BE70-C6D7F01E67F4}"/>
               </a:ext>
             </a:extLst>
           </p:cNvPr>
@@ -7956,8 +6792,8 @@
         </p:nvSpPr>
         <p:spPr>
           <a:xfrm xmlns:a="http://schemas.openxmlformats.org/drawingml/2006/main">
-            <a:off x="2800350" y="2781300"/>
-            <a:ext cx="1771650" cy="247650"/>
+            <a:off x="5257800" y="2419350"/>
+            <a:ext cx="1695450" cy="457200"/>
           </a:xfrm>
           <a:prstGeom xmlns:a="http://schemas.openxmlformats.org/drawingml/2006/main" prst="rect">
             <a:avLst/>
@@ -7977,8 +6813,8 @@
           </a:ln>
         </p:spPr>
         <p:txBody>
-          <a:bodyPr xmlns:a="http://schemas.openxmlformats.org/drawingml/2006/main" wrap="square" lIns="0" tIns="0" rIns="0" bIns="0" anchor="t">
-            <a:normAutofit fontScale="100000"/>
+          <a:bodyPr xmlns:a="http://schemas.openxmlformats.org/drawingml/2006/main" wrap="square" lIns="0" tIns="0" rIns="0" bIns="0" anchor="ctr">
+            <a:noAutofit/>
           </a:bodyPr>
           <a:lstStyle xmlns:a="http://schemas.openxmlformats.org/drawingml/2006/main"/>
           <a:p xmlns:a="http://schemas.openxmlformats.org/drawingml/2006/main">
@@ -7987,35 +6823,35 @@
                 <a:spcPct val="100000"/>
               </a:lnSpc>
               <a:buNone/>
-              <a:defRPr sz="1275" b="0" i="0">
-                <a:solidFill>
-                  <a:srgbClr val="5B6670"/>
-                </a:solidFill>
-                <a:latin typeface="Aptos"/>
-                <a:ea typeface="Aptos"/>
-                <a:cs typeface="Aptos"/>
+              <a:defRPr sz="2100" b="1" i="0">
+                <a:solidFill>
+                  <a:srgbClr val="162A3C"/>
+                </a:solidFill>
+                <a:latin typeface="Aptos Display"/>
+                <a:ea typeface="Aptos Display"/>
+                <a:cs typeface="Aptos Display"/>
               </a:defRPr>
             </a:pPr>
             <a:r>
-              <a:rPr sz="1275" b="0" i="0">
-                <a:solidFill>
-                  <a:srgbClr val="5B6670"/>
-                </a:solidFill>
-                <a:latin typeface="Aptos"/>
-                <a:ea typeface="Aptos"/>
-                <a:cs typeface="Aptos"/>
+              <a:rPr sz="2100" b="1" i="0">
+                <a:solidFill>
+                  <a:srgbClr val="162A3C"/>
+                </a:solidFill>
+                <a:latin typeface="Aptos Display"/>
+                <a:ea typeface="Aptos Display"/>
+                <a:cs typeface="Aptos Display"/>
               </a:rPr>
-              <a:t>met / not met + evidence</a:t>
+              <a:t>Feedback</a:t>
             </a:r>
           </a:p>
         </p:txBody>
       </p:sp>
       <p:sp>
         <p:nvSpPr>
-          <p:cNvPr id="13" name="loop-node-2">
+          <p:cNvPr id="16" name="loop-node-3">
             <a:extLst xmlns:a="http://schemas.openxmlformats.org/drawingml/2006/main">
               <a:ext uri="{FF2B5EF4-FFF2-40B4-BE49-F238E27FC236}">
-                <a16:creationId xmlns:a16="http://schemas.microsoft.com/office/drawing/2014/main" id="{A969FB0A-D867-4A02-8380-C6C64D2473BA}"/>
+                <a16:creationId xmlns:a16="http://schemas.microsoft.com/office/drawing/2014/main" id="{E50DD976-D56E-43EA-B2D8-A398EF4F659B}"/>
               </a:ext>
             </a:extLst>
           </p:cNvPr>
@@ -8026,8 +6862,8 @@
         </p:nvSpPr>
         <p:spPr>
           <a:xfrm xmlns:a="http://schemas.openxmlformats.org/drawingml/2006/main">
-            <a:off x="5105400" y="2076450"/>
-            <a:ext cx="2000250" cy="1143000"/>
+            <a:off x="7524750" y="2076450"/>
+            <a:ext cx="1524000" cy="1143000"/>
           </a:xfrm>
           <a:prstGeom xmlns:a="http://schemas.openxmlformats.org/drawingml/2006/main" prst="roundRect">
             <a:avLst>
@@ -8035,7 +6871,7 @@
             </a:avLst>
           </a:prstGeom>
           <a:solidFill xmlns:a="http://schemas.openxmlformats.org/drawingml/2006/main">
-            <a:srgbClr val="F1DDCB"/>
+            <a:srgbClr val="DCE8E3"/>
           </a:solidFill>
           <a:ln xmlns:a="http://schemas.openxmlformats.org/drawingml/2006/main" w="0">
             <a:solidFill>
@@ -8049,10 +6885,10 @@
       </p:sp>
       <p:sp>
         <p:nvSpPr>
-          <p:cNvPr id="14" name="loop-node-label-2">
+          <p:cNvPr id="17" name="loop-node-label-3">
             <a:extLst xmlns:a="http://schemas.openxmlformats.org/drawingml/2006/main">
               <a:ext uri="{FF2B5EF4-FFF2-40B4-BE49-F238E27FC236}">
-                <a16:creationId xmlns:a16="http://schemas.microsoft.com/office/drawing/2014/main" id="{A8996BBE-51A2-4FD4-BE70-C6D7F01E67F4}"/>
+                <a16:creationId xmlns:a16="http://schemas.microsoft.com/office/drawing/2014/main" id="{619F8DB6-EE00-4359-B0E1-4313C8ED4434}"/>
               </a:ext>
             </a:extLst>
           </p:cNvPr>
@@ -8063,8 +6899,8 @@
         </p:nvSpPr>
         <p:spPr>
           <a:xfrm xmlns:a="http://schemas.openxmlformats.org/drawingml/2006/main">
-            <a:off x="5257800" y="2305050"/>
-            <a:ext cx="1695450" cy="381000"/>
+            <a:off x="7677150" y="2419350"/>
+            <a:ext cx="1219200" cy="457200"/>
           </a:xfrm>
           <a:prstGeom xmlns:a="http://schemas.openxmlformats.org/drawingml/2006/main" prst="rect">
             <a:avLst/>
@@ -8085,7 +6921,7 @@
         </p:spPr>
         <p:txBody>
           <a:bodyPr xmlns:a="http://schemas.openxmlformats.org/drawingml/2006/main" wrap="square" lIns="0" tIns="0" rIns="0" bIns="0" anchor="ctr">
-            <a:normAutofit fontScale="100000"/>
+            <a:noAutofit/>
           </a:bodyPr>
           <a:lstStyle xmlns:a="http://schemas.openxmlformats.org/drawingml/2006/main"/>
           <a:p xmlns:a="http://schemas.openxmlformats.org/drawingml/2006/main">
@@ -8094,7 +6930,7 @@
                 <a:spcPct val="100000"/>
               </a:lnSpc>
               <a:buNone/>
-              <a:defRPr sz="2025" b="1" i="0">
+              <a:defRPr sz="2100" b="1" i="0">
                 <a:solidFill>
                   <a:srgbClr val="162A3C"/>
                 </a:solidFill>
@@ -8104,7 +6940,7 @@
               </a:defRPr>
             </a:pPr>
             <a:r>
-              <a:rPr sz="2025" b="1" i="0">
+              <a:rPr sz="2100" b="1" i="0">
                 <a:solidFill>
                   <a:srgbClr val="162A3C"/>
                 </a:solidFill>
@@ -8112,17 +6948,17 @@
                 <a:ea typeface="Aptos Display"/>
                 <a:cs typeface="Aptos Display"/>
               </a:rPr>
-              <a:t>Feedback</a:t>
+              <a:t>Retry</a:t>
             </a:r>
           </a:p>
         </p:txBody>
       </p:sp>
       <p:sp>
         <p:nvSpPr>
-          <p:cNvPr id="15" name="loop-node-sub-2">
+          <p:cNvPr id="19" name="loop-node-4">
             <a:extLst xmlns:a="http://schemas.openxmlformats.org/drawingml/2006/main">
               <a:ext uri="{FF2B5EF4-FFF2-40B4-BE49-F238E27FC236}">
-                <a16:creationId xmlns:a16="http://schemas.microsoft.com/office/drawing/2014/main" id="{B675470D-A137-4BE6-9EF8-B461ABA5983D}"/>
+                <a16:creationId xmlns:a16="http://schemas.microsoft.com/office/drawing/2014/main" id="{3DA8F447-0D69-49F0-A85A-36BE1AD8CA7A}"/>
               </a:ext>
             </a:extLst>
           </p:cNvPr>
@@ -8133,16 +6969,16 @@
         </p:nvSpPr>
         <p:spPr>
           <a:xfrm xmlns:a="http://schemas.openxmlformats.org/drawingml/2006/main">
-            <a:off x="5219700" y="2781300"/>
-            <a:ext cx="1771650" cy="247650"/>
+            <a:off x="9467850" y="2076450"/>
+            <a:ext cx="2076450" cy="1143000"/>
           </a:xfrm>
-          <a:prstGeom xmlns:a="http://schemas.openxmlformats.org/drawingml/2006/main" prst="rect">
-            <a:avLst/>
+          <a:prstGeom xmlns:a="http://schemas.openxmlformats.org/drawingml/2006/main" prst="roundRect">
+            <a:avLst>
+              <a:gd name="adj" fmla="val 16667"/>
+            </a:avLst>
           </a:prstGeom>
           <a:solidFill xmlns:a="http://schemas.openxmlformats.org/drawingml/2006/main">
-            <a:srgbClr val="000000">
-              <a:alpha val="0"/>
-            </a:srgbClr>
+            <a:srgbClr val="162A3C"/>
           </a:solidFill>
           <a:ln xmlns:a="http://schemas.openxmlformats.org/drawingml/2006/main" w="0">
             <a:solidFill>
@@ -8153,46 +6989,13 @@
             <a:prstDash val="solid"/>
           </a:ln>
         </p:spPr>
-        <p:txBody>
-          <a:bodyPr xmlns:a="http://schemas.openxmlformats.org/drawingml/2006/main" wrap="square" lIns="0" tIns="0" rIns="0" bIns="0" anchor="t">
-            <a:normAutofit fontScale="100000"/>
-          </a:bodyPr>
-          <a:lstStyle xmlns:a="http://schemas.openxmlformats.org/drawingml/2006/main"/>
-          <a:p xmlns:a="http://schemas.openxmlformats.org/drawingml/2006/main">
-            <a:pPr algn="ctr">
-              <a:lnSpc>
-                <a:spcPct val="100000"/>
-              </a:lnSpc>
-              <a:buNone/>
-              <a:defRPr sz="1275" b="0" i="0">
-                <a:solidFill>
-                  <a:srgbClr val="5B6670"/>
-                </a:solidFill>
-                <a:latin typeface="Aptos"/>
-                <a:ea typeface="Aptos"/>
-                <a:cs typeface="Aptos"/>
-              </a:defRPr>
-            </a:pPr>
-            <a:r>
-              <a:rPr sz="1275" b="0" i="0">
-                <a:solidFill>
-                  <a:srgbClr val="5B6670"/>
-                </a:solidFill>
-                <a:latin typeface="Aptos"/>
-                <a:ea typeface="Aptos"/>
-                <a:cs typeface="Aptos"/>
-              </a:rPr>
-              <a:t>coaching + next move</a:t>
-            </a:r>
-          </a:p>
-        </p:txBody>
-      </p:sp>
-      <p:sp>
-        <p:nvSpPr>
-          <p:cNvPr id="16" name="loop-node-3">
+      </p:sp>
+      <p:sp>
+        <p:nvSpPr>
+          <p:cNvPr id="20" name="loop-node-label-4">
             <a:extLst xmlns:a="http://schemas.openxmlformats.org/drawingml/2006/main">
               <a:ext uri="{FF2B5EF4-FFF2-40B4-BE49-F238E27FC236}">
-                <a16:creationId xmlns:a16="http://schemas.microsoft.com/office/drawing/2014/main" id="{E50DD976-D56E-43EA-B2D8-A398EF4F659B}"/>
+                <a16:creationId xmlns:a16="http://schemas.microsoft.com/office/drawing/2014/main" id="{6F72745F-DE6D-4DA3-8A50-2919316F94A9}"/>
               </a:ext>
             </a:extLst>
           </p:cNvPr>
@@ -8203,16 +7006,16 @@
         </p:nvSpPr>
         <p:spPr>
           <a:xfrm xmlns:a="http://schemas.openxmlformats.org/drawingml/2006/main">
-            <a:off x="7524750" y="2076450"/>
-            <a:ext cx="1524000" cy="1143000"/>
+            <a:off x="9620250" y="2419350"/>
+            <a:ext cx="1771650" cy="457200"/>
           </a:xfrm>
-          <a:prstGeom xmlns:a="http://schemas.openxmlformats.org/drawingml/2006/main" prst="roundRect">
-            <a:avLst>
-              <a:gd name="adj" fmla="val 16667"/>
-            </a:avLst>
+          <a:prstGeom xmlns:a="http://schemas.openxmlformats.org/drawingml/2006/main" prst="rect">
+            <a:avLst/>
           </a:prstGeom>
           <a:solidFill xmlns:a="http://schemas.openxmlformats.org/drawingml/2006/main">
-            <a:srgbClr val="DCE8E3"/>
+            <a:srgbClr val="000000">
+              <a:alpha val="0"/>
+            </a:srgbClr>
           </a:solidFill>
           <a:ln xmlns:a="http://schemas.openxmlformats.org/drawingml/2006/main" w="0">
             <a:solidFill>
@@ -8223,13 +7026,46 @@
             <a:prstDash val="solid"/>
           </a:ln>
         </p:spPr>
-      </p:sp>
-      <p:sp>
-        <p:nvSpPr>
-          <p:cNvPr id="17" name="loop-node-label-3">
+        <p:txBody>
+          <a:bodyPr xmlns:a="http://schemas.openxmlformats.org/drawingml/2006/main" wrap="square" lIns="0" tIns="0" rIns="0" bIns="0" anchor="ctr">
+            <a:noAutofit/>
+          </a:bodyPr>
+          <a:lstStyle xmlns:a="http://schemas.openxmlformats.org/drawingml/2006/main"/>
+          <a:p xmlns:a="http://schemas.openxmlformats.org/drawingml/2006/main">
+            <a:pPr algn="ctr">
+              <a:lnSpc>
+                <a:spcPct val="100000"/>
+              </a:lnSpc>
+              <a:buNone/>
+              <a:defRPr sz="2100" b="1" i="0">
+                <a:solidFill>
+                  <a:srgbClr val="162A3C"/>
+                </a:solidFill>
+                <a:latin typeface="Aptos Display"/>
+                <a:ea typeface="Aptos Display"/>
+                <a:cs typeface="Aptos Display"/>
+              </a:defRPr>
+            </a:pPr>
+            <a:r>
+              <a:rPr sz="2100" b="1" i="0">
+                <a:solidFill>
+                  <a:srgbClr val="FFFFFF"/>
+                </a:solidFill>
+                <a:latin typeface="Aptos Display"/>
+                <a:ea typeface="Aptos Display"/>
+                <a:cs typeface="Aptos Display"/>
+              </a:rPr>
+              <a:t>Comparison</a:t>
+            </a:r>
+          </a:p>
+        </p:txBody>
+      </p:sp>
+      <p:sp>
+        <p:nvSpPr>
+          <p:cNvPr id="29" name="loop-isolation">
             <a:extLst xmlns:a="http://schemas.openxmlformats.org/drawingml/2006/main">
               <a:ext uri="{FF2B5EF4-FFF2-40B4-BE49-F238E27FC236}">
-                <a16:creationId xmlns:a16="http://schemas.microsoft.com/office/drawing/2014/main" id="{619F8DB6-EE00-4359-B0E1-4313C8ED4434}"/>
+                <a16:creationId xmlns:a16="http://schemas.microsoft.com/office/drawing/2014/main" id="{D2B77519-9F5E-4986-B0EB-53168FFE0444}"/>
               </a:ext>
             </a:extLst>
           </p:cNvPr>
@@ -8240,8 +7076,8 @@
         </p:nvSpPr>
         <p:spPr>
           <a:xfrm xmlns:a="http://schemas.openxmlformats.org/drawingml/2006/main">
-            <a:off x="7677150" y="2305050"/>
-            <a:ext cx="1219200" cy="381000"/>
+            <a:off x="990600" y="4171950"/>
+            <a:ext cx="10210800" cy="781050"/>
           </a:xfrm>
           <a:prstGeom xmlns:a="http://schemas.openxmlformats.org/drawingml/2006/main" prst="rect">
             <a:avLst/>
@@ -8262,7 +7098,7 @@
         </p:spPr>
         <p:txBody>
           <a:bodyPr xmlns:a="http://schemas.openxmlformats.org/drawingml/2006/main" wrap="square" lIns="0" tIns="0" rIns="0" bIns="0" anchor="ctr">
-            <a:normAutofit fontScale="100000"/>
+            <a:noAutofit/>
           </a:bodyPr>
           <a:lstStyle xmlns:a="http://schemas.openxmlformats.org/drawingml/2006/main"/>
           <a:p xmlns:a="http://schemas.openxmlformats.org/drawingml/2006/main">
@@ -8271,9 +7107,9 @@
                 <a:spcPct val="100000"/>
               </a:lnSpc>
               <a:buNone/>
-              <a:defRPr sz="2025" b="1" i="0">
-                <a:solidFill>
-                  <a:srgbClr val="162A3C"/>
+              <a:defRPr sz="2550" b="1" i="0">
+                <a:solidFill>
+                  <a:srgbClr val="2D6F6B"/>
                 </a:solidFill>
                 <a:latin typeface="Aptos Display"/>
                 <a:ea typeface="Aptos Display"/>
@@ -8281,787 +7117,15 @@
               </a:defRPr>
             </a:pPr>
             <a:r>
-              <a:rPr sz="2025" b="1" i="0">
-                <a:solidFill>
-                  <a:srgbClr val="162A3C"/>
+              <a:rPr sz="2550" b="1" i="0">
+                <a:solidFill>
+                  <a:srgbClr val="2D6F6B"/>
                 </a:solidFill>
                 <a:latin typeface="Aptos Display"/>
                 <a:ea typeface="Aptos Display"/>
                 <a:cs typeface="Aptos Display"/>
               </a:rPr>
-              <a:t>Retry</a:t>
-            </a:r>
-          </a:p>
-        </p:txBody>
-      </p:sp>
-      <p:sp>
-        <p:nvSpPr>
-          <p:cNvPr id="18" name="loop-node-sub-3">
-            <a:extLst xmlns:a="http://schemas.openxmlformats.org/drawingml/2006/main">
-              <a:ext uri="{FF2B5EF4-FFF2-40B4-BE49-F238E27FC236}">
-                <a16:creationId xmlns:a16="http://schemas.microsoft.com/office/drawing/2014/main" id="{C48CEFF9-E7BC-4BF1-B8C1-8CA4E287E86A}"/>
-              </a:ext>
-            </a:extLst>
-          </p:cNvPr>
-          <p:cNvSpPr>
-            <a:spLocks xmlns:a="http://schemas.openxmlformats.org/drawingml/2006/main" noGrp="1"/>
-          </p:cNvSpPr>
-          <p:nvPr/>
-        </p:nvSpPr>
-        <p:spPr>
-          <a:xfrm xmlns:a="http://schemas.openxmlformats.org/drawingml/2006/main">
-            <a:off x="7639050" y="2781300"/>
-            <a:ext cx="1295400" cy="247650"/>
-          </a:xfrm>
-          <a:prstGeom xmlns:a="http://schemas.openxmlformats.org/drawingml/2006/main" prst="rect">
-            <a:avLst/>
-          </a:prstGeom>
-          <a:solidFill xmlns:a="http://schemas.openxmlformats.org/drawingml/2006/main">
-            <a:srgbClr val="000000">
-              <a:alpha val="0"/>
-            </a:srgbClr>
-          </a:solidFill>
-          <a:ln xmlns:a="http://schemas.openxmlformats.org/drawingml/2006/main" w="0">
-            <a:solidFill>
-              <a:srgbClr val="000000">
-                <a:alpha val="0"/>
-              </a:srgbClr>
-            </a:solidFill>
-            <a:prstDash val="solid"/>
-          </a:ln>
-        </p:spPr>
-        <p:txBody>
-          <a:bodyPr xmlns:a="http://schemas.openxmlformats.org/drawingml/2006/main" wrap="square" lIns="0" tIns="0" rIns="0" bIns="0" anchor="t">
-            <a:normAutofit fontScale="100000"/>
-          </a:bodyPr>
-          <a:lstStyle xmlns:a="http://schemas.openxmlformats.org/drawingml/2006/main"/>
-          <a:p xmlns:a="http://schemas.openxmlformats.org/drawingml/2006/main">
-            <a:pPr algn="ctr">
-              <a:lnSpc>
-                <a:spcPct val="100000"/>
-              </a:lnSpc>
-              <a:buNone/>
-              <a:defRPr sz="1275" b="0" i="0">
-                <a:solidFill>
-                  <a:srgbClr val="5B6670"/>
-                </a:solidFill>
-                <a:latin typeface="Aptos"/>
-                <a:ea typeface="Aptos"/>
-                <a:cs typeface="Aptos"/>
-              </a:defRPr>
-            </a:pPr>
-            <a:r>
-              <a:rPr sz="1275" b="0" i="0">
-                <a:solidFill>
-                  <a:srgbClr val="5B6670"/>
-                </a:solidFill>
-                <a:latin typeface="Aptos"/>
-                <a:ea typeface="Aptos"/>
-                <a:cs typeface="Aptos"/>
-              </a:rPr>
-              <a:t>while fresh</a:t>
-            </a:r>
-          </a:p>
-        </p:txBody>
-      </p:sp>
-      <p:sp>
-        <p:nvSpPr>
-          <p:cNvPr id="19" name="loop-node-4">
-            <a:extLst xmlns:a="http://schemas.openxmlformats.org/drawingml/2006/main">
-              <a:ext uri="{FF2B5EF4-FFF2-40B4-BE49-F238E27FC236}">
-                <a16:creationId xmlns:a16="http://schemas.microsoft.com/office/drawing/2014/main" id="{3DA8F447-0D69-49F0-A85A-36BE1AD8CA7A}"/>
-              </a:ext>
-            </a:extLst>
-          </p:cNvPr>
-          <p:cNvSpPr>
-            <a:spLocks xmlns:a="http://schemas.openxmlformats.org/drawingml/2006/main" noGrp="1"/>
-          </p:cNvSpPr>
-          <p:nvPr/>
-        </p:nvSpPr>
-        <p:spPr>
-          <a:xfrm xmlns:a="http://schemas.openxmlformats.org/drawingml/2006/main">
-            <a:off x="9467850" y="2076450"/>
-            <a:ext cx="2076450" cy="1143000"/>
-          </a:xfrm>
-          <a:prstGeom xmlns:a="http://schemas.openxmlformats.org/drawingml/2006/main" prst="roundRect">
-            <a:avLst>
-              <a:gd name="adj" fmla="val 16667"/>
-            </a:avLst>
-          </a:prstGeom>
-          <a:solidFill xmlns:a="http://schemas.openxmlformats.org/drawingml/2006/main">
-            <a:srgbClr val="162A3C"/>
-          </a:solidFill>
-          <a:ln xmlns:a="http://schemas.openxmlformats.org/drawingml/2006/main" w="0">
-            <a:solidFill>
-              <a:srgbClr val="000000">
-                <a:alpha val="0"/>
-              </a:srgbClr>
-            </a:solidFill>
-            <a:prstDash val="solid"/>
-          </a:ln>
-        </p:spPr>
-      </p:sp>
-      <p:sp>
-        <p:nvSpPr>
-          <p:cNvPr id="20" name="loop-node-label-4">
-            <a:extLst xmlns:a="http://schemas.openxmlformats.org/drawingml/2006/main">
-              <a:ext uri="{FF2B5EF4-FFF2-40B4-BE49-F238E27FC236}">
-                <a16:creationId xmlns:a16="http://schemas.microsoft.com/office/drawing/2014/main" id="{6F72745F-DE6D-4DA3-8A50-2919316F94A9}"/>
-              </a:ext>
-            </a:extLst>
-          </p:cNvPr>
-          <p:cNvSpPr>
-            <a:spLocks xmlns:a="http://schemas.openxmlformats.org/drawingml/2006/main" noGrp="1"/>
-          </p:cNvSpPr>
-          <p:nvPr/>
-        </p:nvSpPr>
-        <p:spPr>
-          <a:xfrm xmlns:a="http://schemas.openxmlformats.org/drawingml/2006/main">
-            <a:off x="9620250" y="2305050"/>
-            <a:ext cx="1771650" cy="381000"/>
-          </a:xfrm>
-          <a:prstGeom xmlns:a="http://schemas.openxmlformats.org/drawingml/2006/main" prst="rect">
-            <a:avLst/>
-          </a:prstGeom>
-          <a:solidFill xmlns:a="http://schemas.openxmlformats.org/drawingml/2006/main">
-            <a:srgbClr val="000000">
-              <a:alpha val="0"/>
-            </a:srgbClr>
-          </a:solidFill>
-          <a:ln xmlns:a="http://schemas.openxmlformats.org/drawingml/2006/main" w="0">
-            <a:solidFill>
-              <a:srgbClr val="000000">
-                <a:alpha val="0"/>
-              </a:srgbClr>
-            </a:solidFill>
-            <a:prstDash val="solid"/>
-          </a:ln>
-        </p:spPr>
-        <p:txBody>
-          <a:bodyPr xmlns:a="http://schemas.openxmlformats.org/drawingml/2006/main" wrap="square" lIns="0" tIns="0" rIns="0" bIns="0" anchor="ctr">
-            <a:normAutofit fontScale="100000"/>
-          </a:bodyPr>
-          <a:lstStyle xmlns:a="http://schemas.openxmlformats.org/drawingml/2006/main"/>
-          <a:p xmlns:a="http://schemas.openxmlformats.org/drawingml/2006/main">
-            <a:pPr algn="ctr">
-              <a:lnSpc>
-                <a:spcPct val="100000"/>
-              </a:lnSpc>
-              <a:buNone/>
-              <a:defRPr sz="2025" b="1" i="0">
-                <a:solidFill>
-                  <a:srgbClr val="FFFFFF"/>
-                </a:solidFill>
-                <a:latin typeface="Aptos Display"/>
-                <a:ea typeface="Aptos Display"/>
-                <a:cs typeface="Aptos Display"/>
-              </a:defRPr>
-            </a:pPr>
-            <a:r>
-              <a:rPr sz="2025" b="1" i="0">
-                <a:solidFill>
-                  <a:srgbClr val="FFFFFF"/>
-                </a:solidFill>
-                <a:latin typeface="Aptos Display"/>
-                <a:ea typeface="Aptos Display"/>
-                <a:cs typeface="Aptos Display"/>
-              </a:rPr>
-              <a:t>Comparison</a:t>
-            </a:r>
-          </a:p>
-        </p:txBody>
-      </p:sp>
-      <p:sp>
-        <p:nvSpPr>
-          <p:cNvPr id="21" name="loop-node-sub-4">
-            <a:extLst xmlns:a="http://schemas.openxmlformats.org/drawingml/2006/main">
-              <a:ext uri="{FF2B5EF4-FFF2-40B4-BE49-F238E27FC236}">
-                <a16:creationId xmlns:a16="http://schemas.microsoft.com/office/drawing/2014/main" id="{9488549E-EA4F-4F53-8249-1D8924A3DBA4}"/>
-              </a:ext>
-            </a:extLst>
-          </p:cNvPr>
-          <p:cNvSpPr>
-            <a:spLocks xmlns:a="http://schemas.openxmlformats.org/drawingml/2006/main" noGrp="1"/>
-          </p:cNvSpPr>
-          <p:nvPr/>
-        </p:nvSpPr>
-        <p:spPr>
-          <a:xfrm xmlns:a="http://schemas.openxmlformats.org/drawingml/2006/main">
-            <a:off x="9582150" y="2781300"/>
-            <a:ext cx="1847850" cy="247650"/>
-          </a:xfrm>
-          <a:prstGeom xmlns:a="http://schemas.openxmlformats.org/drawingml/2006/main" prst="rect">
-            <a:avLst/>
-          </a:prstGeom>
-          <a:solidFill xmlns:a="http://schemas.openxmlformats.org/drawingml/2006/main">
-            <a:srgbClr val="000000">
-              <a:alpha val="0"/>
-            </a:srgbClr>
-          </a:solidFill>
-          <a:ln xmlns:a="http://schemas.openxmlformats.org/drawingml/2006/main" w="0">
-            <a:solidFill>
-              <a:srgbClr val="000000">
-                <a:alpha val="0"/>
-              </a:srgbClr>
-            </a:solidFill>
-            <a:prstDash val="solid"/>
-          </a:ln>
-        </p:spPr>
-        <p:txBody>
-          <a:bodyPr xmlns:a="http://schemas.openxmlformats.org/drawingml/2006/main" wrap="square" lIns="0" tIns="0" rIns="0" bIns="0" anchor="t">
-            <a:normAutofit fontScale="100000"/>
-          </a:bodyPr>
-          <a:lstStyle xmlns:a="http://schemas.openxmlformats.org/drawingml/2006/main"/>
-          <a:p xmlns:a="http://schemas.openxmlformats.org/drawingml/2006/main">
-            <a:pPr algn="ctr">
-              <a:lnSpc>
-                <a:spcPct val="100000"/>
-              </a:lnSpc>
-              <a:buNone/>
-              <a:defRPr sz="1275" b="0" i="0">
-                <a:solidFill>
-                  <a:srgbClr val="DDE6EB"/>
-                </a:solidFill>
-                <a:latin typeface="Aptos"/>
-                <a:ea typeface="Aptos"/>
-                <a:cs typeface="Aptos"/>
-              </a:defRPr>
-            </a:pPr>
-            <a:r>
-              <a:rPr sz="1275" b="0" i="0">
-                <a:solidFill>
-                  <a:srgbClr val="DDE6EB"/>
-                </a:solidFill>
-                <a:latin typeface="Aptos"/>
-                <a:ea typeface="Aptos"/>
-                <a:cs typeface="Aptos"/>
-              </a:rPr>
-              <a:t>Previous / This</a:t>
-            </a:r>
-          </a:p>
-        </p:txBody>
-      </p:sp>
-      <p:sp>
-        <p:nvSpPr>
-          <p:cNvPr id="22" name="loop-lower-rule">
-            <a:extLst xmlns:a="http://schemas.openxmlformats.org/drawingml/2006/main">
-              <a:ext uri="{FF2B5EF4-FFF2-40B4-BE49-F238E27FC236}">
-                <a16:creationId xmlns:a16="http://schemas.microsoft.com/office/drawing/2014/main" id="{999045A6-024B-4370-8B9A-DD28E44A5FA6}"/>
-              </a:ext>
-            </a:extLst>
-          </p:cNvPr>
-          <p:cNvSpPr>
-            <a:spLocks xmlns:a="http://schemas.openxmlformats.org/drawingml/2006/main" noGrp="1"/>
-          </p:cNvSpPr>
-          <p:nvPr/>
-        </p:nvSpPr>
-        <p:spPr>
-          <a:xfrm xmlns:a="http://schemas.openxmlformats.org/drawingml/2006/main">
-            <a:off x="685800" y="3638550"/>
-            <a:ext cx="10820400" cy="0"/>
-          </a:xfrm>
-          <a:prstGeom xmlns:a="http://schemas.openxmlformats.org/drawingml/2006/main" prst="line">
-            <a:avLst/>
-          </a:prstGeom>
-          <a:solidFill xmlns:a="http://schemas.openxmlformats.org/drawingml/2006/main">
-            <a:srgbClr val="000000">
-              <a:alpha val="0"/>
-            </a:srgbClr>
-          </a:solidFill>
-          <a:ln xmlns:a="http://schemas.openxmlformats.org/drawingml/2006/main" w="9525">
-            <a:solidFill>
-              <a:srgbClr val="C8C0B3"/>
-            </a:solidFill>
-            <a:prstDash val="solid"/>
-          </a:ln>
-        </p:spPr>
-      </p:sp>
-      <p:sp>
-        <p:nvSpPr>
-          <p:cNvPr id="23" name="loop-assessment-job">
-            <a:extLst xmlns:a="http://schemas.openxmlformats.org/drawingml/2006/main">
-              <a:ext uri="{FF2B5EF4-FFF2-40B4-BE49-F238E27FC236}">
-                <a16:creationId xmlns:a16="http://schemas.microsoft.com/office/drawing/2014/main" id="{D26EE2A0-76D0-48A5-ADC7-2FBC47244FCF}"/>
-              </a:ext>
-            </a:extLst>
-          </p:cNvPr>
-          <p:cNvSpPr>
-            <a:spLocks xmlns:a="http://schemas.openxmlformats.org/drawingml/2006/main" noGrp="1"/>
-          </p:cNvSpPr>
-          <p:nvPr/>
-        </p:nvSpPr>
-        <p:spPr>
-          <a:xfrm xmlns:a="http://schemas.openxmlformats.org/drawingml/2006/main">
-            <a:off x="685800" y="3943350"/>
-            <a:ext cx="3048000" cy="323850"/>
-          </a:xfrm>
-          <a:prstGeom xmlns:a="http://schemas.openxmlformats.org/drawingml/2006/main" prst="rect">
-            <a:avLst/>
-          </a:prstGeom>
-          <a:solidFill xmlns:a="http://schemas.openxmlformats.org/drawingml/2006/main">
-            <a:srgbClr val="000000">
-              <a:alpha val="0"/>
-            </a:srgbClr>
-          </a:solidFill>
-          <a:ln xmlns:a="http://schemas.openxmlformats.org/drawingml/2006/main" w="0">
-            <a:solidFill>
-              <a:srgbClr val="000000">
-                <a:alpha val="0"/>
-              </a:srgbClr>
-            </a:solidFill>
-            <a:prstDash val="solid"/>
-          </a:ln>
-        </p:spPr>
-        <p:txBody>
-          <a:bodyPr xmlns:a="http://schemas.openxmlformats.org/drawingml/2006/main" wrap="square" lIns="0" tIns="0" rIns="0" bIns="0" anchor="t">
-            <a:normAutofit fontScale="100000"/>
-          </a:bodyPr>
-          <a:lstStyle xmlns:a="http://schemas.openxmlformats.org/drawingml/2006/main"/>
-          <a:p xmlns:a="http://schemas.openxmlformats.org/drawingml/2006/main">
-            <a:pPr algn="l">
-              <a:lnSpc>
-                <a:spcPct val="100000"/>
-              </a:lnSpc>
-              <a:buNone/>
-              <a:defRPr sz="1800" b="1" i="0">
-                <a:solidFill>
-                  <a:srgbClr val="2D6F6B"/>
-                </a:solidFill>
-                <a:latin typeface="Aptos"/>
-                <a:ea typeface="Aptos"/>
-                <a:cs typeface="Aptos"/>
-              </a:defRPr>
-            </a:pPr>
-            <a:r>
-              <a:rPr sz="1800" b="1" i="0">
-                <a:solidFill>
-                  <a:srgbClr val="2D6F6B"/>
-                </a:solidFill>
-                <a:latin typeface="Aptos"/>
-                <a:ea typeface="Aptos"/>
-                <a:cs typeface="Aptos"/>
-              </a:rPr>
-              <a:t>Assessment decides</a:t>
-            </a:r>
-          </a:p>
-        </p:txBody>
-      </p:sp>
-      <p:sp>
-        <p:nvSpPr>
-          <p:cNvPr id="24" name="loop-assessment-copy">
-            <a:extLst xmlns:a="http://schemas.openxmlformats.org/drawingml/2006/main">
-              <a:ext uri="{FF2B5EF4-FFF2-40B4-BE49-F238E27FC236}">
-                <a16:creationId xmlns:a16="http://schemas.microsoft.com/office/drawing/2014/main" id="{46C01A75-46E6-44EA-9E48-0FDA5B8BA4CF}"/>
-              </a:ext>
-            </a:extLst>
-          </p:cNvPr>
-          <p:cNvSpPr>
-            <a:spLocks xmlns:a="http://schemas.openxmlformats.org/drawingml/2006/main" noGrp="1"/>
-          </p:cNvSpPr>
-          <p:nvPr/>
-        </p:nvSpPr>
-        <p:spPr>
-          <a:xfrm xmlns:a="http://schemas.openxmlformats.org/drawingml/2006/main">
-            <a:off x="685800" y="4400550"/>
-            <a:ext cx="3048000" cy="1066800"/>
-          </a:xfrm>
-          <a:prstGeom xmlns:a="http://schemas.openxmlformats.org/drawingml/2006/main" prst="rect">
-            <a:avLst/>
-          </a:prstGeom>
-          <a:solidFill xmlns:a="http://schemas.openxmlformats.org/drawingml/2006/main">
-            <a:srgbClr val="000000">
-              <a:alpha val="0"/>
-            </a:srgbClr>
-          </a:solidFill>
-          <a:ln xmlns:a="http://schemas.openxmlformats.org/drawingml/2006/main" w="0">
-            <a:solidFill>
-              <a:srgbClr val="000000">
-                <a:alpha val="0"/>
-              </a:srgbClr>
-            </a:solidFill>
-            <a:prstDash val="solid"/>
-          </a:ln>
-        </p:spPr>
-        <p:txBody>
-          <a:bodyPr xmlns:a="http://schemas.openxmlformats.org/drawingml/2006/main" wrap="square" lIns="0" tIns="0" rIns="0" bIns="0" anchor="t">
-            <a:normAutofit fontScale="100000"/>
-          </a:bodyPr>
-          <a:lstStyle xmlns:a="http://schemas.openxmlformats.org/drawingml/2006/main"/>
-          <a:p xmlns:a="http://schemas.openxmlformats.org/drawingml/2006/main">
-            <a:pPr algn="l">
-              <a:lnSpc>
-                <a:spcPct val="105000"/>
-              </a:lnSpc>
-              <a:buNone/>
-              <a:defRPr sz="1500" b="0" i="0">
-                <a:solidFill>
-                  <a:srgbClr val="17222F"/>
-                </a:solidFill>
-                <a:latin typeface="Aptos"/>
-                <a:ea typeface="Aptos"/>
-                <a:cs typeface="Aptos"/>
-              </a:defRPr>
-            </a:pPr>
-            <a:r>
-              <a:rPr sz="1500" b="0" i="0">
-                <a:solidFill>
-                  <a:srgbClr val="17222F"/>
-                </a:solidFill>
-                <a:latin typeface="Aptos"/>
-                <a:ea typeface="Aptos"/>
-                <a:cs typeface="Aptos"/>
-              </a:rPr>
-              <a:t>A structurally isolated context applies the fixed Rubric and returns exact Transcript evidence.</a:t>
-            </a:r>
-          </a:p>
-        </p:txBody>
-      </p:sp>
-      <p:sp>
-        <p:nvSpPr>
-          <p:cNvPr id="25" name="loop-lower-divider-1">
-            <a:extLst xmlns:a="http://schemas.openxmlformats.org/drawingml/2006/main">
-              <a:ext uri="{FF2B5EF4-FFF2-40B4-BE49-F238E27FC236}">
-                <a16:creationId xmlns:a16="http://schemas.microsoft.com/office/drawing/2014/main" id="{5867A56A-45E4-4F92-BF0D-A116522DC049}"/>
-              </a:ext>
-            </a:extLst>
-          </p:cNvPr>
-          <p:cNvSpPr>
-            <a:spLocks xmlns:a="http://schemas.openxmlformats.org/drawingml/2006/main" noGrp="1"/>
-          </p:cNvSpPr>
-          <p:nvPr/>
-        </p:nvSpPr>
-        <p:spPr>
-          <a:xfrm xmlns:a="http://schemas.openxmlformats.org/drawingml/2006/main">
-            <a:off x="4038600" y="3943350"/>
-            <a:ext cx="0" cy="1524000"/>
-          </a:xfrm>
-          <a:prstGeom xmlns:a="http://schemas.openxmlformats.org/drawingml/2006/main" prst="line">
-            <a:avLst/>
-          </a:prstGeom>
-          <a:solidFill xmlns:a="http://schemas.openxmlformats.org/drawingml/2006/main">
-            <a:srgbClr val="000000">
-              <a:alpha val="0"/>
-            </a:srgbClr>
-          </a:solidFill>
-          <a:ln xmlns:a="http://schemas.openxmlformats.org/drawingml/2006/main" w="9525">
-            <a:solidFill>
-              <a:srgbClr val="C8C0B3"/>
-            </a:solidFill>
-            <a:prstDash val="solid"/>
-          </a:ln>
-        </p:spPr>
-      </p:sp>
-      <p:sp>
-        <p:nvSpPr>
-          <p:cNvPr id="26" name="loop-feedback-job">
-            <a:extLst xmlns:a="http://schemas.openxmlformats.org/drawingml/2006/main">
-              <a:ext uri="{FF2B5EF4-FFF2-40B4-BE49-F238E27FC236}">
-                <a16:creationId xmlns:a16="http://schemas.microsoft.com/office/drawing/2014/main" id="{355E76E1-1711-41D9-972C-DB8806794639}"/>
-              </a:ext>
-            </a:extLst>
-          </p:cNvPr>
-          <p:cNvSpPr>
-            <a:spLocks xmlns:a="http://schemas.openxmlformats.org/drawingml/2006/main" noGrp="1"/>
-          </p:cNvSpPr>
-          <p:nvPr/>
-        </p:nvSpPr>
-        <p:spPr>
-          <a:xfrm xmlns:a="http://schemas.openxmlformats.org/drawingml/2006/main">
-            <a:off x="4438650" y="3943350"/>
-            <a:ext cx="3048000" cy="323850"/>
-          </a:xfrm>
-          <a:prstGeom xmlns:a="http://schemas.openxmlformats.org/drawingml/2006/main" prst="rect">
-            <a:avLst/>
-          </a:prstGeom>
-          <a:solidFill xmlns:a="http://schemas.openxmlformats.org/drawingml/2006/main">
-            <a:srgbClr val="000000">
-              <a:alpha val="0"/>
-            </a:srgbClr>
-          </a:solidFill>
-          <a:ln xmlns:a="http://schemas.openxmlformats.org/drawingml/2006/main" w="0">
-            <a:solidFill>
-              <a:srgbClr val="000000">
-                <a:alpha val="0"/>
-              </a:srgbClr>
-            </a:solidFill>
-            <a:prstDash val="solid"/>
-          </a:ln>
-        </p:spPr>
-        <p:txBody>
-          <a:bodyPr xmlns:a="http://schemas.openxmlformats.org/drawingml/2006/main" wrap="square" lIns="0" tIns="0" rIns="0" bIns="0" anchor="t">
-            <a:normAutofit fontScale="100000"/>
-          </a:bodyPr>
-          <a:lstStyle xmlns:a="http://schemas.openxmlformats.org/drawingml/2006/main"/>
-          <a:p xmlns:a="http://schemas.openxmlformats.org/drawingml/2006/main">
-            <a:pPr algn="l">
-              <a:lnSpc>
-                <a:spcPct val="100000"/>
-              </a:lnSpc>
-              <a:buNone/>
-              <a:defRPr sz="1800" b="1" i="0">
-                <a:solidFill>
-                  <a:srgbClr val="C57A42"/>
-                </a:solidFill>
-                <a:latin typeface="Aptos"/>
-                <a:ea typeface="Aptos"/>
-                <a:cs typeface="Aptos"/>
-              </a:defRPr>
-            </a:pPr>
-            <a:r>
-              <a:rPr sz="1800" b="1" i="0">
-                <a:solidFill>
-                  <a:srgbClr val="C57A42"/>
-                </a:solidFill>
-                <a:latin typeface="Aptos"/>
-                <a:ea typeface="Aptos"/>
-                <a:cs typeface="Aptos"/>
-              </a:rPr>
-              <a:t>Feedback coaches</a:t>
-            </a:r>
-          </a:p>
-        </p:txBody>
-      </p:sp>
-      <p:sp>
-        <p:nvSpPr>
-          <p:cNvPr id="27" name="loop-feedback-copy">
-            <a:extLst xmlns:a="http://schemas.openxmlformats.org/drawingml/2006/main">
-              <a:ext uri="{FF2B5EF4-FFF2-40B4-BE49-F238E27FC236}">
-                <a16:creationId xmlns:a16="http://schemas.microsoft.com/office/drawing/2014/main" id="{B2B86478-A65D-47A4-B304-B2E6F253BECD}"/>
-              </a:ext>
-            </a:extLst>
-          </p:cNvPr>
-          <p:cNvSpPr>
-            <a:spLocks xmlns:a="http://schemas.openxmlformats.org/drawingml/2006/main" noGrp="1"/>
-          </p:cNvSpPr>
-          <p:nvPr/>
-        </p:nvSpPr>
-        <p:spPr>
-          <a:xfrm xmlns:a="http://schemas.openxmlformats.org/drawingml/2006/main">
-            <a:off x="4438650" y="4400550"/>
-            <a:ext cx="3048000" cy="1066800"/>
-          </a:xfrm>
-          <a:prstGeom xmlns:a="http://schemas.openxmlformats.org/drawingml/2006/main" prst="rect">
-            <a:avLst/>
-          </a:prstGeom>
-          <a:solidFill xmlns:a="http://schemas.openxmlformats.org/drawingml/2006/main">
-            <a:srgbClr val="000000">
-              <a:alpha val="0"/>
-            </a:srgbClr>
-          </a:solidFill>
-          <a:ln xmlns:a="http://schemas.openxmlformats.org/drawingml/2006/main" w="0">
-            <a:solidFill>
-              <a:srgbClr val="000000">
-                <a:alpha val="0"/>
-              </a:srgbClr>
-            </a:solidFill>
-            <a:prstDash val="solid"/>
-          </a:ln>
-        </p:spPr>
-        <p:txBody>
-          <a:bodyPr xmlns:a="http://schemas.openxmlformats.org/drawingml/2006/main" wrap="square" lIns="0" tIns="0" rIns="0" bIns="0" anchor="t">
-            <a:normAutofit fontScale="100000"/>
-          </a:bodyPr>
-          <a:lstStyle xmlns:a="http://schemas.openxmlformats.org/drawingml/2006/main"/>
-          <a:p xmlns:a="http://schemas.openxmlformats.org/drawingml/2006/main">
-            <a:pPr algn="l">
-              <a:lnSpc>
-                <a:spcPct val="105000"/>
-              </a:lnSpc>
-              <a:buNone/>
-              <a:defRPr sz="1500" b="0" i="0">
-                <a:solidFill>
-                  <a:srgbClr val="17222F"/>
-                </a:solidFill>
-                <a:latin typeface="Aptos"/>
-                <a:ea typeface="Aptos"/>
-                <a:cs typeface="Aptos"/>
-              </a:defRPr>
-            </a:pPr>
-            <a:r>
-              <a:rPr sz="1500" b="0" i="0">
-                <a:solidFill>
-                  <a:srgbClr val="17222F"/>
-                </a:solidFill>
-                <a:latin typeface="Aptos"/>
-                <a:ea typeface="Aptos"/>
-                <a:cs typeface="Aptos"/>
-              </a:rPr>
-              <a:t>A separate step translates fixed verdicts into direct coaching. It cannot revise the Assessment.</a:t>
-            </a:r>
-          </a:p>
-        </p:txBody>
-      </p:sp>
-      <p:sp>
-        <p:nvSpPr>
-          <p:cNvPr id="28" name="loop-lower-divider-2">
-            <a:extLst xmlns:a="http://schemas.openxmlformats.org/drawingml/2006/main">
-              <a:ext uri="{FF2B5EF4-FFF2-40B4-BE49-F238E27FC236}">
-                <a16:creationId xmlns:a16="http://schemas.microsoft.com/office/drawing/2014/main" id="{83CF2EC5-1F30-4F11-8B00-F5C72800D323}"/>
-              </a:ext>
-            </a:extLst>
-          </p:cNvPr>
-          <p:cNvSpPr>
-            <a:spLocks xmlns:a="http://schemas.openxmlformats.org/drawingml/2006/main" noGrp="1"/>
-          </p:cNvSpPr>
-          <p:nvPr/>
-        </p:nvSpPr>
-        <p:spPr>
-          <a:xfrm xmlns:a="http://schemas.openxmlformats.org/drawingml/2006/main">
-            <a:off x="7791450" y="3943350"/>
-            <a:ext cx="0" cy="1524000"/>
-          </a:xfrm>
-          <a:prstGeom xmlns:a="http://schemas.openxmlformats.org/drawingml/2006/main" prst="line">
-            <a:avLst/>
-          </a:prstGeom>
-          <a:solidFill xmlns:a="http://schemas.openxmlformats.org/drawingml/2006/main">
-            <a:srgbClr val="000000">
-              <a:alpha val="0"/>
-            </a:srgbClr>
-          </a:solidFill>
-          <a:ln xmlns:a="http://schemas.openxmlformats.org/drawingml/2006/main" w="9525">
-            <a:solidFill>
-              <a:srgbClr val="C8C0B3"/>
-            </a:solidFill>
-            <a:prstDash val="solid"/>
-          </a:ln>
-        </p:spPr>
-      </p:sp>
-      <p:sp>
-        <p:nvSpPr>
-          <p:cNvPr id="29" name="loop-isolation">
-            <a:extLst xmlns:a="http://schemas.openxmlformats.org/drawingml/2006/main">
-              <a:ext uri="{FF2B5EF4-FFF2-40B4-BE49-F238E27FC236}">
-                <a16:creationId xmlns:a16="http://schemas.microsoft.com/office/drawing/2014/main" id="{D2B77519-9F5E-4986-B0EB-53168FFE0444}"/>
-              </a:ext>
-            </a:extLst>
-          </p:cNvPr>
-          <p:cNvSpPr>
-            <a:spLocks xmlns:a="http://schemas.openxmlformats.org/drawingml/2006/main" noGrp="1"/>
-          </p:cNvSpPr>
-          <p:nvPr/>
-        </p:nvSpPr>
-        <p:spPr>
-          <a:xfrm xmlns:a="http://schemas.openxmlformats.org/drawingml/2006/main">
-            <a:off x="8191500" y="3943350"/>
-            <a:ext cx="3105150" cy="723900"/>
-          </a:xfrm>
-          <a:prstGeom xmlns:a="http://schemas.openxmlformats.org/drawingml/2006/main" prst="rect">
-            <a:avLst/>
-          </a:prstGeom>
-          <a:solidFill xmlns:a="http://schemas.openxmlformats.org/drawingml/2006/main">
-            <a:srgbClr val="000000">
-              <a:alpha val="0"/>
-            </a:srgbClr>
-          </a:solidFill>
-          <a:ln xmlns:a="http://schemas.openxmlformats.org/drawingml/2006/main" w="0">
-            <a:solidFill>
-              <a:srgbClr val="000000">
-                <a:alpha val="0"/>
-              </a:srgbClr>
-            </a:solidFill>
-            <a:prstDash val="solid"/>
-          </a:ln>
-        </p:spPr>
-        <p:txBody>
-          <a:bodyPr xmlns:a="http://schemas.openxmlformats.org/drawingml/2006/main" wrap="square" lIns="0" tIns="0" rIns="0" bIns="0" anchor="t">
-            <a:normAutofit fontScale="100000"/>
-          </a:bodyPr>
-          <a:lstStyle xmlns:a="http://schemas.openxmlformats.org/drawingml/2006/main"/>
-          <a:p xmlns:a="http://schemas.openxmlformats.org/drawingml/2006/main">
-            <a:pPr algn="l">
-              <a:lnSpc>
-                <a:spcPct val="100000"/>
-              </a:lnSpc>
-              <a:buNone/>
-              <a:defRPr sz="1875" b="1" i="0">
-                <a:solidFill>
-                  <a:srgbClr val="162A3C"/>
-                </a:solidFill>
-                <a:latin typeface="Aptos Display"/>
-                <a:ea typeface="Aptos Display"/>
-                <a:cs typeface="Aptos Display"/>
-              </a:defRPr>
-            </a:pPr>
-            <a:r>
-              <a:rPr sz="1875" b="1" i="0">
-                <a:solidFill>
-                  <a:srgbClr val="162A3C"/>
-                </a:solidFill>
-                <a:latin typeface="Aptos Display"/>
-                <a:ea typeface="Aptos Display"/>
-                <a:cs typeface="Aptos Display"/>
-              </a:rPr>
-              <a:t>The Persona never judges the Attempt it participated in.</a:t>
-            </a:r>
-          </a:p>
-        </p:txBody>
-      </p:sp>
-      <p:sp>
-        <p:nvSpPr>
-          <p:cNvPr id="30" name="loop-transcript">
-            <a:extLst xmlns:a="http://schemas.openxmlformats.org/drawingml/2006/main">
-              <a:ext uri="{FF2B5EF4-FFF2-40B4-BE49-F238E27FC236}">
-                <a16:creationId xmlns:a16="http://schemas.microsoft.com/office/drawing/2014/main" id="{9F5AD0A8-570B-4101-AAE6-8B3665D6418B}"/>
-              </a:ext>
-            </a:extLst>
-          </p:cNvPr>
-          <p:cNvSpPr>
-            <a:spLocks xmlns:a="http://schemas.openxmlformats.org/drawingml/2006/main" noGrp="1"/>
-          </p:cNvSpPr>
-          <p:nvPr/>
-        </p:nvSpPr>
-        <p:spPr>
-          <a:xfrm xmlns:a="http://schemas.openxmlformats.org/drawingml/2006/main">
-            <a:off x="8191500" y="4895850"/>
-            <a:ext cx="3105150" cy="552450"/>
-          </a:xfrm>
-          <a:prstGeom xmlns:a="http://schemas.openxmlformats.org/drawingml/2006/main" prst="rect">
-            <a:avLst/>
-          </a:prstGeom>
-          <a:solidFill xmlns:a="http://schemas.openxmlformats.org/drawingml/2006/main">
-            <a:srgbClr val="000000">
-              <a:alpha val="0"/>
-            </a:srgbClr>
-          </a:solidFill>
-          <a:ln xmlns:a="http://schemas.openxmlformats.org/drawingml/2006/main" w="0">
-            <a:solidFill>
-              <a:srgbClr val="000000">
-                <a:alpha val="0"/>
-              </a:srgbClr>
-            </a:solidFill>
-            <a:prstDash val="solid"/>
-          </a:ln>
-        </p:spPr>
-        <p:txBody>
-          <a:bodyPr xmlns:a="http://schemas.openxmlformats.org/drawingml/2006/main" wrap="square" lIns="0" tIns="0" rIns="0" bIns="0" anchor="t">
-            <a:normAutofit fontScale="100000"/>
-          </a:bodyPr>
-          <a:lstStyle xmlns:a="http://schemas.openxmlformats.org/drawingml/2006/main"/>
-          <a:p xmlns:a="http://schemas.openxmlformats.org/drawingml/2006/main">
-            <a:pPr algn="l">
-              <a:lnSpc>
-                <a:spcPct val="105000"/>
-              </a:lnSpc>
-              <a:buNone/>
-              <a:defRPr sz="1500" b="0" i="0">
-                <a:solidFill>
-                  <a:srgbClr val="5B6670"/>
-                </a:solidFill>
-                <a:latin typeface="Aptos"/>
-                <a:ea typeface="Aptos"/>
-                <a:cs typeface="Aptos"/>
-              </a:defRPr>
-            </a:pPr>
-            <a:r>
-              <a:rPr sz="1500" b="0" i="0">
-                <a:solidFill>
-                  <a:srgbClr val="5B6670"/>
-                </a:solidFill>
-                <a:latin typeface="Aptos"/>
-                <a:ea typeface="Aptos"/>
-                <a:cs typeface="Aptos"/>
-              </a:rPr>
-              <a:t>The Transcript is reconstructed text—not a recording.</a:t>
+              <a:t>The Persona participates. Assessment judges. Feedback coaches.</a:t>
             </a:r>
           </a:p>
         </p:txBody>
@@ -9703,111 +7767,6 @@
       </p:sp>
       <p:sp>
         <p:nvSpPr>
-          <p:cNvPr id="8" name="demo-bottom-rule">
-            <a:extLst xmlns:a="http://schemas.openxmlformats.org/drawingml/2006/main">
-              <a:ext uri="{FF2B5EF4-FFF2-40B4-BE49-F238E27FC236}">
-                <a16:creationId xmlns:a16="http://schemas.microsoft.com/office/drawing/2014/main" id="{A593CC0D-D197-4D23-9749-792EAEDEB49B}"/>
-              </a:ext>
-            </a:extLst>
-          </p:cNvPr>
-          <p:cNvSpPr>
-            <a:spLocks xmlns:a="http://schemas.openxmlformats.org/drawingml/2006/main" noGrp="1"/>
-          </p:cNvSpPr>
-          <p:nvPr/>
-        </p:nvSpPr>
-        <p:spPr>
-          <a:xfrm xmlns:a="http://schemas.openxmlformats.org/drawingml/2006/main">
-            <a:off x="1752600" y="5124450"/>
-            <a:ext cx="8686800" cy="0"/>
-          </a:xfrm>
-          <a:prstGeom xmlns:a="http://schemas.openxmlformats.org/drawingml/2006/main" prst="line">
-            <a:avLst/>
-          </a:prstGeom>
-          <a:solidFill xmlns:a="http://schemas.openxmlformats.org/drawingml/2006/main">
-            <a:srgbClr val="000000">
-              <a:alpha val="0"/>
-            </a:srgbClr>
-          </a:solidFill>
-          <a:ln xmlns:a="http://schemas.openxmlformats.org/drawingml/2006/main" w="9525">
-            <a:solidFill>
-              <a:srgbClr val="536574"/>
-            </a:solidFill>
-            <a:prstDash val="solid"/>
-          </a:ln>
-        </p:spPr>
-      </p:sp>
-      <p:sp>
-        <p:nvSpPr>
-          <p:cNvPr id="9" name="demo-watch">
-            <a:extLst xmlns:a="http://schemas.openxmlformats.org/drawingml/2006/main">
-              <a:ext uri="{FF2B5EF4-FFF2-40B4-BE49-F238E27FC236}">
-                <a16:creationId xmlns:a16="http://schemas.microsoft.com/office/drawing/2014/main" id="{1D61F31F-5FAF-4AEF-B9E8-3CD2D14D0B3F}"/>
-              </a:ext>
-            </a:extLst>
-          </p:cNvPr>
-          <p:cNvSpPr>
-            <a:spLocks xmlns:a="http://schemas.openxmlformats.org/drawingml/2006/main" noGrp="1"/>
-          </p:cNvSpPr>
-          <p:nvPr/>
-        </p:nvSpPr>
-        <p:spPr>
-          <a:xfrm xmlns:a="http://schemas.openxmlformats.org/drawingml/2006/main">
-            <a:off x="1104900" y="5467350"/>
-            <a:ext cx="9982200" cy="457200"/>
-          </a:xfrm>
-          <a:prstGeom xmlns:a="http://schemas.openxmlformats.org/drawingml/2006/main" prst="rect">
-            <a:avLst/>
-          </a:prstGeom>
-          <a:solidFill xmlns:a="http://schemas.openxmlformats.org/drawingml/2006/main">
-            <a:srgbClr val="000000">
-              <a:alpha val="0"/>
-            </a:srgbClr>
-          </a:solidFill>
-          <a:ln xmlns:a="http://schemas.openxmlformats.org/drawingml/2006/main" w="0">
-            <a:solidFill>
-              <a:srgbClr val="000000">
-                <a:alpha val="0"/>
-              </a:srgbClr>
-            </a:solidFill>
-            <a:prstDash val="solid"/>
-          </a:ln>
-        </p:spPr>
-        <p:txBody>
-          <a:bodyPr xmlns:a="http://schemas.openxmlformats.org/drawingml/2006/main" wrap="square" lIns="0" tIns="0" rIns="0" bIns="0" anchor="t">
-            <a:normAutofit fontScale="100000"/>
-          </a:bodyPr>
-          <a:lstStyle xmlns:a="http://schemas.openxmlformats.org/drawingml/2006/main"/>
-          <a:p xmlns:a="http://schemas.openxmlformats.org/drawingml/2006/main">
-            <a:pPr algn="ctr">
-              <a:lnSpc>
-                <a:spcPct val="100000"/>
-              </a:lnSpc>
-              <a:buNone/>
-              <a:defRPr sz="1875" b="0" i="0">
-                <a:solidFill>
-                  <a:srgbClr val="DDE6EB"/>
-                </a:solidFill>
-                <a:latin typeface="Aptos"/>
-                <a:ea typeface="Aptos"/>
-                <a:cs typeface="Aptos"/>
-              </a:defRPr>
-            </a:pPr>
-            <a:r>
-              <a:rPr sz="1875" b="0" i="0">
-                <a:solidFill>
-                  <a:srgbClr val="DDE6EB"/>
-                </a:solidFill>
-                <a:latin typeface="Aptos"/>
-                <a:ea typeface="Aptos"/>
-                <a:cs typeface="Aptos"/>
-              </a:rPr>
-              <a:t>Watch what Jordan reveals  ·  what the Gate changes  ·  what the comparison makes visible</a:t>
-            </a:r>
-          </a:p>
-        </p:txBody>
-      </p:sp>
-      <p:sp>
-        <p:nvSpPr>
           <p:cNvPr id="10" name="slide-6-footer-number">
             <a:extLst xmlns:a="http://schemas.openxmlformats.org/drawingml/2006/main">
               <a:ext uri="{FF2B5EF4-FFF2-40B4-BE49-F238E27FC236}">
@@ -9922,7 +7881,7 @@
         <p:spPr>
           <a:xfrm xmlns:a="http://schemas.openxmlformats.org/drawingml/2006/main">
             <a:off x="609600" y="400050"/>
-            <a:ext cx="10972800" cy="1066800"/>
+            <a:ext cx="10972800" cy="685800"/>
           </a:xfrm>
           <a:prstGeom xmlns:a="http://schemas.openxmlformats.org/drawingml/2006/main" prst="rect">
             <a:avLst/>
@@ -9943,7 +7902,7 @@
         </p:spPr>
         <p:txBody>
           <a:bodyPr xmlns:a="http://schemas.openxmlformats.org/drawingml/2006/main" wrap="square" lIns="0" tIns="0" rIns="0" bIns="0" anchor="t">
-            <a:normAutofit fontScale="100000"/>
+            <a:noAutofit/>
           </a:bodyPr>
           <a:lstStyle xmlns:a="http://schemas.openxmlformats.org/drawingml/2006/main"/>
           <a:p xmlns:a="http://schemas.openxmlformats.org/drawingml/2006/main">
@@ -9970,34 +7929,7 @@
                 <a:ea typeface="Aptos Display"/>
                 <a:cs typeface="Aptos Display"/>
               </a:rPr>
-              <a:t>The result is credible because every judgment</a:t>
-            </a:r>
-          </a:p>
-          <a:p xmlns:a="http://schemas.openxmlformats.org/drawingml/2006/main">
-            <a:pPr algn="l">
-              <a:lnSpc>
-                <a:spcPct val="93000"/>
-              </a:lnSpc>
-              <a:buNone/>
-              <a:defRPr sz="3600" b="1" i="0">
-                <a:solidFill>
-                  <a:srgbClr val="17222F"/>
-                </a:solidFill>
-                <a:latin typeface="Aptos Display"/>
-                <a:ea typeface="Aptos Display"/>
-                <a:cs typeface="Aptos Display"/>
-              </a:defRPr>
-            </a:pPr>
-            <a:r>
-              <a:rPr sz="3600" b="1" i="0">
-                <a:solidFill>
-                  <a:srgbClr val="17222F"/>
-                </a:solidFill>
-                <a:latin typeface="Aptos Display"/>
-                <a:ea typeface="Aptos Display"/>
-                <a:cs typeface="Aptos Display"/>
-              </a:rPr>
-              <a:t>has observable evidence</a:t>
+              <a:t>Same rubric. Different evidence.</a:t>
             </a:r>
           </a:p>
         </p:txBody>
@@ -10039,10 +7971,10 @@
       </p:sp>
       <p:sp>
         <p:nvSpPr>
-          <p:cNvPr id="3" name="result-qualifier">
+          <p:cNvPr id="4" name="result-prev-label">
             <a:extLst xmlns:a="http://schemas.openxmlformats.org/drawingml/2006/main">
               <a:ext uri="{FF2B5EF4-FFF2-40B4-BE49-F238E27FC236}">
-                <a16:creationId xmlns:a16="http://schemas.microsoft.com/office/drawing/2014/main" id="{8A357D5E-7F87-463B-A678-60A04A6AFD7F}"/>
+                <a16:creationId xmlns:a16="http://schemas.microsoft.com/office/drawing/2014/main" id="{0269BFCD-47BE-492B-AD14-8B253F5DF4C8}"/>
               </a:ext>
             </a:extLst>
           </p:cNvPr>
@@ -10053,8 +7985,8 @@
         </p:nvSpPr>
         <p:spPr>
           <a:xfrm xmlns:a="http://schemas.openxmlformats.org/drawingml/2006/main">
-            <a:off x="685800" y="1562100"/>
-            <a:ext cx="5334000" cy="266700"/>
+            <a:off x="704850" y="1885950"/>
+            <a:ext cx="4572000" cy="285750"/>
           </a:xfrm>
           <a:prstGeom xmlns:a="http://schemas.openxmlformats.org/drawingml/2006/main" prst="rect">
             <a:avLst/>
@@ -10086,7 +8018,7 @@
               <a:buNone/>
               <a:defRPr sz="1350" b="1" i="0">
                 <a:solidFill>
-                  <a:srgbClr val="5B6670"/>
+                  <a:srgbClr val="A74A43"/>
                 </a:solidFill>
                 <a:latin typeface="Aptos"/>
                 <a:ea typeface="Aptos"/>
@@ -10096,23 +8028,23 @@
             <a:r>
               <a:rPr sz="1350" b="1" i="0">
                 <a:solidFill>
-                  <a:srgbClr val="5B6670"/>
+                  <a:srgbClr val="A74A43"/>
                 </a:solidFill>
                 <a:latin typeface="Aptos"/>
                 <a:ea typeface="Aptos"/>
                 <a:cs typeface="Aptos"/>
               </a:rPr>
-              <a:t>OBSERVED WITHIN ONE PROTOTYPE SCENARIO</a:t>
+              <a:t>PREVIOUS ATTEMPT</a:t>
             </a:r>
           </a:p>
         </p:txBody>
       </p:sp>
       <p:sp>
         <p:nvSpPr>
-          <p:cNvPr id="4" name="result-prev-label">
+          <p:cNvPr id="5" name="result-prev-score">
             <a:extLst xmlns:a="http://schemas.openxmlformats.org/drawingml/2006/main">
               <a:ext uri="{FF2B5EF4-FFF2-40B4-BE49-F238E27FC236}">
-                <a16:creationId xmlns:a16="http://schemas.microsoft.com/office/drawing/2014/main" id="{0269BFCD-47BE-492B-AD14-8B253F5DF4C8}"/>
+                <a16:creationId xmlns:a16="http://schemas.microsoft.com/office/drawing/2014/main" id="{61B1ADE0-BBD3-4FB2-AB88-DEEE62C9A968}"/>
               </a:ext>
             </a:extLst>
           </p:cNvPr>
@@ -10123,8 +8055,8 @@
         </p:nvSpPr>
         <p:spPr>
           <a:xfrm xmlns:a="http://schemas.openxmlformats.org/drawingml/2006/main">
-            <a:off x="704850" y="2076450"/>
-            <a:ext cx="4572000" cy="285750"/>
+            <a:off x="685800" y="2305050"/>
+            <a:ext cx="2286000" cy="914400"/>
           </a:xfrm>
           <a:prstGeom xmlns:a="http://schemas.openxmlformats.org/drawingml/2006/main" prst="rect">
             <a:avLst/>
@@ -10154,35 +8086,35 @@
                 <a:spcPct val="100000"/>
               </a:lnSpc>
               <a:buNone/>
-              <a:defRPr sz="1350" b="1" i="0">
+              <a:defRPr sz="5550" b="1" i="0">
                 <a:solidFill>
                   <a:srgbClr val="A74A43"/>
                 </a:solidFill>
-                <a:latin typeface="Aptos"/>
-                <a:ea typeface="Aptos"/>
-                <a:cs typeface="Aptos"/>
+                <a:latin typeface="Aptos Display"/>
+                <a:ea typeface="Aptos Display"/>
+                <a:cs typeface="Aptos Display"/>
               </a:defRPr>
             </a:pPr>
             <a:r>
-              <a:rPr sz="1350" b="1" i="0">
+              <a:rPr sz="5550" b="1" i="0">
                 <a:solidFill>
                   <a:srgbClr val="A74A43"/>
                 </a:solidFill>
-                <a:latin typeface="Aptos"/>
-                <a:ea typeface="Aptos"/>
-                <a:cs typeface="Aptos"/>
+                <a:latin typeface="Aptos Display"/>
+                <a:ea typeface="Aptos Display"/>
+                <a:cs typeface="Aptos Display"/>
               </a:rPr>
-              <a:t>PREVIOUS ATTEMPT</a:t>
+              <a:t>0/6</a:t>
             </a:r>
           </a:p>
         </p:txBody>
       </p:sp>
       <p:sp>
         <p:nvSpPr>
-          <p:cNvPr id="5" name="result-prev-score">
+          <p:cNvPr id="6" name="result-prev-quote">
             <a:extLst xmlns:a="http://schemas.openxmlformats.org/drawingml/2006/main">
               <a:ext uri="{FF2B5EF4-FFF2-40B4-BE49-F238E27FC236}">
-                <a16:creationId xmlns:a16="http://schemas.microsoft.com/office/drawing/2014/main" id="{61B1ADE0-BBD3-4FB2-AB88-DEEE62C9A968}"/>
+                <a16:creationId xmlns:a16="http://schemas.microsoft.com/office/drawing/2014/main" id="{11D9B782-8054-4682-B0AE-9E191BB44464}"/>
               </a:ext>
             </a:extLst>
           </p:cNvPr>
@@ -10193,8 +8125,8 @@
         </p:nvSpPr>
         <p:spPr>
           <a:xfrm xmlns:a="http://schemas.openxmlformats.org/drawingml/2006/main">
-            <a:off x="685800" y="2400300"/>
-            <a:ext cx="2286000" cy="914400"/>
+            <a:off x="685800" y="3524250"/>
+            <a:ext cx="4572000" cy="1143000"/>
           </a:xfrm>
           <a:prstGeom xmlns:a="http://schemas.openxmlformats.org/drawingml/2006/main" prst="rect">
             <a:avLst/>
@@ -10215,7 +8147,7 @@
         </p:spPr>
         <p:txBody>
           <a:bodyPr xmlns:a="http://schemas.openxmlformats.org/drawingml/2006/main" wrap="square" lIns="0" tIns="0" rIns="0" bIns="0" anchor="t">
-            <a:normAutofit fontScale="100000"/>
+            <a:noAutofit/>
           </a:bodyPr>
           <a:lstStyle xmlns:a="http://schemas.openxmlformats.org/drawingml/2006/main"/>
           <a:p xmlns:a="http://schemas.openxmlformats.org/drawingml/2006/main">
@@ -10224,9 +8156,9 @@
                 <a:spcPct val="100000"/>
               </a:lnSpc>
               <a:buNone/>
-              <a:defRPr sz="5550" b="1" i="0">
-                <a:solidFill>
-                  <a:srgbClr val="A74A43"/>
+              <a:defRPr sz="2250" b="1" i="0">
+                <a:solidFill>
+                  <a:srgbClr val="162A3C"/>
                 </a:solidFill>
                 <a:latin typeface="Aptos Display"/>
                 <a:ea typeface="Aptos Display"/>
@@ -10234,25 +8166,52 @@
               </a:defRPr>
             </a:pPr>
             <a:r>
-              <a:rPr sz="5550" b="1" i="0">
-                <a:solidFill>
-                  <a:srgbClr val="A74A43"/>
+              <a:rPr sz="2250" b="1" i="0">
+                <a:solidFill>
+                  <a:srgbClr val="162A3C"/>
                 </a:solidFill>
                 <a:latin typeface="Aptos Display"/>
                 <a:ea typeface="Aptos Display"/>
                 <a:cs typeface="Aptos Display"/>
               </a:rPr>
-              <a:t>0/6</a:t>
+              <a:t>“I can offer you a discount</a:t>
+            </a:r>
+          </a:p>
+          <a:p xmlns:a="http://schemas.openxmlformats.org/drawingml/2006/main">
+            <a:pPr algn="l">
+              <a:lnSpc>
+                <a:spcPct val="100000"/>
+              </a:lnSpc>
+              <a:buNone/>
+              <a:defRPr sz="2250" b="1" i="0">
+                <a:solidFill>
+                  <a:srgbClr val="162A3C"/>
+                </a:solidFill>
+                <a:latin typeface="Aptos Display"/>
+                <a:ea typeface="Aptos Display"/>
+                <a:cs typeface="Aptos Display"/>
+              </a:defRPr>
+            </a:pPr>
+            <a:r>
+              <a:rPr sz="2250" b="1" i="0">
+                <a:solidFill>
+                  <a:srgbClr val="162A3C"/>
+                </a:solidFill>
+                <a:latin typeface="Aptos Display"/>
+                <a:ea typeface="Aptos Display"/>
+                <a:cs typeface="Aptos Display"/>
+              </a:rPr>
+              <a:t>on your next six months.”</a:t>
             </a:r>
           </a:p>
         </p:txBody>
       </p:sp>
       <p:sp>
         <p:nvSpPr>
-          <p:cNvPr id="6" name="result-prev-quote">
+          <p:cNvPr id="8" name="result-arrow">
             <a:extLst xmlns:a="http://schemas.openxmlformats.org/drawingml/2006/main">
               <a:ext uri="{FF2B5EF4-FFF2-40B4-BE49-F238E27FC236}">
-                <a16:creationId xmlns:a16="http://schemas.microsoft.com/office/drawing/2014/main" id="{11D9B782-8054-4682-B0AE-9E191BB44464}"/>
+                <a16:creationId xmlns:a16="http://schemas.microsoft.com/office/drawing/2014/main" id="{DE98F228-8E5E-4F6F-876D-A5D449EC403B}"/>
               </a:ext>
             </a:extLst>
           </p:cNvPr>
@@ -10263,8 +8222,8 @@
         </p:nvSpPr>
         <p:spPr>
           <a:xfrm xmlns:a="http://schemas.openxmlformats.org/drawingml/2006/main">
-            <a:off x="685800" y="3486150"/>
-            <a:ext cx="4572000" cy="914400"/>
+            <a:off x="5467350" y="2990850"/>
+            <a:ext cx="1104900" cy="457200"/>
           </a:xfrm>
           <a:prstGeom xmlns:a="http://schemas.openxmlformats.org/drawingml/2006/main" prst="rect">
             <a:avLst/>
@@ -10284,19 +8243,19 @@
           </a:ln>
         </p:spPr>
         <p:txBody>
-          <a:bodyPr xmlns:a="http://schemas.openxmlformats.org/drawingml/2006/main" wrap="square" lIns="0" tIns="0" rIns="0" bIns="0" anchor="t">
+          <a:bodyPr xmlns:a="http://schemas.openxmlformats.org/drawingml/2006/main" wrap="square" lIns="0" tIns="0" rIns="0" bIns="0" anchor="ctr">
             <a:normAutofit fontScale="100000"/>
           </a:bodyPr>
           <a:lstStyle xmlns:a="http://schemas.openxmlformats.org/drawingml/2006/main"/>
           <a:p xmlns:a="http://schemas.openxmlformats.org/drawingml/2006/main">
-            <a:pPr algn="l">
+            <a:pPr algn="ctr">
               <a:lnSpc>
-                <a:spcPct val="95000"/>
+                <a:spcPct val="100000"/>
               </a:lnSpc>
               <a:buNone/>
-              <a:defRPr sz="2325" b="1" i="0">
-                <a:solidFill>
-                  <a:srgbClr val="162A3C"/>
+              <a:defRPr sz="2850" b="1" i="0">
+                <a:solidFill>
+                  <a:srgbClr val="C57A42"/>
                 </a:solidFill>
                 <a:latin typeface="Aptos Display"/>
                 <a:ea typeface="Aptos Display"/>
@@ -10304,52 +8263,25 @@
               </a:defRPr>
             </a:pPr>
             <a:r>
-              <a:rPr sz="2325" b="1" i="0">
-                <a:solidFill>
-                  <a:srgbClr val="162A3C"/>
+              <a:rPr sz="2850" b="1" i="0">
+                <a:solidFill>
+                  <a:srgbClr val="C57A42"/>
                 </a:solidFill>
                 <a:latin typeface="Aptos Display"/>
                 <a:ea typeface="Aptos Display"/>
                 <a:cs typeface="Aptos Display"/>
               </a:rPr>
-              <a:t>“I can offer you a discount</a:t>
-            </a:r>
-          </a:p>
-          <a:p xmlns:a="http://schemas.openxmlformats.org/drawingml/2006/main">
-            <a:pPr algn="l">
-              <a:lnSpc>
-                <a:spcPct val="95000"/>
-              </a:lnSpc>
-              <a:buNone/>
-              <a:defRPr sz="2325" b="1" i="0">
-                <a:solidFill>
-                  <a:srgbClr val="162A3C"/>
-                </a:solidFill>
-                <a:latin typeface="Aptos Display"/>
-                <a:ea typeface="Aptos Display"/>
-                <a:cs typeface="Aptos Display"/>
-              </a:defRPr>
-            </a:pPr>
-            <a:r>
-              <a:rPr sz="2325" b="1" i="0">
-                <a:solidFill>
-                  <a:srgbClr val="162A3C"/>
-                </a:solidFill>
-                <a:latin typeface="Aptos Display"/>
-                <a:ea typeface="Aptos Display"/>
-                <a:cs typeface="Aptos Display"/>
-              </a:rPr>
-              <a:t>on your next six months.”</a:t>
+              <a:t>→</a:t>
             </a:r>
           </a:p>
         </p:txBody>
       </p:sp>
       <p:sp>
         <p:nvSpPr>
-          <p:cNvPr id="7" name="result-prev-evidence">
+          <p:cNvPr id="9" name="result-this-label">
             <a:extLst xmlns:a="http://schemas.openxmlformats.org/drawingml/2006/main">
               <a:ext uri="{FF2B5EF4-FFF2-40B4-BE49-F238E27FC236}">
-                <a16:creationId xmlns:a16="http://schemas.microsoft.com/office/drawing/2014/main" id="{59085DB6-5549-48D0-9FD5-2FF7A9E425B3}"/>
+                <a16:creationId xmlns:a16="http://schemas.microsoft.com/office/drawing/2014/main" id="{083470FB-9D9A-4423-8ED0-9724D1CC048B}"/>
               </a:ext>
             </a:extLst>
           </p:cNvPr>
@@ -10360,8 +8292,8 @@
         </p:nvSpPr>
         <p:spPr>
           <a:xfrm xmlns:a="http://schemas.openxmlformats.org/drawingml/2006/main">
-            <a:off x="685800" y="4572000"/>
-            <a:ext cx="4381500" cy="666750"/>
+            <a:off x="6934200" y="1885950"/>
+            <a:ext cx="4572000" cy="285750"/>
           </a:xfrm>
           <a:prstGeom xmlns:a="http://schemas.openxmlformats.org/drawingml/2006/main" prst="rect">
             <a:avLst/>
@@ -10388,12 +8320,12 @@
           <a:p xmlns:a="http://schemas.openxmlformats.org/drawingml/2006/main">
             <a:pPr algn="l">
               <a:lnSpc>
-                <a:spcPct val="105000"/>
+                <a:spcPct val="100000"/>
               </a:lnSpc>
               <a:buNone/>
-              <a:defRPr sz="1500" b="0" i="0">
-                <a:solidFill>
-                  <a:srgbClr val="5B6670"/>
+              <a:defRPr sz="1350" b="1" i="0">
+                <a:solidFill>
+                  <a:srgbClr val="2D6F6B"/>
                 </a:solidFill>
                 <a:latin typeface="Aptos"/>
                 <a:ea typeface="Aptos"/>
@@ -10401,52 +8333,25 @@
               </a:defRPr>
             </a:pPr>
             <a:r>
-              <a:rPr sz="1500" b="0" i="0">
-                <a:solidFill>
-                  <a:srgbClr val="5B6670"/>
+              <a:rPr sz="1350" b="1" i="0">
+                <a:solidFill>
+                  <a:srgbClr val="2D6F6B"/>
                 </a:solidFill>
                 <a:latin typeface="Aptos"/>
                 <a:ea typeface="Aptos"/>
                 <a:cs typeface="Aptos"/>
               </a:rPr>
-              <a:t>Criterion 3 · Not met</a:t>
-            </a:r>
-          </a:p>
-          <a:p xmlns:a="http://schemas.openxmlformats.org/drawingml/2006/main">
-            <a:pPr algn="l">
-              <a:lnSpc>
-                <a:spcPct val="105000"/>
-              </a:lnSpc>
-              <a:buNone/>
-              <a:defRPr sz="1500" b="0" i="0">
-                <a:solidFill>
-                  <a:srgbClr val="5B6670"/>
-                </a:solidFill>
-                <a:latin typeface="Aptos"/>
-                <a:ea typeface="Aptos"/>
-                <a:cs typeface="Aptos"/>
-              </a:defRPr>
-            </a:pPr>
-            <a:r>
-              <a:rPr sz="1500" b="0" i="0">
-                <a:solidFill>
-                  <a:srgbClr val="5B6670"/>
-                </a:solidFill>
-                <a:latin typeface="Aptos"/>
-                <a:ea typeface="Aptos"/>
-                <a:cs typeface="Aptos"/>
-              </a:rPr>
-              <a:t>The opening offer foreclosed discovery.</a:t>
+              <a:t>THIS ATTEMPT</a:t>
             </a:r>
           </a:p>
         </p:txBody>
       </p:sp>
       <p:sp>
         <p:nvSpPr>
-          <p:cNvPr id="8" name="result-arrow">
+          <p:cNvPr id="10" name="result-this-score">
             <a:extLst xmlns:a="http://schemas.openxmlformats.org/drawingml/2006/main">
               <a:ext uri="{FF2B5EF4-FFF2-40B4-BE49-F238E27FC236}">
-                <a16:creationId xmlns:a16="http://schemas.microsoft.com/office/drawing/2014/main" id="{DE98F228-8E5E-4F6F-876D-A5D449EC403B}"/>
+                <a16:creationId xmlns:a16="http://schemas.microsoft.com/office/drawing/2014/main" id="{14E800BF-2276-41EF-8BE3-BEBF53F861EE}"/>
               </a:ext>
             </a:extLst>
           </p:cNvPr>
@@ -10457,8 +8362,8 @@
         </p:nvSpPr>
         <p:spPr>
           <a:xfrm xmlns:a="http://schemas.openxmlformats.org/drawingml/2006/main">
-            <a:off x="5467350" y="3009900"/>
-            <a:ext cx="1104900" cy="457200"/>
+            <a:off x="6915150" y="2305050"/>
+            <a:ext cx="2286000" cy="914400"/>
           </a:xfrm>
           <a:prstGeom xmlns:a="http://schemas.openxmlformats.org/drawingml/2006/main" prst="rect">
             <a:avLst/>
@@ -10478,19 +8383,19 @@
           </a:ln>
         </p:spPr>
         <p:txBody>
-          <a:bodyPr xmlns:a="http://schemas.openxmlformats.org/drawingml/2006/main" wrap="square" lIns="0" tIns="0" rIns="0" bIns="0" anchor="ctr">
+          <a:bodyPr xmlns:a="http://schemas.openxmlformats.org/drawingml/2006/main" wrap="square" lIns="0" tIns="0" rIns="0" bIns="0" anchor="t">
             <a:normAutofit fontScale="100000"/>
           </a:bodyPr>
           <a:lstStyle xmlns:a="http://schemas.openxmlformats.org/drawingml/2006/main"/>
           <a:p xmlns:a="http://schemas.openxmlformats.org/drawingml/2006/main">
-            <a:pPr algn="ctr">
+            <a:pPr algn="l">
               <a:lnSpc>
                 <a:spcPct val="100000"/>
               </a:lnSpc>
               <a:buNone/>
-              <a:defRPr sz="2850" b="1" i="0">
-                <a:solidFill>
-                  <a:srgbClr val="C57A42"/>
+              <a:defRPr sz="5550" b="1" i="0">
+                <a:solidFill>
+                  <a:srgbClr val="2D6F6B"/>
                 </a:solidFill>
                 <a:latin typeface="Aptos Display"/>
                 <a:ea typeface="Aptos Display"/>
@@ -10498,25 +8403,25 @@
               </a:defRPr>
             </a:pPr>
             <a:r>
-              <a:rPr sz="2850" b="1" i="0">
-                <a:solidFill>
-                  <a:srgbClr val="C57A42"/>
+              <a:rPr sz="5550" b="1" i="0">
+                <a:solidFill>
+                  <a:srgbClr val="2D6F6B"/>
                 </a:solidFill>
                 <a:latin typeface="Aptos Display"/>
                 <a:ea typeface="Aptos Display"/>
                 <a:cs typeface="Aptos Display"/>
               </a:rPr>
-              <a:t>→</a:t>
+              <a:t>6/6</a:t>
             </a:r>
           </a:p>
         </p:txBody>
       </p:sp>
       <p:sp>
         <p:nvSpPr>
-          <p:cNvPr id="9" name="result-this-label">
+          <p:cNvPr id="11" name="result-this-quote">
             <a:extLst xmlns:a="http://schemas.openxmlformats.org/drawingml/2006/main">
               <a:ext uri="{FF2B5EF4-FFF2-40B4-BE49-F238E27FC236}">
-                <a16:creationId xmlns:a16="http://schemas.microsoft.com/office/drawing/2014/main" id="{083470FB-9D9A-4423-8ED0-9724D1CC048B}"/>
+                <a16:creationId xmlns:a16="http://schemas.microsoft.com/office/drawing/2014/main" id="{7755CA97-C3A4-4F0E-AB5D-BF637A962BB9}"/>
               </a:ext>
             </a:extLst>
           </p:cNvPr>
@@ -10527,8 +8432,8 @@
         </p:nvSpPr>
         <p:spPr>
           <a:xfrm xmlns:a="http://schemas.openxmlformats.org/drawingml/2006/main">
-            <a:off x="6934200" y="2076450"/>
-            <a:ext cx="4572000" cy="285750"/>
+            <a:off x="6915150" y="3333750"/>
+            <a:ext cx="4667250" cy="1581150"/>
           </a:xfrm>
           <a:prstGeom xmlns:a="http://schemas.openxmlformats.org/drawingml/2006/main" prst="rect">
             <a:avLst/>
@@ -10549,88 +8454,45 @@
         </p:spPr>
         <p:txBody>
           <a:bodyPr xmlns:a="http://schemas.openxmlformats.org/drawingml/2006/main" wrap="square" lIns="0" tIns="0" rIns="0" bIns="0" anchor="t">
-            <a:normAutofit fontScale="100000"/>
+            <a:noAutofit/>
           </a:bodyPr>
           <a:lstStyle xmlns:a="http://schemas.openxmlformats.org/drawingml/2006/main"/>
           <a:p xmlns:a="http://schemas.openxmlformats.org/drawingml/2006/main">
             <a:pPr algn="l">
               <a:lnSpc>
-                <a:spcPct val="100000"/>
+                <a:spcPct val="96000"/>
               </a:lnSpc>
               <a:buNone/>
-              <a:defRPr sz="1350" b="1" i="0">
-                <a:solidFill>
-                  <a:srgbClr val="2D6F6B"/>
-                </a:solidFill>
-                <a:latin typeface="Aptos"/>
-                <a:ea typeface="Aptos"/>
-                <a:cs typeface="Aptos"/>
+              <a:defRPr sz="1800" b="1" i="0">
+                <a:solidFill>
+                  <a:srgbClr val="162A3C"/>
+                </a:solidFill>
+                <a:latin typeface="Aptos Display"/>
+                <a:ea typeface="Aptos Display"/>
+                <a:cs typeface="Aptos Display"/>
               </a:defRPr>
             </a:pPr>
             <a:r>
-              <a:rPr sz="1350" b="1" i="0">
-                <a:solidFill>
-                  <a:srgbClr val="2D6F6B"/>
-                </a:solidFill>
-                <a:latin typeface="Aptos"/>
-                <a:ea typeface="Aptos"/>
-                <a:cs typeface="Aptos"/>
+              <a:rPr sz="1800" b="1" i="0">
+                <a:solidFill>
+                  <a:srgbClr val="162A3C"/>
+                </a:solidFill>
+                <a:latin typeface="Aptos Display"/>
+                <a:ea typeface="Aptos Display"/>
+                <a:cs typeface="Aptos Display"/>
               </a:rPr>
-              <a:t>THIS ATTEMPT</a:t>
-            </a:r>
-          </a:p>
-        </p:txBody>
-      </p:sp>
-      <p:sp>
-        <p:nvSpPr>
-          <p:cNvPr id="10" name="result-this-score">
-            <a:extLst xmlns:a="http://schemas.openxmlformats.org/drawingml/2006/main">
-              <a:ext uri="{FF2B5EF4-FFF2-40B4-BE49-F238E27FC236}">
-                <a16:creationId xmlns:a16="http://schemas.microsoft.com/office/drawing/2014/main" id="{14E800BF-2276-41EF-8BE3-BEBF53F861EE}"/>
-              </a:ext>
-            </a:extLst>
-          </p:cNvPr>
-          <p:cNvSpPr>
-            <a:spLocks xmlns:a="http://schemas.openxmlformats.org/drawingml/2006/main" noGrp="1"/>
-          </p:cNvSpPr>
-          <p:nvPr/>
-        </p:nvSpPr>
-        <p:spPr>
-          <a:xfrm xmlns:a="http://schemas.openxmlformats.org/drawingml/2006/main">
-            <a:off x="6915150" y="2400300"/>
-            <a:ext cx="2286000" cy="914400"/>
-          </a:xfrm>
-          <a:prstGeom xmlns:a="http://schemas.openxmlformats.org/drawingml/2006/main" prst="rect">
-            <a:avLst/>
-          </a:prstGeom>
-          <a:solidFill xmlns:a="http://schemas.openxmlformats.org/drawingml/2006/main">
-            <a:srgbClr val="000000">
-              <a:alpha val="0"/>
-            </a:srgbClr>
-          </a:solidFill>
-          <a:ln xmlns:a="http://schemas.openxmlformats.org/drawingml/2006/main" w="0">
-            <a:solidFill>
-              <a:srgbClr val="000000">
-                <a:alpha val="0"/>
-              </a:srgbClr>
-            </a:solidFill>
-            <a:prstDash val="solid"/>
-          </a:ln>
-        </p:spPr>
-        <p:txBody>
-          <a:bodyPr xmlns:a="http://schemas.openxmlformats.org/drawingml/2006/main" wrap="square" lIns="0" tIns="0" rIns="0" bIns="0" anchor="t">
-            <a:normAutofit fontScale="100000"/>
-          </a:bodyPr>
-          <a:lstStyle xmlns:a="http://schemas.openxmlformats.org/drawingml/2006/main"/>
+              <a:t>“Three weeks ago I called with a simple question,</a:t>
+            </a:r>
+          </a:p>
           <a:p xmlns:a="http://schemas.openxmlformats.org/drawingml/2006/main">
             <a:pPr algn="l">
               <a:lnSpc>
-                <a:spcPct val="100000"/>
+                <a:spcPct val="96000"/>
               </a:lnSpc>
               <a:buNone/>
-              <a:defRPr sz="5550" b="1" i="0">
-                <a:solidFill>
-                  <a:srgbClr val="2D6F6B"/>
+              <a:defRPr sz="1800" b="1" i="0">
+                <a:solidFill>
+                  <a:srgbClr val="162A3C"/>
                 </a:solidFill>
                 <a:latin typeface="Aptos Display"/>
                 <a:ea typeface="Aptos Display"/>
@@ -10638,67 +8500,24 @@
               </a:defRPr>
             </a:pPr>
             <a:r>
-              <a:rPr sz="5550" b="1" i="0">
-                <a:solidFill>
-                  <a:srgbClr val="2D6F6B"/>
+              <a:rPr sz="1800" b="1" i="0">
+                <a:solidFill>
+                  <a:srgbClr val="162A3C"/>
                 </a:solidFill>
                 <a:latin typeface="Aptos Display"/>
                 <a:ea typeface="Aptos Display"/>
                 <a:cs typeface="Aptos Display"/>
               </a:rPr>
-              <a:t>6/6</a:t>
-            </a:r>
-          </a:p>
-        </p:txBody>
-      </p:sp>
-      <p:sp>
-        <p:nvSpPr>
-          <p:cNvPr id="11" name="result-this-quote">
-            <a:extLst xmlns:a="http://schemas.openxmlformats.org/drawingml/2006/main">
-              <a:ext uri="{FF2B5EF4-FFF2-40B4-BE49-F238E27FC236}">
-                <a16:creationId xmlns:a16="http://schemas.microsoft.com/office/drawing/2014/main" id="{7755CA97-C3A4-4F0E-AB5D-BF637A962BB9}"/>
-              </a:ext>
-            </a:extLst>
-          </p:cNvPr>
-          <p:cNvSpPr>
-            <a:spLocks xmlns:a="http://schemas.openxmlformats.org/drawingml/2006/main" noGrp="1"/>
-          </p:cNvSpPr>
-          <p:nvPr/>
-        </p:nvSpPr>
-        <p:spPr>
-          <a:xfrm xmlns:a="http://schemas.openxmlformats.org/drawingml/2006/main">
-            <a:off x="6915150" y="3352800"/>
-            <a:ext cx="4667250" cy="1257300"/>
-          </a:xfrm>
-          <a:prstGeom xmlns:a="http://schemas.openxmlformats.org/drawingml/2006/main" prst="rect">
-            <a:avLst/>
-          </a:prstGeom>
-          <a:solidFill xmlns:a="http://schemas.openxmlformats.org/drawingml/2006/main">
-            <a:srgbClr val="000000">
-              <a:alpha val="0"/>
-            </a:srgbClr>
-          </a:solidFill>
-          <a:ln xmlns:a="http://schemas.openxmlformats.org/drawingml/2006/main" w="0">
-            <a:solidFill>
-              <a:srgbClr val="000000">
-                <a:alpha val="0"/>
-              </a:srgbClr>
-            </a:solidFill>
-            <a:prstDash val="solid"/>
-          </a:ln>
-        </p:spPr>
-        <p:txBody>
-          <a:bodyPr xmlns:a="http://schemas.openxmlformats.org/drawingml/2006/main" wrap="square" lIns="0" tIns="0" rIns="0" bIns="0" anchor="t">
-            <a:normAutofit fontScale="100000"/>
-          </a:bodyPr>
-          <a:lstStyle xmlns:a="http://schemas.openxmlformats.org/drawingml/2006/main"/>
+              <a:t>and the representative was rushed and dismissive.</a:t>
+            </a:r>
+          </a:p>
           <a:p xmlns:a="http://schemas.openxmlformats.org/drawingml/2006/main">
             <a:pPr algn="l">
               <a:lnSpc>
-                <a:spcPct val="95000"/>
+                <a:spcPct val="96000"/>
               </a:lnSpc>
               <a:buNone/>
-              <a:defRPr sz="1725" b="1" i="0">
+              <a:defRPr sz="1800" b="1" i="0">
                 <a:solidFill>
                   <a:srgbClr val="162A3C"/>
                 </a:solidFill>
@@ -10708,61 +8527,7 @@
               </a:defRPr>
             </a:pPr>
             <a:r>
-              <a:rPr sz="1725" b="1" i="0">
-                <a:solidFill>
-                  <a:srgbClr val="162A3C"/>
-                </a:solidFill>
-                <a:latin typeface="Aptos Display"/>
-                <a:ea typeface="Aptos Display"/>
-                <a:cs typeface="Aptos Display"/>
-              </a:rPr>
-              <a:t>“Three weeks ago I called with a simple question,</a:t>
-            </a:r>
-          </a:p>
-          <a:p xmlns:a="http://schemas.openxmlformats.org/drawingml/2006/main">
-            <a:pPr algn="l">
-              <a:lnSpc>
-                <a:spcPct val="95000"/>
-              </a:lnSpc>
-              <a:buNone/>
-              <a:defRPr sz="1725" b="1" i="0">
-                <a:solidFill>
-                  <a:srgbClr val="162A3C"/>
-                </a:solidFill>
-                <a:latin typeface="Aptos Display"/>
-                <a:ea typeface="Aptos Display"/>
-                <a:cs typeface="Aptos Display"/>
-              </a:defRPr>
-            </a:pPr>
-            <a:r>
-              <a:rPr sz="1725" b="1" i="0">
-                <a:solidFill>
-                  <a:srgbClr val="162A3C"/>
-                </a:solidFill>
-                <a:latin typeface="Aptos Display"/>
-                <a:ea typeface="Aptos Display"/>
-                <a:cs typeface="Aptos Display"/>
-              </a:rPr>
-              <a:t>and the representative was rushed and dismissive.</a:t>
-            </a:r>
-          </a:p>
-          <a:p xmlns:a="http://schemas.openxmlformats.org/drawingml/2006/main">
-            <a:pPr algn="l">
-              <a:lnSpc>
-                <a:spcPct val="95000"/>
-              </a:lnSpc>
-              <a:buNone/>
-              <a:defRPr sz="1725" b="1" i="0">
-                <a:solidFill>
-                  <a:srgbClr val="162A3C"/>
-                </a:solidFill>
-                <a:latin typeface="Aptos Display"/>
-                <a:ea typeface="Aptos Display"/>
-                <a:cs typeface="Aptos Display"/>
-              </a:defRPr>
-            </a:pPr>
-            <a:r>
-              <a:rPr sz="1725" b="1" i="0">
+              <a:rPr sz="1800" b="1" i="0">
                 <a:solidFill>
                   <a:srgbClr val="162A3C"/>
                 </a:solidFill>
@@ -10771,208 +8536,6 @@
                 <a:cs typeface="Aptos Display"/>
               </a:rPr>
               <a:t>They made me feel stupid for asking.”</a:t>
-            </a:r>
-          </a:p>
-        </p:txBody>
-      </p:sp>
-      <p:sp>
-        <p:nvSpPr>
-          <p:cNvPr id="12" name="result-this-evidence">
-            <a:extLst xmlns:a="http://schemas.openxmlformats.org/drawingml/2006/main">
-              <a:ext uri="{FF2B5EF4-FFF2-40B4-BE49-F238E27FC236}">
-                <a16:creationId xmlns:a16="http://schemas.microsoft.com/office/drawing/2014/main" id="{49CDC0D8-12D0-409A-8309-2EE37AB7424B}"/>
-              </a:ext>
-            </a:extLst>
-          </p:cNvPr>
-          <p:cNvSpPr>
-            <a:spLocks xmlns:a="http://schemas.openxmlformats.org/drawingml/2006/main" noGrp="1"/>
-          </p:cNvSpPr>
-          <p:nvPr/>
-        </p:nvSpPr>
-        <p:spPr>
-          <a:xfrm xmlns:a="http://schemas.openxmlformats.org/drawingml/2006/main">
-            <a:off x="6915150" y="4572000"/>
-            <a:ext cx="4381500" cy="666750"/>
-          </a:xfrm>
-          <a:prstGeom xmlns:a="http://schemas.openxmlformats.org/drawingml/2006/main" prst="rect">
-            <a:avLst/>
-          </a:prstGeom>
-          <a:solidFill xmlns:a="http://schemas.openxmlformats.org/drawingml/2006/main">
-            <a:srgbClr val="000000">
-              <a:alpha val="0"/>
-            </a:srgbClr>
-          </a:solidFill>
-          <a:ln xmlns:a="http://schemas.openxmlformats.org/drawingml/2006/main" w="0">
-            <a:solidFill>
-              <a:srgbClr val="000000">
-                <a:alpha val="0"/>
-              </a:srgbClr>
-            </a:solidFill>
-            <a:prstDash val="solid"/>
-          </a:ln>
-        </p:spPr>
-        <p:txBody>
-          <a:bodyPr xmlns:a="http://schemas.openxmlformats.org/drawingml/2006/main" wrap="square" lIns="0" tIns="0" rIns="0" bIns="0" anchor="t">
-            <a:normAutofit fontScale="100000"/>
-          </a:bodyPr>
-          <a:lstStyle xmlns:a="http://schemas.openxmlformats.org/drawingml/2006/main"/>
-          <a:p xmlns:a="http://schemas.openxmlformats.org/drawingml/2006/main">
-            <a:pPr algn="l">
-              <a:lnSpc>
-                <a:spcPct val="105000"/>
-              </a:lnSpc>
-              <a:buNone/>
-              <a:defRPr sz="1500" b="0" i="0">
-                <a:solidFill>
-                  <a:srgbClr val="5B6670"/>
-                </a:solidFill>
-                <a:latin typeface="Aptos"/>
-                <a:ea typeface="Aptos"/>
-                <a:cs typeface="Aptos"/>
-              </a:defRPr>
-            </a:pPr>
-            <a:r>
-              <a:rPr sz="1500" b="0" i="0">
-                <a:solidFill>
-                  <a:srgbClr val="5B6670"/>
-                </a:solidFill>
-                <a:latin typeface="Aptos"/>
-                <a:ea typeface="Aptos"/>
-                <a:cs typeface="Aptos"/>
-              </a:rPr>
-              <a:t>Criterion 3 · Met</a:t>
-            </a:r>
-          </a:p>
-          <a:p xmlns:a="http://schemas.openxmlformats.org/drawingml/2006/main">
-            <a:pPr algn="l">
-              <a:lnSpc>
-                <a:spcPct val="105000"/>
-              </a:lnSpc>
-              <a:buNone/>
-              <a:defRPr sz="1500" b="0" i="0">
-                <a:solidFill>
-                  <a:srgbClr val="5B6670"/>
-                </a:solidFill>
-                <a:latin typeface="Aptos"/>
-                <a:ea typeface="Aptos"/>
-                <a:cs typeface="Aptos"/>
-              </a:defRPr>
-            </a:pPr>
-            <a:r>
-              <a:rPr sz="1500" b="0" i="0">
-                <a:solidFill>
-                  <a:srgbClr val="5B6670"/>
-                </a:solidFill>
-                <a:latin typeface="Aptos"/>
-                <a:ea typeface="Aptos"/>
-                <a:cs typeface="Aptos"/>
-              </a:rPr>
-              <a:t>Jordan’s exact disclosure is the evidence.</a:t>
-            </a:r>
-          </a:p>
-        </p:txBody>
-      </p:sp>
-      <p:sp>
-        <p:nvSpPr>
-          <p:cNvPr id="13" name="result-bottom-rule">
-            <a:extLst xmlns:a="http://schemas.openxmlformats.org/drawingml/2006/main">
-              <a:ext uri="{FF2B5EF4-FFF2-40B4-BE49-F238E27FC236}">
-                <a16:creationId xmlns:a16="http://schemas.microsoft.com/office/drawing/2014/main" id="{7D161D37-0826-4A58-9DC5-90DDD89E74F1}"/>
-              </a:ext>
-            </a:extLst>
-          </p:cNvPr>
-          <p:cNvSpPr>
-            <a:spLocks xmlns:a="http://schemas.openxmlformats.org/drawingml/2006/main" noGrp="1"/>
-          </p:cNvSpPr>
-          <p:nvPr/>
-        </p:nvSpPr>
-        <p:spPr>
-          <a:xfrm xmlns:a="http://schemas.openxmlformats.org/drawingml/2006/main">
-            <a:off x="685800" y="5562600"/>
-            <a:ext cx="10820400" cy="0"/>
-          </a:xfrm>
-          <a:prstGeom xmlns:a="http://schemas.openxmlformats.org/drawingml/2006/main" prst="line">
-            <a:avLst/>
-          </a:prstGeom>
-          <a:solidFill xmlns:a="http://schemas.openxmlformats.org/drawingml/2006/main">
-            <a:srgbClr val="000000">
-              <a:alpha val="0"/>
-            </a:srgbClr>
-          </a:solidFill>
-          <a:ln xmlns:a="http://schemas.openxmlformats.org/drawingml/2006/main" w="9525">
-            <a:solidFill>
-              <a:srgbClr val="C8C0B3"/>
-            </a:solidFill>
-            <a:prstDash val="solid"/>
-          </a:ln>
-        </p:spPr>
-      </p:sp>
-      <p:sp>
-        <p:nvSpPr>
-          <p:cNvPr id="14" name="result-credibility">
-            <a:extLst xmlns:a="http://schemas.openxmlformats.org/drawingml/2006/main">
-              <a:ext uri="{FF2B5EF4-FFF2-40B4-BE49-F238E27FC236}">
-                <a16:creationId xmlns:a16="http://schemas.microsoft.com/office/drawing/2014/main" id="{DD52FF41-C55B-41BA-AF3E-4436EE06CB7E}"/>
-              </a:ext>
-            </a:extLst>
-          </p:cNvPr>
-          <p:cNvSpPr>
-            <a:spLocks xmlns:a="http://schemas.openxmlformats.org/drawingml/2006/main" noGrp="1"/>
-          </p:cNvSpPr>
-          <p:nvPr/>
-        </p:nvSpPr>
-        <p:spPr>
-          <a:xfrm xmlns:a="http://schemas.openxmlformats.org/drawingml/2006/main">
-            <a:off x="685800" y="5753100"/>
-            <a:ext cx="10820400" cy="323850"/>
-          </a:xfrm>
-          <a:prstGeom xmlns:a="http://schemas.openxmlformats.org/drawingml/2006/main" prst="rect">
-            <a:avLst/>
-          </a:prstGeom>
-          <a:solidFill xmlns:a="http://schemas.openxmlformats.org/drawingml/2006/main">
-            <a:srgbClr val="000000">
-              <a:alpha val="0"/>
-            </a:srgbClr>
-          </a:solidFill>
-          <a:ln xmlns:a="http://schemas.openxmlformats.org/drawingml/2006/main" w="0">
-            <a:solidFill>
-              <a:srgbClr val="000000">
-                <a:alpha val="0"/>
-              </a:srgbClr>
-            </a:solidFill>
-            <a:prstDash val="solid"/>
-          </a:ln>
-        </p:spPr>
-        <p:txBody>
-          <a:bodyPr xmlns:a="http://schemas.openxmlformats.org/drawingml/2006/main" wrap="square" lIns="0" tIns="0" rIns="0" bIns="0" anchor="t">
-            <a:normAutofit fontScale="100000"/>
-          </a:bodyPr>
-          <a:lstStyle xmlns:a="http://schemas.openxmlformats.org/drawingml/2006/main"/>
-          <a:p xmlns:a="http://schemas.openxmlformats.org/drawingml/2006/main">
-            <a:pPr algn="ctr">
-              <a:lnSpc>
-                <a:spcPct val="100000"/>
-              </a:lnSpc>
-              <a:buNone/>
-              <a:defRPr sz="1725" b="1" i="0">
-                <a:solidFill>
-                  <a:srgbClr val="162A3C"/>
-                </a:solidFill>
-                <a:latin typeface="Aptos"/>
-                <a:ea typeface="Aptos"/>
-                <a:cs typeface="Aptos"/>
-              </a:defRPr>
-            </a:pPr>
-            <a:r>
-              <a:rPr sz="1725" b="1" i="0">
-                <a:solidFill>
-                  <a:srgbClr val="162A3C"/>
-                </a:solidFill>
-                <a:latin typeface="Aptos"/>
-                <a:ea typeface="Aptos"/>
-                <a:cs typeface="Aptos"/>
-              </a:rPr>
-              <a:t>Fixed Rubric  ·  isolated Assessment  ·  exact Transcript evidence  ·  Feedback cannot revise verdicts</a:t>
             </a:r>
           </a:p>
         </p:txBody>
@@ -11210,10 +8773,10 @@
       </p:sp>
       <p:sp>
         <p:nvSpPr>
-          <p:cNvPr id="3" name="applications-first">
+          <p:cNvPr id="4" name="applications-main">
             <a:extLst xmlns:a="http://schemas.openxmlformats.org/drawingml/2006/main">
               <a:ext uri="{FF2B5EF4-FFF2-40B4-BE49-F238E27FC236}">
-                <a16:creationId xmlns:a16="http://schemas.microsoft.com/office/drawing/2014/main" id="{E20EB2B5-8091-4F99-AB05-BE911E2661ED}"/>
+                <a16:creationId xmlns:a16="http://schemas.microsoft.com/office/drawing/2014/main" id="{DE0DC126-81E2-4A0E-98D5-1C3445BB71AC}"/>
               </a:ext>
             </a:extLst>
           </p:cNvPr>
@@ -11224,8 +8787,8 @@
         </p:nvSpPr>
         <p:spPr>
           <a:xfrm xmlns:a="http://schemas.openxmlformats.org/drawingml/2006/main">
-            <a:off x="685800" y="1771650"/>
-            <a:ext cx="4000500" cy="285750"/>
+            <a:off x="685800" y="2362200"/>
+            <a:ext cx="5715000" cy="1143000"/>
           </a:xfrm>
           <a:prstGeom xmlns:a="http://schemas.openxmlformats.org/drawingml/2006/main" prst="rect">
             <a:avLst/>
@@ -11245,45 +8808,72 @@
           </a:ln>
         </p:spPr>
         <p:txBody>
-          <a:bodyPr xmlns:a="http://schemas.openxmlformats.org/drawingml/2006/main" wrap="square" lIns="0" tIns="0" rIns="0" bIns="0" anchor="t">
-            <a:normAutofit fontScale="100000"/>
+          <a:bodyPr xmlns:a="http://schemas.openxmlformats.org/drawingml/2006/main" wrap="square" lIns="0" tIns="0" rIns="0" bIns="0" anchor="ctr">
+            <a:noAutofit/>
           </a:bodyPr>
           <a:lstStyle xmlns:a="http://schemas.openxmlformats.org/drawingml/2006/main"/>
           <a:p xmlns:a="http://schemas.openxmlformats.org/drawingml/2006/main">
             <a:pPr algn="l">
               <a:lnSpc>
-                <a:spcPct val="100000"/>
+                <a:spcPct val="94000"/>
               </a:lnSpc>
               <a:buNone/>
-              <a:defRPr sz="1350" b="1" i="0">
-                <a:solidFill>
-                  <a:srgbClr val="2D6F6B"/>
-                </a:solidFill>
-                <a:latin typeface="Aptos"/>
-                <a:ea typeface="Aptos"/>
-                <a:cs typeface="Aptos"/>
+              <a:defRPr sz="3225" b="1" i="0">
+                <a:solidFill>
+                  <a:srgbClr val="162A3C"/>
+                </a:solidFill>
+                <a:latin typeface="Aptos Display"/>
+                <a:ea typeface="Aptos Display"/>
+                <a:cs typeface="Aptos Display"/>
               </a:defRPr>
             </a:pPr>
             <a:r>
-              <a:rPr sz="1350" b="1" i="0">
-                <a:solidFill>
-                  <a:srgbClr val="2D6F6B"/>
-                </a:solidFill>
-                <a:latin typeface="Aptos"/>
-                <a:ea typeface="Aptos"/>
-                <a:cs typeface="Aptos"/>
+              <a:rPr sz="3225" b="1" i="0">
+                <a:solidFill>
+                  <a:srgbClr val="162A3C"/>
+                </a:solidFill>
+                <a:latin typeface="Aptos Display"/>
+                <a:ea typeface="Aptos Display"/>
+                <a:cs typeface="Aptos Display"/>
               </a:rPr>
-              <a:t>FIRST APPLICATION</a:t>
+              <a:t>Frontline customer</a:t>
+            </a:r>
+          </a:p>
+          <a:p xmlns:a="http://schemas.openxmlformats.org/drawingml/2006/main">
+            <a:pPr algn="l">
+              <a:lnSpc>
+                <a:spcPct val="94000"/>
+              </a:lnSpc>
+              <a:buNone/>
+              <a:defRPr sz="3225" b="1" i="0">
+                <a:solidFill>
+                  <a:srgbClr val="162A3C"/>
+                </a:solidFill>
+                <a:latin typeface="Aptos Display"/>
+                <a:ea typeface="Aptos Display"/>
+                <a:cs typeface="Aptos Display"/>
+              </a:defRPr>
+            </a:pPr>
+            <a:r>
+              <a:rPr sz="3225" b="1" i="0">
+                <a:solidFill>
+                  <a:srgbClr val="162A3C"/>
+                </a:solidFill>
+                <a:latin typeface="Aptos Display"/>
+                <a:ea typeface="Aptos Display"/>
+                <a:cs typeface="Aptos Display"/>
+              </a:rPr>
+              <a:t>conversations</a:t>
             </a:r>
           </a:p>
         </p:txBody>
       </p:sp>
       <p:sp>
         <p:nvSpPr>
-          <p:cNvPr id="4" name="applications-main">
+          <p:cNvPr id="5" name="applications-why">
             <a:extLst xmlns:a="http://schemas.openxmlformats.org/drawingml/2006/main">
               <a:ext uri="{FF2B5EF4-FFF2-40B4-BE49-F238E27FC236}">
-                <a16:creationId xmlns:a16="http://schemas.microsoft.com/office/drawing/2014/main" id="{DE0DC126-81E2-4A0E-98D5-1C3445BB71AC}"/>
+                <a16:creationId xmlns:a16="http://schemas.microsoft.com/office/drawing/2014/main" id="{29BC2DE1-C6A9-4BC9-AC77-CA4784DC1AF4}"/>
               </a:ext>
             </a:extLst>
           </p:cNvPr>
@@ -11294,8 +8884,8 @@
         </p:nvSpPr>
         <p:spPr>
           <a:xfrm xmlns:a="http://schemas.openxmlformats.org/drawingml/2006/main">
-            <a:off x="685800" y="2209800"/>
-            <a:ext cx="5715000" cy="2781300"/>
+            <a:off x="685800" y="3886200"/>
+            <a:ext cx="5619750" cy="685800"/>
           </a:xfrm>
           <a:prstGeom xmlns:a="http://schemas.openxmlformats.org/drawingml/2006/main" prst="rect">
             <a:avLst/>
@@ -11316,125 +8906,44 @@
         </p:spPr>
         <p:txBody>
           <a:bodyPr xmlns:a="http://schemas.openxmlformats.org/drawingml/2006/main" wrap="square" lIns="0" tIns="0" rIns="0" bIns="0" anchor="t">
-            <a:normAutofit fontScale="100000"/>
+            <a:noAutofit/>
           </a:bodyPr>
           <a:lstStyle xmlns:a="http://schemas.openxmlformats.org/drawingml/2006/main"/>
           <a:p xmlns:a="http://schemas.openxmlformats.org/drawingml/2006/main">
             <a:pPr algn="l">
               <a:lnSpc>
-                <a:spcPct val="98000"/>
+                <a:spcPct val="105000"/>
               </a:lnSpc>
               <a:buNone/>
-              <a:defRPr sz="3450" b="1" i="0">
-                <a:solidFill>
-                  <a:srgbClr val="162A3C"/>
-                </a:solidFill>
-                <a:latin typeface="Aptos Display"/>
-                <a:ea typeface="Aptos Display"/>
-                <a:cs typeface="Aptos Display"/>
+              <a:defRPr sz="1800" b="0" i="0">
+                <a:solidFill>
+                  <a:srgbClr val="5B6670"/>
+                </a:solidFill>
+                <a:latin typeface="Aptos"/>
+                <a:ea typeface="Aptos"/>
+                <a:cs typeface="Aptos"/>
               </a:defRPr>
             </a:pPr>
             <a:r>
-              <a:rPr sz="3450" b="1" i="0">
-                <a:solidFill>
-                  <a:srgbClr val="162A3C"/>
-                </a:solidFill>
-                <a:latin typeface="Aptos Display"/>
-                <a:ea typeface="Aptos Display"/>
-                <a:cs typeface="Aptos Display"/>
+              <a:rPr sz="1800" b="0" i="0">
+                <a:solidFill>
+                  <a:srgbClr val="5B6670"/>
+                </a:solidFill>
+                <a:latin typeface="Aptos"/>
+                <a:ea typeface="Aptos"/>
+                <a:cs typeface="Aptos"/>
               </a:rPr>
-              <a:t>Frontline service</a:t>
-            </a:r>
-          </a:p>
-          <a:p xmlns:a="http://schemas.openxmlformats.org/drawingml/2006/main">
-            <a:pPr algn="l">
-              <a:lnSpc>
-                <a:spcPct val="98000"/>
-              </a:lnSpc>
-              <a:buNone/>
-              <a:defRPr sz="3450" b="1" i="0">
-                <a:solidFill>
-                  <a:srgbClr val="162A3C"/>
-                </a:solidFill>
-                <a:latin typeface="Aptos Display"/>
-                <a:ea typeface="Aptos Display"/>
-                <a:cs typeface="Aptos Display"/>
-              </a:defRPr>
-            </a:pPr>
-            <a:r>
-              <a:rPr sz="3450" b="1" i="0">
-                <a:solidFill>
-                  <a:srgbClr val="162A3C"/>
-                </a:solidFill>
-                <a:latin typeface="Aptos Display"/>
-                <a:ea typeface="Aptos Display"/>
-                <a:cs typeface="Aptos Display"/>
-              </a:rPr>
-              <a:t>Complaints</a:t>
-            </a:r>
-          </a:p>
-          <a:p xmlns:a="http://schemas.openxmlformats.org/drawingml/2006/main">
-            <a:pPr algn="l">
-              <a:lnSpc>
-                <a:spcPct val="98000"/>
-              </a:lnSpc>
-              <a:buNone/>
-              <a:defRPr sz="3450" b="1" i="0">
-                <a:solidFill>
-                  <a:srgbClr val="162A3C"/>
-                </a:solidFill>
-                <a:latin typeface="Aptos Display"/>
-                <a:ea typeface="Aptos Display"/>
-                <a:cs typeface="Aptos Display"/>
-              </a:defRPr>
-            </a:pPr>
-            <a:r>
-              <a:rPr sz="3450" b="1" i="0">
-                <a:solidFill>
-                  <a:srgbClr val="162A3C"/>
-                </a:solidFill>
-                <a:latin typeface="Aptos Display"/>
-                <a:ea typeface="Aptos Display"/>
-                <a:cs typeface="Aptos Display"/>
-              </a:rPr>
-              <a:t>Retention</a:t>
-            </a:r>
-          </a:p>
-          <a:p xmlns:a="http://schemas.openxmlformats.org/drawingml/2006/main">
-            <a:pPr algn="l">
-              <a:lnSpc>
-                <a:spcPct val="98000"/>
-              </a:lnSpc>
-              <a:buNone/>
-              <a:defRPr sz="3450" b="1" i="0">
-                <a:solidFill>
-                  <a:srgbClr val="162A3C"/>
-                </a:solidFill>
-                <a:latin typeface="Aptos Display"/>
-                <a:ea typeface="Aptos Display"/>
-                <a:cs typeface="Aptos Display"/>
-              </a:defRPr>
-            </a:pPr>
-            <a:r>
-              <a:rPr sz="3450" b="1" i="0">
-                <a:solidFill>
-                  <a:srgbClr val="162A3C"/>
-                </a:solidFill>
-                <a:latin typeface="Aptos Display"/>
-                <a:ea typeface="Aptos Display"/>
-                <a:cs typeface="Aptos Display"/>
-              </a:rPr>
-              <a:t>Emotionally charged moments</a:t>
+              <a:t>Service, complaints, retention, and emotionally charged moments where listening shapes what happens next.</a:t>
             </a:r>
           </a:p>
         </p:txBody>
       </p:sp>
       <p:sp>
         <p:nvSpPr>
-          <p:cNvPr id="5" name="applications-why">
+          <p:cNvPr id="6" name="applications-extension-bg">
             <a:extLst xmlns:a="http://schemas.openxmlformats.org/drawingml/2006/main">
               <a:ext uri="{FF2B5EF4-FFF2-40B4-BE49-F238E27FC236}">
-                <a16:creationId xmlns:a16="http://schemas.microsoft.com/office/drawing/2014/main" id="{29BC2DE1-C6A9-4BC9-AC77-CA4784DC1AF4}"/>
+                <a16:creationId xmlns:a16="http://schemas.microsoft.com/office/drawing/2014/main" id="{366453D8-9477-4A3F-97EB-BDE8B79E5852}"/>
               </a:ext>
             </a:extLst>
           </p:cNvPr>
@@ -11445,16 +8954,16 @@
         </p:nvSpPr>
         <p:spPr>
           <a:xfrm xmlns:a="http://schemas.openxmlformats.org/drawingml/2006/main">
-            <a:off x="685800" y="5219700"/>
-            <a:ext cx="5810250" cy="685800"/>
+            <a:off x="7086600" y="1790700"/>
+            <a:ext cx="4419600" cy="4114800"/>
           </a:xfrm>
-          <a:prstGeom xmlns:a="http://schemas.openxmlformats.org/drawingml/2006/main" prst="rect">
-            <a:avLst/>
+          <a:prstGeom xmlns:a="http://schemas.openxmlformats.org/drawingml/2006/main" prst="roundRect">
+            <a:avLst>
+              <a:gd name="adj" fmla="val 5556"/>
+            </a:avLst>
           </a:prstGeom>
           <a:solidFill xmlns:a="http://schemas.openxmlformats.org/drawingml/2006/main">
-            <a:srgbClr val="000000">
-              <a:alpha val="0"/>
-            </a:srgbClr>
+            <a:srgbClr val="DCE8E3"/>
           </a:solidFill>
           <a:ln xmlns:a="http://schemas.openxmlformats.org/drawingml/2006/main" w="0">
             <a:solidFill>
@@ -11465,46 +8974,13 @@
             <a:prstDash val="solid"/>
           </a:ln>
         </p:spPr>
-        <p:txBody>
-          <a:bodyPr xmlns:a="http://schemas.openxmlformats.org/drawingml/2006/main" wrap="square" lIns="0" tIns="0" rIns="0" bIns="0" anchor="t">
-            <a:normAutofit fontScale="100000"/>
-          </a:bodyPr>
-          <a:lstStyle xmlns:a="http://schemas.openxmlformats.org/drawingml/2006/main"/>
-          <a:p xmlns:a="http://schemas.openxmlformats.org/drawingml/2006/main">
-            <a:pPr algn="l">
-              <a:lnSpc>
-                <a:spcPct val="105000"/>
-              </a:lnSpc>
-              <a:buNone/>
-              <a:defRPr sz="1725" b="0" i="0">
-                <a:solidFill>
-                  <a:srgbClr val="5B6670"/>
-                </a:solidFill>
-                <a:latin typeface="Aptos"/>
-                <a:ea typeface="Aptos"/>
-                <a:cs typeface="Aptos"/>
-              </a:defRPr>
-            </a:pPr>
-            <a:r>
-              <a:rPr sz="1725" b="0" i="0">
-                <a:solidFill>
-                  <a:srgbClr val="5B6670"/>
-                </a:solidFill>
-                <a:latin typeface="Aptos"/>
-                <a:ea typeface="Aptos"/>
-                <a:cs typeface="Aptos"/>
-              </a:rPr>
-              <a:t>The same pattern recurs: a visible demand may sit on top of an experience the Trainee has not yet understood.</a:t>
-            </a:r>
-          </a:p>
-        </p:txBody>
-      </p:sp>
-      <p:sp>
-        <p:nvSpPr>
-          <p:cNvPr id="6" name="applications-extension-bg">
+      </p:sp>
+      <p:sp>
+        <p:nvSpPr>
+          <p:cNvPr id="8" name="applications-extension-title">
             <a:extLst xmlns:a="http://schemas.openxmlformats.org/drawingml/2006/main">
               <a:ext uri="{FF2B5EF4-FFF2-40B4-BE49-F238E27FC236}">
-                <a16:creationId xmlns:a16="http://schemas.microsoft.com/office/drawing/2014/main" id="{366453D8-9477-4A3F-97EB-BDE8B79E5852}"/>
+                <a16:creationId xmlns:a16="http://schemas.microsoft.com/office/drawing/2014/main" id="{7B4F8389-A326-42B2-A078-13506DB7F0FD}"/>
               </a:ext>
             </a:extLst>
           </p:cNvPr>
@@ -11515,16 +8991,16 @@
         </p:nvSpPr>
         <p:spPr>
           <a:xfrm xmlns:a="http://schemas.openxmlformats.org/drawingml/2006/main">
-            <a:off x="7086600" y="1790700"/>
-            <a:ext cx="4419600" cy="4114800"/>
+            <a:off x="7429500" y="2362200"/>
+            <a:ext cx="3543300" cy="1143000"/>
           </a:xfrm>
-          <a:prstGeom xmlns:a="http://schemas.openxmlformats.org/drawingml/2006/main" prst="roundRect">
-            <a:avLst>
-              <a:gd name="adj" fmla="val 5556"/>
-            </a:avLst>
+          <a:prstGeom xmlns:a="http://schemas.openxmlformats.org/drawingml/2006/main" prst="rect">
+            <a:avLst/>
           </a:prstGeom>
           <a:solidFill xmlns:a="http://schemas.openxmlformats.org/drawingml/2006/main">
-            <a:srgbClr val="DCE8E3"/>
+            <a:srgbClr val="000000">
+              <a:alpha val="0"/>
+            </a:srgbClr>
           </a:solidFill>
           <a:ln xmlns:a="http://schemas.openxmlformats.org/drawingml/2006/main" w="0">
             <a:solidFill>
@@ -11535,13 +9011,73 @@
             <a:prstDash val="solid"/>
           </a:ln>
         </p:spPr>
-      </p:sp>
-      <p:sp>
-        <p:nvSpPr>
-          <p:cNvPr id="7" name="applications-extension-label">
+        <p:txBody>
+          <a:bodyPr xmlns:a="http://schemas.openxmlformats.org/drawingml/2006/main" wrap="square" lIns="0" tIns="0" rIns="0" bIns="0" anchor="ctr">
+            <a:noAutofit/>
+          </a:bodyPr>
+          <a:lstStyle xmlns:a="http://schemas.openxmlformats.org/drawingml/2006/main"/>
+          <a:p xmlns:a="http://schemas.openxmlformats.org/drawingml/2006/main">
+            <a:pPr algn="l">
+              <a:lnSpc>
+                <a:spcPct val="94000"/>
+              </a:lnSpc>
+              <a:buNone/>
+              <a:defRPr sz="2925" b="1" i="0">
+                <a:solidFill>
+                  <a:srgbClr val="162A3C"/>
+                </a:solidFill>
+                <a:latin typeface="Aptos Display"/>
+                <a:ea typeface="Aptos Display"/>
+                <a:cs typeface="Aptos Display"/>
+              </a:defRPr>
+            </a:pPr>
+            <a:r>
+              <a:rPr sz="2925" b="1" i="0">
+                <a:solidFill>
+                  <a:srgbClr val="162A3C"/>
+                </a:solidFill>
+                <a:latin typeface="Aptos Display"/>
+                <a:ea typeface="Aptos Display"/>
+                <a:cs typeface="Aptos Display"/>
+              </a:rPr>
+              <a:t>Manager–employee</a:t>
+            </a:r>
+          </a:p>
+          <a:p xmlns:a="http://schemas.openxmlformats.org/drawingml/2006/main">
+            <a:pPr algn="l">
+              <a:lnSpc>
+                <a:spcPct val="94000"/>
+              </a:lnSpc>
+              <a:buNone/>
+              <a:defRPr sz="2925" b="1" i="0">
+                <a:solidFill>
+                  <a:srgbClr val="162A3C"/>
+                </a:solidFill>
+                <a:latin typeface="Aptos Display"/>
+                <a:ea typeface="Aptos Display"/>
+                <a:cs typeface="Aptos Display"/>
+              </a:defRPr>
+            </a:pPr>
+            <a:r>
+              <a:rPr sz="2925" b="1" i="0">
+                <a:solidFill>
+                  <a:srgbClr val="162A3C"/>
+                </a:solidFill>
+                <a:latin typeface="Aptos Display"/>
+                <a:ea typeface="Aptos Display"/>
+                <a:cs typeface="Aptos Display"/>
+              </a:rPr>
+              <a:t>conversations</a:t>
+            </a:r>
+          </a:p>
+        </p:txBody>
+      </p:sp>
+      <p:sp>
+        <p:nvSpPr>
+          <p:cNvPr id="9" name="applications-extension-copy">
             <a:extLst xmlns:a="http://schemas.openxmlformats.org/drawingml/2006/main">
               <a:ext uri="{FF2B5EF4-FFF2-40B4-BE49-F238E27FC236}">
-                <a16:creationId xmlns:a16="http://schemas.microsoft.com/office/drawing/2014/main" id="{F9140555-FB6A-43AD-89E2-C7FFC79D9581}"/>
+                <a16:creationId xmlns:a16="http://schemas.microsoft.com/office/drawing/2014/main" id="{B18CFE77-FCFB-43D1-AAB9-F8560BD28CF8}"/>
               </a:ext>
             </a:extLst>
           </p:cNvPr>
@@ -11552,8 +9088,8 @@
         </p:nvSpPr>
         <p:spPr>
           <a:xfrm xmlns:a="http://schemas.openxmlformats.org/drawingml/2006/main">
-            <a:off x="7429500" y="2152650"/>
-            <a:ext cx="3619500" cy="285750"/>
+            <a:off x="7429500" y="3886200"/>
+            <a:ext cx="3543300" cy="685800"/>
           </a:xfrm>
           <a:prstGeom xmlns:a="http://schemas.openxmlformats.org/drawingml/2006/main" prst="rect">
             <a:avLst/>
@@ -11574,147 +9110,7 @@
         </p:spPr>
         <p:txBody>
           <a:bodyPr xmlns:a="http://schemas.openxmlformats.org/drawingml/2006/main" wrap="square" lIns="0" tIns="0" rIns="0" bIns="0" anchor="t">
-            <a:normAutofit fontScale="100000"/>
-          </a:bodyPr>
-          <a:lstStyle xmlns:a="http://schemas.openxmlformats.org/drawingml/2006/main"/>
-          <a:p xmlns:a="http://schemas.openxmlformats.org/drawingml/2006/main">
-            <a:pPr algn="l">
-              <a:lnSpc>
-                <a:spcPct val="100000"/>
-              </a:lnSpc>
-              <a:buNone/>
-              <a:defRPr sz="1350" b="1" i="0">
-                <a:solidFill>
-                  <a:srgbClr val="2D6F6B"/>
-                </a:solidFill>
-                <a:latin typeface="Aptos"/>
-                <a:ea typeface="Aptos"/>
-                <a:cs typeface="Aptos"/>
-              </a:defRPr>
-            </a:pPr>
-            <a:r>
-              <a:rPr sz="1350" b="1" i="0">
-                <a:solidFill>
-                  <a:srgbClr val="2D6F6B"/>
-                </a:solidFill>
-                <a:latin typeface="Aptos"/>
-                <a:ea typeface="Aptos"/>
-                <a:cs typeface="Aptos"/>
-              </a:rPr>
-              <a:t>ONE CREDIBLE EXTENSION</a:t>
-            </a:r>
-          </a:p>
-        </p:txBody>
-      </p:sp>
-      <p:sp>
-        <p:nvSpPr>
-          <p:cNvPr id="8" name="applications-extension-title">
-            <a:extLst xmlns:a="http://schemas.openxmlformats.org/drawingml/2006/main">
-              <a:ext uri="{FF2B5EF4-FFF2-40B4-BE49-F238E27FC236}">
-                <a16:creationId xmlns:a16="http://schemas.microsoft.com/office/drawing/2014/main" id="{7B4F8389-A326-42B2-A078-13506DB7F0FD}"/>
-              </a:ext>
-            </a:extLst>
-          </p:cNvPr>
-          <p:cNvSpPr>
-            <a:spLocks xmlns:a="http://schemas.openxmlformats.org/drawingml/2006/main" noGrp="1"/>
-          </p:cNvSpPr>
-          <p:nvPr/>
-        </p:nvSpPr>
-        <p:spPr>
-          <a:xfrm xmlns:a="http://schemas.openxmlformats.org/drawingml/2006/main">
-            <a:off x="7429500" y="2686050"/>
-            <a:ext cx="3543300" cy="1028700"/>
-          </a:xfrm>
-          <a:prstGeom xmlns:a="http://schemas.openxmlformats.org/drawingml/2006/main" prst="rect">
-            <a:avLst/>
-          </a:prstGeom>
-          <a:solidFill xmlns:a="http://schemas.openxmlformats.org/drawingml/2006/main">
-            <a:srgbClr val="000000">
-              <a:alpha val="0"/>
-            </a:srgbClr>
-          </a:solidFill>
-          <a:ln xmlns:a="http://schemas.openxmlformats.org/drawingml/2006/main" w="0">
-            <a:solidFill>
-              <a:srgbClr val="000000">
-                <a:alpha val="0"/>
-              </a:srgbClr>
-            </a:solidFill>
-            <a:prstDash val="solid"/>
-          </a:ln>
-        </p:spPr>
-        <p:txBody>
-          <a:bodyPr xmlns:a="http://schemas.openxmlformats.org/drawingml/2006/main" wrap="square" lIns="0" tIns="0" rIns="0" bIns="0" anchor="t">
-            <a:normAutofit fontScale="84360"/>
-          </a:bodyPr>
-          <a:lstStyle xmlns:a="http://schemas.openxmlformats.org/drawingml/2006/main"/>
-          <a:p xmlns:a="http://schemas.openxmlformats.org/drawingml/2006/main">
-            <a:pPr algn="l">
-              <a:lnSpc>
-                <a:spcPct val="95000"/>
-              </a:lnSpc>
-              <a:buNone/>
-              <a:defRPr sz="2925" b="1" i="0">
-                <a:solidFill>
-                  <a:srgbClr val="162A3C"/>
-                </a:solidFill>
-                <a:latin typeface="Aptos Display"/>
-                <a:ea typeface="Aptos Display"/>
-                <a:cs typeface="Aptos Display"/>
-              </a:defRPr>
-            </a:pPr>
-            <a:r>
-              <a:rPr sz="2925" b="1" i="0">
-                <a:solidFill>
-                  <a:srgbClr val="162A3C"/>
-                </a:solidFill>
-                <a:latin typeface="Aptos Display"/>
-                <a:ea typeface="Aptos Display"/>
-                <a:cs typeface="Aptos Display"/>
-              </a:rPr>
-              <a:t>Difficult manager–employee conversations</a:t>
-            </a:r>
-          </a:p>
-        </p:txBody>
-      </p:sp>
-      <p:sp>
-        <p:nvSpPr>
-          <p:cNvPr id="9" name="applications-extension-copy">
-            <a:extLst xmlns:a="http://schemas.openxmlformats.org/drawingml/2006/main">
-              <a:ext uri="{FF2B5EF4-FFF2-40B4-BE49-F238E27FC236}">
-                <a16:creationId xmlns:a16="http://schemas.microsoft.com/office/drawing/2014/main" id="{B18CFE77-FCFB-43D1-AAB9-F8560BD28CF8}"/>
-              </a:ext>
-            </a:extLst>
-          </p:cNvPr>
-          <p:cNvSpPr>
-            <a:spLocks xmlns:a="http://schemas.openxmlformats.org/drawingml/2006/main" noGrp="1"/>
-          </p:cNvSpPr>
-          <p:nvPr/>
-        </p:nvSpPr>
-        <p:spPr>
-          <a:xfrm xmlns:a="http://schemas.openxmlformats.org/drawingml/2006/main">
-            <a:off x="7429500" y="3943350"/>
-            <a:ext cx="3543300" cy="819150"/>
-          </a:xfrm>
-          <a:prstGeom xmlns:a="http://schemas.openxmlformats.org/drawingml/2006/main" prst="rect">
-            <a:avLst/>
-          </a:prstGeom>
-          <a:solidFill xmlns:a="http://schemas.openxmlformats.org/drawingml/2006/main">
-            <a:srgbClr val="000000">
-              <a:alpha val="0"/>
-            </a:srgbClr>
-          </a:solidFill>
-          <a:ln xmlns:a="http://schemas.openxmlformats.org/drawingml/2006/main" w="0">
-            <a:solidFill>
-              <a:srgbClr val="000000">
-                <a:alpha val="0"/>
-              </a:srgbClr>
-            </a:solidFill>
-            <a:prstDash val="solid"/>
-          </a:ln>
-        </p:spPr>
-        <p:txBody>
-          <a:bodyPr xmlns:a="http://schemas.openxmlformats.org/drawingml/2006/main" wrap="square" lIns="0" tIns="0" rIns="0" bIns="0" anchor="t">
-            <a:normAutofit fontScale="100000"/>
+            <a:noAutofit/>
           </a:bodyPr>
           <a:lstStyle xmlns:a="http://schemas.openxmlformats.org/drawingml/2006/main"/>
           <a:p xmlns:a="http://schemas.openxmlformats.org/drawingml/2006/main">
@@ -11741,77 +9137,7 @@
                 <a:ea typeface="Aptos"/>
                 <a:cs typeface="Aptos"/>
               </a:rPr>
-              <a:t>Feedback  ·  accountability  ·  performance  ·  conflict</a:t>
-            </a:r>
-          </a:p>
-        </p:txBody>
-      </p:sp>
-      <p:sp>
-        <p:nvSpPr>
-          <p:cNvPr id="10" name="applications-extension-condition">
-            <a:extLst xmlns:a="http://schemas.openxmlformats.org/drawingml/2006/main">
-              <a:ext uri="{FF2B5EF4-FFF2-40B4-BE49-F238E27FC236}">
-                <a16:creationId xmlns:a16="http://schemas.microsoft.com/office/drawing/2014/main" id="{87D29D12-BF18-4A27-9C07-85651CFB217C}"/>
-              </a:ext>
-            </a:extLst>
-          </p:cNvPr>
-          <p:cNvSpPr>
-            <a:spLocks xmlns:a="http://schemas.openxmlformats.org/drawingml/2006/main" noGrp="1"/>
-          </p:cNvSpPr>
-          <p:nvPr/>
-        </p:nvSpPr>
-        <p:spPr>
-          <a:xfrm xmlns:a="http://schemas.openxmlformats.org/drawingml/2006/main">
-            <a:off x="7429500" y="5010150"/>
-            <a:ext cx="3543300" cy="590550"/>
-          </a:xfrm>
-          <a:prstGeom xmlns:a="http://schemas.openxmlformats.org/drawingml/2006/main" prst="rect">
-            <a:avLst/>
-          </a:prstGeom>
-          <a:solidFill xmlns:a="http://schemas.openxmlformats.org/drawingml/2006/main">
-            <a:srgbClr val="000000">
-              <a:alpha val="0"/>
-            </a:srgbClr>
-          </a:solidFill>
-          <a:ln xmlns:a="http://schemas.openxmlformats.org/drawingml/2006/main" w="0">
-            <a:solidFill>
-              <a:srgbClr val="000000">
-                <a:alpha val="0"/>
-              </a:srgbClr>
-            </a:solidFill>
-            <a:prstDash val="solid"/>
-          </a:ln>
-        </p:spPr>
-        <p:txBody>
-          <a:bodyPr xmlns:a="http://schemas.openxmlformats.org/drawingml/2006/main" wrap="square" lIns="0" tIns="0" rIns="0" bIns="0" anchor="t">
-            <a:normAutofit fontScale="100000"/>
-          </a:bodyPr>
-          <a:lstStyle xmlns:a="http://schemas.openxmlformats.org/drawingml/2006/main"/>
-          <a:p xmlns:a="http://schemas.openxmlformats.org/drawingml/2006/main">
-            <a:pPr algn="l">
-              <a:lnSpc>
-                <a:spcPct val="100000"/>
-              </a:lnSpc>
-              <a:buNone/>
-              <a:defRPr sz="1500" b="1" i="0">
-                <a:solidFill>
-                  <a:srgbClr val="2D6F6B"/>
-                </a:solidFill>
-                <a:latin typeface="Aptos"/>
-                <a:ea typeface="Aptos"/>
-                <a:cs typeface="Aptos"/>
-              </a:defRPr>
-            </a:pPr>
-            <a:r>
-              <a:rPr sz="1500" b="1" i="0">
-                <a:solidFill>
-                  <a:srgbClr val="2D6F6B"/>
-                </a:solidFill>
-                <a:latin typeface="Aptos"/>
-                <a:ea typeface="Aptos"/>
-                <a:cs typeface="Aptos"/>
-              </a:rPr>
-              <a:t>Each needs its own observable skill, authored Scenario, and stable Rubric.</a:t>
+              <a:t>Feedback, accountability, performance, and conflict—each grounded in one observable manager behavior.</a:t>
             </a:r>
           </a:p>
         </p:txBody>
@@ -11932,7 +9258,7 @@
         <p:spPr>
           <a:xfrm xmlns:a="http://schemas.openxmlformats.org/drawingml/2006/main">
             <a:off x="609600" y="400050"/>
-            <a:ext cx="10972800" cy="1066800"/>
+            <a:ext cx="10972800" cy="685800"/>
           </a:xfrm>
           <a:prstGeom xmlns:a="http://schemas.openxmlformats.org/drawingml/2006/main" prst="rect">
             <a:avLst/>
@@ -11953,7 +9279,7 @@
         </p:spPr>
         <p:txBody>
           <a:bodyPr xmlns:a="http://schemas.openxmlformats.org/drawingml/2006/main" wrap="square" lIns="0" tIns="0" rIns="0" bIns="0" anchor="t">
-            <a:normAutofit fontScale="100000"/>
+            <a:noAutofit/>
           </a:bodyPr>
           <a:lstStyle xmlns:a="http://schemas.openxmlformats.org/drawingml/2006/main"/>
           <a:p xmlns:a="http://schemas.openxmlformats.org/drawingml/2006/main">
@@ -11980,34 +9306,7 @@
                 <a:ea typeface="Aptos Display"/>
                 <a:cs typeface="Aptos Display"/>
               </a:rPr>
-              <a:t>This prototype proves the learning loop;</a:t>
-            </a:r>
-          </a:p>
-          <a:p xmlns:a="http://schemas.openxmlformats.org/drawingml/2006/main">
-            <a:pPr algn="l">
-              <a:lnSpc>
-                <a:spcPct val="93000"/>
-              </a:lnSpc>
-              <a:buNone/>
-              <a:defRPr sz="3600" b="1" i="0">
-                <a:solidFill>
-                  <a:srgbClr val="17222F"/>
-                </a:solidFill>
-                <a:latin typeface="Aptos Display"/>
-                <a:ea typeface="Aptos Display"/>
-                <a:cs typeface="Aptos Display"/>
-              </a:defRPr>
-            </a:pPr>
-            <a:r>
-              <a:rPr sz="3600" b="1" i="0">
-                <a:solidFill>
-                  <a:srgbClr val="17222F"/>
-                </a:solidFill>
-                <a:latin typeface="Aptos Display"/>
-                <a:ea typeface="Aptos Display"/>
-                <a:cs typeface="Aptos Display"/>
-              </a:rPr>
-              <a:t>the next proof is transfer</a:t>
+              <a:t>The next proof is transfer.</a:t>
             </a:r>
           </a:p>
         </p:txBody>
@@ -12049,10 +9348,10 @@
       </p:sp>
       <p:sp>
         <p:nvSpPr>
-          <p:cNvPr id="3" name="close-now-label">
+          <p:cNvPr id="5" name="close-divider">
             <a:extLst xmlns:a="http://schemas.openxmlformats.org/drawingml/2006/main">
               <a:ext uri="{FF2B5EF4-FFF2-40B4-BE49-F238E27FC236}">
-                <a16:creationId xmlns:a16="http://schemas.microsoft.com/office/drawing/2014/main" id="{6FFCCC01-FB63-4882-A3D1-272E9BC25A76}"/>
+                <a16:creationId xmlns:a16="http://schemas.microsoft.com/office/drawing/2014/main" id="{DBB6AC55-8811-4D17-A00B-00A1A73E31F5}"/>
               </a:ext>
             </a:extLst>
           </p:cNvPr>
@@ -12063,8 +9362,43 @@
         </p:nvSpPr>
         <p:spPr>
           <a:xfrm xmlns:a="http://schemas.openxmlformats.org/drawingml/2006/main">
-            <a:off x="685800" y="1790700"/>
-            <a:ext cx="4095750" cy="285750"/>
+            <a:off x="6096000" y="2171700"/>
+            <a:ext cx="0" cy="2571750"/>
+          </a:xfrm>
+          <a:prstGeom xmlns:a="http://schemas.openxmlformats.org/drawingml/2006/main" prst="line">
+            <a:avLst/>
+          </a:prstGeom>
+          <a:solidFill xmlns:a="http://schemas.openxmlformats.org/drawingml/2006/main">
+            <a:srgbClr val="000000">
+              <a:alpha val="0"/>
+            </a:srgbClr>
+          </a:solidFill>
+          <a:ln xmlns:a="http://schemas.openxmlformats.org/drawingml/2006/main" w="19050">
+            <a:solidFill>
+              <a:srgbClr val="C8C0B3"/>
+            </a:solidFill>
+            <a:prstDash val="solid"/>
+          </a:ln>
+        </p:spPr>
+      </p:sp>
+      <p:sp>
+        <p:nvSpPr>
+          <p:cNvPr id="7" name="close-next-title">
+            <a:extLst xmlns:a="http://schemas.openxmlformats.org/drawingml/2006/main">
+              <a:ext uri="{FF2B5EF4-FFF2-40B4-BE49-F238E27FC236}">
+                <a16:creationId xmlns:a16="http://schemas.microsoft.com/office/drawing/2014/main" id="{0CB5C7E0-BD46-49BF-BE1E-3742D5E39668}"/>
+              </a:ext>
+            </a:extLst>
+          </p:cNvPr>
+          <p:cNvSpPr>
+            <a:spLocks xmlns:a="http://schemas.openxmlformats.org/drawingml/2006/main" noGrp="1"/>
+          </p:cNvSpPr>
+          <p:nvPr/>
+        </p:nvSpPr>
+        <p:spPr>
+          <a:xfrm xmlns:a="http://schemas.openxmlformats.org/drawingml/2006/main">
+            <a:off x="800100" y="2647950"/>
+            <a:ext cx="4762500" cy="1428750"/>
           </a:xfrm>
           <a:prstGeom xmlns:a="http://schemas.openxmlformats.org/drawingml/2006/main" prst="rect">
             <a:avLst/>
@@ -12084,45 +9418,72 @@
           </a:ln>
         </p:spPr>
         <p:txBody>
-          <a:bodyPr xmlns:a="http://schemas.openxmlformats.org/drawingml/2006/main" wrap="square" lIns="0" tIns="0" rIns="0" bIns="0" anchor="t">
-            <a:normAutofit fontScale="100000"/>
+          <a:bodyPr xmlns:a="http://schemas.openxmlformats.org/drawingml/2006/main" wrap="square" lIns="0" tIns="0" rIns="0" bIns="0" anchor="ctr">
+            <a:noAutofit/>
           </a:bodyPr>
           <a:lstStyle xmlns:a="http://schemas.openxmlformats.org/drawingml/2006/main"/>
           <a:p xmlns:a="http://schemas.openxmlformats.org/drawingml/2006/main">
-            <a:pPr algn="l">
+            <a:pPr algn="ctr">
               <a:lnSpc>
-                <a:spcPct val="100000"/>
+                <a:spcPct val="95000"/>
               </a:lnSpc>
               <a:buNone/>
-              <a:defRPr sz="1350" b="1" i="0">
+              <a:defRPr sz="3300" b="1" i="0">
                 <a:solidFill>
                   <a:srgbClr val="2D6F6B"/>
                 </a:solidFill>
-                <a:latin typeface="Aptos"/>
-                <a:ea typeface="Aptos"/>
-                <a:cs typeface="Aptos"/>
+                <a:latin typeface="Aptos Display"/>
+                <a:ea typeface="Aptos Display"/>
+                <a:cs typeface="Aptos Display"/>
               </a:defRPr>
             </a:pPr>
             <a:r>
-              <a:rPr sz="1350" b="1" i="0">
+              <a:rPr sz="3300" b="1" i="0">
                 <a:solidFill>
                   <a:srgbClr val="2D6F6B"/>
                 </a:solidFill>
-                <a:latin typeface="Aptos"/>
-                <a:ea typeface="Aptos"/>
-                <a:cs typeface="Aptos"/>
+                <a:latin typeface="Aptos Display"/>
+                <a:ea typeface="Aptos Display"/>
+                <a:cs typeface="Aptos Display"/>
               </a:rPr>
-              <a:t>DEMONSTRATED NOW</a:t>
+              <a:t>Generalizes across</a:t>
+            </a:r>
+          </a:p>
+          <a:p xmlns:a="http://schemas.openxmlformats.org/drawingml/2006/main">
+            <a:pPr algn="ctr">
+              <a:lnSpc>
+                <a:spcPct val="95000"/>
+              </a:lnSpc>
+              <a:buNone/>
+              <a:defRPr sz="3300" b="1" i="0">
+                <a:solidFill>
+                  <a:srgbClr val="2D6F6B"/>
+                </a:solidFill>
+                <a:latin typeface="Aptos Display"/>
+                <a:ea typeface="Aptos Display"/>
+                <a:cs typeface="Aptos Display"/>
+              </a:defRPr>
+            </a:pPr>
+            <a:r>
+              <a:rPr sz="3300" b="1" i="0">
+                <a:solidFill>
+                  <a:srgbClr val="2D6F6B"/>
+                </a:solidFill>
+                <a:latin typeface="Aptos Display"/>
+                <a:ea typeface="Aptos Display"/>
+                <a:cs typeface="Aptos Display"/>
+              </a:rPr>
+              <a:t>scenarios</a:t>
             </a:r>
           </a:p>
         </p:txBody>
       </p:sp>
       <p:sp>
         <p:nvSpPr>
-          <p:cNvPr id="4" name="close-now">
+          <p:cNvPr id="9" name="close-next-title-2">
             <a:extLst xmlns:a="http://schemas.openxmlformats.org/drawingml/2006/main">
               <a:ext uri="{FF2B5EF4-FFF2-40B4-BE49-F238E27FC236}">
-                <a16:creationId xmlns:a16="http://schemas.microsoft.com/office/drawing/2014/main" id="{E11B8458-97CB-415D-B7F4-8CED366CF570}"/>
+                <a16:creationId xmlns:a16="http://schemas.microsoft.com/office/drawing/2014/main" id="{7A82194B-08A4-4ED1-9D08-CB8C5450693A}"/>
               </a:ext>
             </a:extLst>
           </p:cNvPr>
@@ -12133,8 +9494,8 @@
         </p:nvSpPr>
         <p:spPr>
           <a:xfrm xmlns:a="http://schemas.openxmlformats.org/drawingml/2006/main">
-            <a:off x="685800" y="2247900"/>
-            <a:ext cx="4762500" cy="2400300"/>
+            <a:off x="6629400" y="2647950"/>
+            <a:ext cx="4762500" cy="1428750"/>
           </a:xfrm>
           <a:prstGeom xmlns:a="http://schemas.openxmlformats.org/drawingml/2006/main" prst="rect">
             <a:avLst/>
@@ -12154,275 +9515,19 @@
           </a:ln>
         </p:spPr>
         <p:txBody>
-          <a:bodyPr xmlns:a="http://schemas.openxmlformats.org/drawingml/2006/main" wrap="square" lIns="0" tIns="0" rIns="0" bIns="0" anchor="t">
-            <a:normAutofit fontScale="100000"/>
+          <a:bodyPr xmlns:a="http://schemas.openxmlformats.org/drawingml/2006/main" wrap="square" lIns="0" tIns="0" rIns="0" bIns="0" anchor="ctr">
+            <a:noAutofit/>
           </a:bodyPr>
           <a:lstStyle xmlns:a="http://schemas.openxmlformats.org/drawingml/2006/main"/>
           <a:p xmlns:a="http://schemas.openxmlformats.org/drawingml/2006/main">
-            <a:pPr algn="l">
-              <a:lnSpc>
-                <a:spcPct val="105000"/>
-              </a:lnSpc>
-              <a:buNone/>
-              <a:defRPr sz="2025" b="0" i="0">
-                <a:solidFill>
-                  <a:srgbClr val="162A3C"/>
-                </a:solidFill>
-                <a:latin typeface="Aptos"/>
-                <a:ea typeface="Aptos"/>
-                <a:cs typeface="Aptos"/>
-              </a:defRPr>
-            </a:pPr>
-            <a:r>
-              <a:rPr sz="2025" b="0" i="0">
-                <a:solidFill>
-                  <a:srgbClr val="162A3C"/>
-                </a:solidFill>
-                <a:latin typeface="Aptos"/>
-                <a:ea typeface="Aptos"/>
-                <a:cs typeface="Aptos"/>
-              </a:rPr>
-              <a:t>• Authentic practice can be authored.</a:t>
-            </a:r>
-          </a:p>
-          <a:p xmlns:a="http://schemas.openxmlformats.org/drawingml/2006/main">
-            <a:pPr algn="l">
-              <a:lnSpc>
-                <a:spcPct val="105000"/>
-              </a:lnSpc>
-              <a:buNone/>
-              <a:defRPr sz="2025" b="0" i="0">
-                <a:solidFill>
-                  <a:srgbClr val="162A3C"/>
-                </a:solidFill>
-                <a:latin typeface="Aptos"/>
-                <a:ea typeface="Aptos"/>
-                <a:cs typeface="Aptos"/>
-              </a:defRPr>
-            </a:pPr>
-            <a:r>
-              <a:rPr sz="2025" b="0" i="0">
-                <a:solidFill>
-                  <a:srgbClr val="162A3C"/>
-                </a:solidFill>
-                <a:latin typeface="Aptos"/>
-                <a:ea typeface="Aptos"/>
-                <a:cs typeface="Aptos"/>
-              </a:rPr>
-              <a:t>• Behavior can be judged against a stable standard.</a:t>
-            </a:r>
-          </a:p>
-          <a:p xmlns:a="http://schemas.openxmlformats.org/drawingml/2006/main">
-            <a:pPr algn="l">
-              <a:lnSpc>
-                <a:spcPct val="105000"/>
-              </a:lnSpc>
-              <a:buNone/>
-              <a:defRPr sz="2025" b="0" i="0">
-                <a:solidFill>
-                  <a:srgbClr val="162A3C"/>
-                </a:solidFill>
-                <a:latin typeface="Aptos"/>
-                <a:ea typeface="Aptos"/>
-                <a:cs typeface="Aptos"/>
-              </a:defRPr>
-            </a:pPr>
-            <a:r>
-              <a:rPr sz="2025" b="0" i="0">
-                <a:solidFill>
-                  <a:srgbClr val="162A3C"/>
-                </a:solidFill>
-                <a:latin typeface="Aptos"/>
-                <a:ea typeface="Aptos"/>
-                <a:cs typeface="Aptos"/>
-              </a:rPr>
-              <a:t>• Coaching can point to the exact moment.</a:t>
-            </a:r>
-          </a:p>
-          <a:p xmlns:a="http://schemas.openxmlformats.org/drawingml/2006/main">
-            <a:pPr algn="l">
-              <a:lnSpc>
-                <a:spcPct val="105000"/>
-              </a:lnSpc>
-              <a:buNone/>
-              <a:defRPr sz="2025" b="0" i="0">
-                <a:solidFill>
-                  <a:srgbClr val="162A3C"/>
-                </a:solidFill>
-                <a:latin typeface="Aptos"/>
-                <a:ea typeface="Aptos"/>
-                <a:cs typeface="Aptos"/>
-              </a:defRPr>
-            </a:pPr>
-            <a:r>
-              <a:rPr sz="2025" b="0" i="0">
-                <a:solidFill>
-                  <a:srgbClr val="162A3C"/>
-                </a:solidFill>
-                <a:latin typeface="Aptos"/>
-                <a:ea typeface="Aptos"/>
-                <a:cs typeface="Aptos"/>
-              </a:rPr>
-              <a:t>• Improvement can be made visible.</a:t>
-            </a:r>
-          </a:p>
-        </p:txBody>
-      </p:sp>
-      <p:sp>
-        <p:nvSpPr>
-          <p:cNvPr id="5" name="close-divider">
-            <a:extLst xmlns:a="http://schemas.openxmlformats.org/drawingml/2006/main">
-              <a:ext uri="{FF2B5EF4-FFF2-40B4-BE49-F238E27FC236}">
-                <a16:creationId xmlns:a16="http://schemas.microsoft.com/office/drawing/2014/main" id="{DBB6AC55-8811-4D17-A00B-00A1A73E31F5}"/>
-              </a:ext>
-            </a:extLst>
-          </p:cNvPr>
-          <p:cNvSpPr>
-            <a:spLocks xmlns:a="http://schemas.openxmlformats.org/drawingml/2006/main" noGrp="1"/>
-          </p:cNvSpPr>
-          <p:nvPr/>
-        </p:nvSpPr>
-        <p:spPr>
-          <a:xfrm xmlns:a="http://schemas.openxmlformats.org/drawingml/2006/main">
-            <a:off x="5981700" y="1771650"/>
-            <a:ext cx="0" cy="3048000"/>
-          </a:xfrm>
-          <a:prstGeom xmlns:a="http://schemas.openxmlformats.org/drawingml/2006/main" prst="line">
-            <a:avLst/>
-          </a:prstGeom>
-          <a:solidFill xmlns:a="http://schemas.openxmlformats.org/drawingml/2006/main">
-            <a:srgbClr val="000000">
-              <a:alpha val="0"/>
-            </a:srgbClr>
-          </a:solidFill>
-          <a:ln xmlns:a="http://schemas.openxmlformats.org/drawingml/2006/main" w="19050">
-            <a:solidFill>
-              <a:srgbClr val="C8C0B3"/>
-            </a:solidFill>
-            <a:prstDash val="solid"/>
-          </a:ln>
-        </p:spPr>
-      </p:sp>
-      <p:sp>
-        <p:nvSpPr>
-          <p:cNvPr id="6" name="close-next-label">
-            <a:extLst xmlns:a="http://schemas.openxmlformats.org/drawingml/2006/main">
-              <a:ext uri="{FF2B5EF4-FFF2-40B4-BE49-F238E27FC236}">
-                <a16:creationId xmlns:a16="http://schemas.microsoft.com/office/drawing/2014/main" id="{B80185EE-84B8-46E2-AE4D-D32C301C0A08}"/>
-              </a:ext>
-            </a:extLst>
-          </p:cNvPr>
-          <p:cNvSpPr>
-            <a:spLocks xmlns:a="http://schemas.openxmlformats.org/drawingml/2006/main" noGrp="1"/>
-          </p:cNvSpPr>
-          <p:nvPr/>
-        </p:nvSpPr>
-        <p:spPr>
-          <a:xfrm xmlns:a="http://schemas.openxmlformats.org/drawingml/2006/main">
-            <a:off x="6553200" y="1790700"/>
-            <a:ext cx="4095750" cy="285750"/>
-          </a:xfrm>
-          <a:prstGeom xmlns:a="http://schemas.openxmlformats.org/drawingml/2006/main" prst="rect">
-            <a:avLst/>
-          </a:prstGeom>
-          <a:solidFill xmlns:a="http://schemas.openxmlformats.org/drawingml/2006/main">
-            <a:srgbClr val="000000">
-              <a:alpha val="0"/>
-            </a:srgbClr>
-          </a:solidFill>
-          <a:ln xmlns:a="http://schemas.openxmlformats.org/drawingml/2006/main" w="0">
-            <a:solidFill>
-              <a:srgbClr val="000000">
-                <a:alpha val="0"/>
-              </a:srgbClr>
-            </a:solidFill>
-            <a:prstDash val="solid"/>
-          </a:ln>
-        </p:spPr>
-        <p:txBody>
-          <a:bodyPr xmlns:a="http://schemas.openxmlformats.org/drawingml/2006/main" wrap="square" lIns="0" tIns="0" rIns="0" bIns="0" anchor="t">
-            <a:normAutofit fontScale="100000"/>
-          </a:bodyPr>
-          <a:lstStyle xmlns:a="http://schemas.openxmlformats.org/drawingml/2006/main"/>
-          <a:p xmlns:a="http://schemas.openxmlformats.org/drawingml/2006/main">
-            <a:pPr algn="l">
-              <a:lnSpc>
-                <a:spcPct val="100000"/>
-              </a:lnSpc>
-              <a:buNone/>
-              <a:defRPr sz="1350" b="1" i="0">
-                <a:solidFill>
-                  <a:srgbClr val="C57A42"/>
-                </a:solidFill>
-                <a:latin typeface="Aptos"/>
-                <a:ea typeface="Aptos"/>
-                <a:cs typeface="Aptos"/>
-              </a:defRPr>
-            </a:pPr>
-            <a:r>
-              <a:rPr sz="1350" b="1" i="0">
-                <a:solidFill>
-                  <a:srgbClr val="C57A42"/>
-                </a:solidFill>
-                <a:latin typeface="Aptos"/>
-                <a:ea typeface="Aptos"/>
-                <a:cs typeface="Aptos"/>
-              </a:rPr>
-              <a:t>THE NEXT PROOF</a:t>
-            </a:r>
-          </a:p>
-        </p:txBody>
-      </p:sp>
-      <p:sp>
-        <p:nvSpPr>
-          <p:cNvPr id="7" name="close-next-title">
-            <a:extLst xmlns:a="http://schemas.openxmlformats.org/drawingml/2006/main">
-              <a:ext uri="{FF2B5EF4-FFF2-40B4-BE49-F238E27FC236}">
-                <a16:creationId xmlns:a16="http://schemas.microsoft.com/office/drawing/2014/main" id="{0CB5C7E0-BD46-49BF-BE1E-3742D5E39668}"/>
-              </a:ext>
-            </a:extLst>
-          </p:cNvPr>
-          <p:cNvSpPr>
-            <a:spLocks xmlns:a="http://schemas.openxmlformats.org/drawingml/2006/main" noGrp="1"/>
-          </p:cNvSpPr>
-          <p:nvPr/>
-        </p:nvSpPr>
-        <p:spPr>
-          <a:xfrm xmlns:a="http://schemas.openxmlformats.org/drawingml/2006/main">
-            <a:off x="6553200" y="2266950"/>
-            <a:ext cx="4724400" cy="762000"/>
-          </a:xfrm>
-          <a:prstGeom xmlns:a="http://schemas.openxmlformats.org/drawingml/2006/main" prst="rect">
-            <a:avLst/>
-          </a:prstGeom>
-          <a:solidFill xmlns:a="http://schemas.openxmlformats.org/drawingml/2006/main">
-            <a:srgbClr val="000000">
-              <a:alpha val="0"/>
-            </a:srgbClr>
-          </a:solidFill>
-          <a:ln xmlns:a="http://schemas.openxmlformats.org/drawingml/2006/main" w="0">
-            <a:solidFill>
-              <a:srgbClr val="000000">
-                <a:alpha val="0"/>
-              </a:srgbClr>
-            </a:solidFill>
-            <a:prstDash val="solid"/>
-          </a:ln>
-        </p:spPr>
-        <p:txBody>
-          <a:bodyPr xmlns:a="http://schemas.openxmlformats.org/drawingml/2006/main" wrap="square" lIns="0" tIns="0" rIns="0" bIns="0" anchor="t">
-            <a:normAutofit fontScale="100000"/>
-          </a:bodyPr>
-          <a:lstStyle xmlns:a="http://schemas.openxmlformats.org/drawingml/2006/main"/>
-          <a:p xmlns:a="http://schemas.openxmlformats.org/drawingml/2006/main">
-            <a:pPr algn="l">
+            <a:pPr algn="ctr">
               <a:lnSpc>
                 <a:spcPct val="95000"/>
               </a:lnSpc>
               <a:buNone/>
-              <a:defRPr sz="2625" b="1" i="0">
-                <a:solidFill>
-                  <a:srgbClr val="162A3C"/>
+              <a:defRPr sz="3300" b="1" i="0">
+                <a:solidFill>
+                  <a:srgbClr val="C57A42"/>
                 </a:solidFill>
                 <a:latin typeface="Aptos Display"/>
                 <a:ea typeface="Aptos Display"/>
@@ -12430,332 +9535,15 @@
               </a:defRPr>
             </a:pPr>
             <a:r>
-              <a:rPr sz="2625" b="1" i="0">
-                <a:solidFill>
-                  <a:srgbClr val="162A3C"/>
+              <a:rPr sz="3300" b="1" i="0">
+                <a:solidFill>
+                  <a:srgbClr val="C57A42"/>
                 </a:solidFill>
                 <a:latin typeface="Aptos Display"/>
                 <a:ea typeface="Aptos Display"/>
                 <a:cs typeface="Aptos Display"/>
               </a:rPr>
-              <a:t>Generalization across varied Scenarios</a:t>
-            </a:r>
-          </a:p>
-        </p:txBody>
-      </p:sp>
-      <p:sp>
-        <p:nvSpPr>
-          <p:cNvPr id="8" name="close-plus">
-            <a:extLst xmlns:a="http://schemas.openxmlformats.org/drawingml/2006/main">
-              <a:ext uri="{FF2B5EF4-FFF2-40B4-BE49-F238E27FC236}">
-                <a16:creationId xmlns:a16="http://schemas.microsoft.com/office/drawing/2014/main" id="{B255B802-1E34-4B3A-BD23-107EB1F40B25}"/>
-              </a:ext>
-            </a:extLst>
-          </p:cNvPr>
-          <p:cNvSpPr>
-            <a:spLocks xmlns:a="http://schemas.openxmlformats.org/drawingml/2006/main" noGrp="1"/>
-          </p:cNvSpPr>
-          <p:nvPr/>
-        </p:nvSpPr>
-        <p:spPr>
-          <a:xfrm xmlns:a="http://schemas.openxmlformats.org/drawingml/2006/main">
-            <a:off x="6553200" y="3124200"/>
-            <a:ext cx="571500" cy="495300"/>
-          </a:xfrm>
-          <a:prstGeom xmlns:a="http://schemas.openxmlformats.org/drawingml/2006/main" prst="rect">
-            <a:avLst/>
-          </a:prstGeom>
-          <a:solidFill xmlns:a="http://schemas.openxmlformats.org/drawingml/2006/main">
-            <a:srgbClr val="000000">
-              <a:alpha val="0"/>
-            </a:srgbClr>
-          </a:solidFill>
-          <a:ln xmlns:a="http://schemas.openxmlformats.org/drawingml/2006/main" w="0">
-            <a:solidFill>
-              <a:srgbClr val="000000">
-                <a:alpha val="0"/>
-              </a:srgbClr>
-            </a:solidFill>
-            <a:prstDash val="solid"/>
-          </a:ln>
-        </p:spPr>
-        <p:txBody>
-          <a:bodyPr xmlns:a="http://schemas.openxmlformats.org/drawingml/2006/main" wrap="square" lIns="0" tIns="0" rIns="0" bIns="0" anchor="t">
-            <a:normAutofit fontScale="100000"/>
-          </a:bodyPr>
-          <a:lstStyle xmlns:a="http://schemas.openxmlformats.org/drawingml/2006/main"/>
-          <a:p xmlns:a="http://schemas.openxmlformats.org/drawingml/2006/main">
-            <a:pPr algn="l">
-              <a:lnSpc>
-                <a:spcPct val="100000"/>
-              </a:lnSpc>
-              <a:buNone/>
-              <a:defRPr sz="3150" b="1" i="0">
-                <a:solidFill>
-                  <a:srgbClr val="C57A42"/>
-                </a:solidFill>
-                <a:latin typeface="Aptos"/>
-                <a:ea typeface="Aptos"/>
-                <a:cs typeface="Aptos"/>
-              </a:defRPr>
-            </a:pPr>
-            <a:r>
-              <a:rPr sz="3150" b="1" i="0">
-                <a:solidFill>
-                  <a:srgbClr val="C57A42"/>
-                </a:solidFill>
-                <a:latin typeface="Aptos"/>
-                <a:ea typeface="Aptos"/>
-                <a:cs typeface="Aptos"/>
-              </a:rPr>
-              <a:t>+</a:t>
-            </a:r>
-          </a:p>
-        </p:txBody>
-      </p:sp>
-      <p:sp>
-        <p:nvSpPr>
-          <p:cNvPr id="9" name="close-next-title-2">
-            <a:extLst xmlns:a="http://schemas.openxmlformats.org/drawingml/2006/main">
-              <a:ext uri="{FF2B5EF4-FFF2-40B4-BE49-F238E27FC236}">
-                <a16:creationId xmlns:a16="http://schemas.microsoft.com/office/drawing/2014/main" id="{7A82194B-08A4-4ED1-9D08-CB8C5450693A}"/>
-              </a:ext>
-            </a:extLst>
-          </p:cNvPr>
-          <p:cNvSpPr>
-            <a:spLocks xmlns:a="http://schemas.openxmlformats.org/drawingml/2006/main" noGrp="1"/>
-          </p:cNvSpPr>
-          <p:nvPr/>
-        </p:nvSpPr>
-        <p:spPr>
-          <a:xfrm xmlns:a="http://schemas.openxmlformats.org/drawingml/2006/main">
-            <a:off x="7124700" y="3181350"/>
-            <a:ext cx="4152900" cy="723900"/>
-          </a:xfrm>
-          <a:prstGeom xmlns:a="http://schemas.openxmlformats.org/drawingml/2006/main" prst="rect">
-            <a:avLst/>
-          </a:prstGeom>
-          <a:solidFill xmlns:a="http://schemas.openxmlformats.org/drawingml/2006/main">
-            <a:srgbClr val="000000">
-              <a:alpha val="0"/>
-            </a:srgbClr>
-          </a:solidFill>
-          <a:ln xmlns:a="http://schemas.openxmlformats.org/drawingml/2006/main" w="0">
-            <a:solidFill>
-              <a:srgbClr val="000000">
-                <a:alpha val="0"/>
-              </a:srgbClr>
-            </a:solidFill>
-            <a:prstDash val="solid"/>
-          </a:ln>
-        </p:spPr>
-        <p:txBody>
-          <a:bodyPr xmlns:a="http://schemas.openxmlformats.org/drawingml/2006/main" wrap="square" lIns="0" tIns="0" rIns="0" bIns="0" anchor="t">
-            <a:normAutofit fontScale="95238"/>
-          </a:bodyPr>
-          <a:lstStyle xmlns:a="http://schemas.openxmlformats.org/drawingml/2006/main"/>
-          <a:p xmlns:a="http://schemas.openxmlformats.org/drawingml/2006/main">
-            <a:pPr algn="l">
-              <a:lnSpc>
-                <a:spcPct val="95000"/>
-              </a:lnSpc>
-              <a:buNone/>
-              <a:defRPr sz="2625" b="1" i="0">
-                <a:solidFill>
-                  <a:srgbClr val="162A3C"/>
-                </a:solidFill>
-                <a:latin typeface="Aptos Display"/>
-                <a:ea typeface="Aptos Display"/>
-                <a:cs typeface="Aptos Display"/>
-              </a:defRPr>
-            </a:pPr>
-            <a:r>
-              <a:rPr sz="2625" b="1" i="0">
-                <a:solidFill>
-                  <a:srgbClr val="162A3C"/>
-                </a:solidFill>
-                <a:latin typeface="Aptos Display"/>
-                <a:ea typeface="Aptos Display"/>
-                <a:cs typeface="Aptos Display"/>
-              </a:rPr>
-              <a:t>Sustained behavior at work over time</a:t>
-            </a:r>
-          </a:p>
-        </p:txBody>
-      </p:sp>
-      <p:sp>
-        <p:nvSpPr>
-          <p:cNvPr id="10" name="close-next-body">
-            <a:extLst xmlns:a="http://schemas.openxmlformats.org/drawingml/2006/main">
-              <a:ext uri="{FF2B5EF4-FFF2-40B4-BE49-F238E27FC236}">
-                <a16:creationId xmlns:a16="http://schemas.microsoft.com/office/drawing/2014/main" id="{7B9BFD39-9FA9-48A6-B0E2-0FA2E7D72ADE}"/>
-              </a:ext>
-            </a:extLst>
-          </p:cNvPr>
-          <p:cNvSpPr>
-            <a:spLocks xmlns:a="http://schemas.openxmlformats.org/drawingml/2006/main" noGrp="1"/>
-          </p:cNvSpPr>
-          <p:nvPr/>
-        </p:nvSpPr>
-        <p:spPr>
-          <a:xfrm xmlns:a="http://schemas.openxmlformats.org/drawingml/2006/main">
-            <a:off x="6553200" y="4114800"/>
-            <a:ext cx="4724400" cy="685800"/>
-          </a:xfrm>
-          <a:prstGeom xmlns:a="http://schemas.openxmlformats.org/drawingml/2006/main" prst="rect">
-            <a:avLst/>
-          </a:prstGeom>
-          <a:solidFill xmlns:a="http://schemas.openxmlformats.org/drawingml/2006/main">
-            <a:srgbClr val="000000">
-              <a:alpha val="0"/>
-            </a:srgbClr>
-          </a:solidFill>
-          <a:ln xmlns:a="http://schemas.openxmlformats.org/drawingml/2006/main" w="0">
-            <a:solidFill>
-              <a:srgbClr val="000000">
-                <a:alpha val="0"/>
-              </a:srgbClr>
-            </a:solidFill>
-            <a:prstDash val="solid"/>
-          </a:ln>
-        </p:spPr>
-        <p:txBody>
-          <a:bodyPr xmlns:a="http://schemas.openxmlformats.org/drawingml/2006/main" wrap="square" lIns="0" tIns="0" rIns="0" bIns="0" anchor="t">
-            <a:normAutofit fontScale="100000"/>
-          </a:bodyPr>
-          <a:lstStyle xmlns:a="http://schemas.openxmlformats.org/drawingml/2006/main"/>
-          <a:p xmlns:a="http://schemas.openxmlformats.org/drawingml/2006/main">
-            <a:pPr algn="l">
-              <a:lnSpc>
-                <a:spcPct val="105000"/>
-              </a:lnSpc>
-              <a:buNone/>
-              <a:defRPr sz="1725" b="0" i="0">
-                <a:solidFill>
-                  <a:srgbClr val="5B6670"/>
-                </a:solidFill>
-                <a:latin typeface="Aptos"/>
-                <a:ea typeface="Aptos"/>
-                <a:cs typeface="Aptos"/>
-              </a:defRPr>
-            </a:pPr>
-            <a:r>
-              <a:rPr sz="1725" b="0" i="0">
-                <a:solidFill>
-                  <a:srgbClr val="5B6670"/>
-                </a:solidFill>
-                <a:latin typeface="Aptos"/>
-                <a:ea typeface="Aptos"/>
-                <a:cs typeface="Aptos"/>
-              </a:rPr>
-              <a:t>That is the standard for a future program—not a claim this prototype makes today.</a:t>
-            </a:r>
-          </a:p>
-        </p:txBody>
-      </p:sp>
-      <p:sp>
-        <p:nvSpPr>
-          <p:cNvPr id="11" name="close-implication-bg">
-            <a:extLst xmlns:a="http://schemas.openxmlformats.org/drawingml/2006/main">
-              <a:ext uri="{FF2B5EF4-FFF2-40B4-BE49-F238E27FC236}">
-                <a16:creationId xmlns:a16="http://schemas.microsoft.com/office/drawing/2014/main" id="{84FF381D-5AAC-4283-8E87-01BEA22B7188}"/>
-              </a:ext>
-            </a:extLst>
-          </p:cNvPr>
-          <p:cNvSpPr>
-            <a:spLocks xmlns:a="http://schemas.openxmlformats.org/drawingml/2006/main" noGrp="1"/>
-          </p:cNvSpPr>
-          <p:nvPr/>
-        </p:nvSpPr>
-        <p:spPr>
-          <a:xfrm xmlns:a="http://schemas.openxmlformats.org/drawingml/2006/main">
-            <a:off x="685800" y="5219700"/>
-            <a:ext cx="10820400" cy="876300"/>
-          </a:xfrm>
-          <a:prstGeom xmlns:a="http://schemas.openxmlformats.org/drawingml/2006/main" prst="roundRect">
-            <a:avLst>
-              <a:gd name="adj" fmla="val 19565"/>
-            </a:avLst>
-          </a:prstGeom>
-          <a:solidFill xmlns:a="http://schemas.openxmlformats.org/drawingml/2006/main">
-            <a:srgbClr val="162A3C"/>
-          </a:solidFill>
-          <a:ln xmlns:a="http://schemas.openxmlformats.org/drawingml/2006/main" w="0">
-            <a:solidFill>
-              <a:srgbClr val="000000">
-                <a:alpha val="0"/>
-              </a:srgbClr>
-            </a:solidFill>
-            <a:prstDash val="solid"/>
-          </a:ln>
-        </p:spPr>
-      </p:sp>
-      <p:sp>
-        <p:nvSpPr>
-          <p:cNvPr id="12" name="close-implication">
-            <a:extLst xmlns:a="http://schemas.openxmlformats.org/drawingml/2006/main">
-              <a:ext uri="{FF2B5EF4-FFF2-40B4-BE49-F238E27FC236}">
-                <a16:creationId xmlns:a16="http://schemas.microsoft.com/office/drawing/2014/main" id="{FAE23EDF-C38B-4414-82C0-3080C1A4B8E6}"/>
-              </a:ext>
-            </a:extLst>
-          </p:cNvPr>
-          <p:cNvSpPr>
-            <a:spLocks xmlns:a="http://schemas.openxmlformats.org/drawingml/2006/main" noGrp="1"/>
-          </p:cNvSpPr>
-          <p:nvPr/>
-        </p:nvSpPr>
-        <p:spPr>
-          <a:xfrm xmlns:a="http://schemas.openxmlformats.org/drawingml/2006/main">
-            <a:off x="990600" y="5429250"/>
-            <a:ext cx="10210800" cy="457200"/>
-          </a:xfrm>
-          <a:prstGeom xmlns:a="http://schemas.openxmlformats.org/drawingml/2006/main" prst="rect">
-            <a:avLst/>
-          </a:prstGeom>
-          <a:solidFill xmlns:a="http://schemas.openxmlformats.org/drawingml/2006/main">
-            <a:srgbClr val="000000">
-              <a:alpha val="0"/>
-            </a:srgbClr>
-          </a:solidFill>
-          <a:ln xmlns:a="http://schemas.openxmlformats.org/drawingml/2006/main" w="0">
-            <a:solidFill>
-              <a:srgbClr val="000000">
-                <a:alpha val="0"/>
-              </a:srgbClr>
-            </a:solidFill>
-            <a:prstDash val="solid"/>
-          </a:ln>
-        </p:spPr>
-        <p:txBody>
-          <a:bodyPr xmlns:a="http://schemas.openxmlformats.org/drawingml/2006/main" wrap="square" lIns="0" tIns="0" rIns="0" bIns="0" anchor="ctr">
-            <a:normAutofit fontScale="92873"/>
-          </a:bodyPr>
-          <a:lstStyle xmlns:a="http://schemas.openxmlformats.org/drawingml/2006/main"/>
-          <a:p xmlns:a="http://schemas.openxmlformats.org/drawingml/2006/main">
-            <a:pPr algn="ctr">
-              <a:lnSpc>
-                <a:spcPct val="100000"/>
-              </a:lnSpc>
-              <a:buNone/>
-              <a:defRPr sz="2325" b="1" i="0">
-                <a:solidFill>
-                  <a:srgbClr val="FFFFFF"/>
-                </a:solidFill>
-                <a:latin typeface="Aptos Display"/>
-                <a:ea typeface="Aptos Display"/>
-                <a:cs typeface="Aptos Display"/>
-              </a:defRPr>
-            </a:pPr>
-            <a:r>
-              <a:rPr sz="2325" b="1" i="0">
-                <a:solidFill>
-                  <a:srgbClr val="FFFFFF"/>
-                </a:solidFill>
-                <a:latin typeface="Aptos Display"/>
-                <a:ea typeface="Aptos Display"/>
-                <a:cs typeface="Aptos Display"/>
-              </a:rPr>
-              <a:t>Governed AI becomes useful when it makes practice observable, repeatable, and improvable.</a:t>
+              <a:t>Persists at work</a:t>
             </a:r>
           </a:p>
         </p:txBody>
